--- a/public/fun/pack/pptx/review/보장점검양식_22_부부점검_섬마을선착장.pptx
+++ b/public/fun/pack/pptx/review/보장점검양식_22_부부점검_섬마을선착장.pptx
@@ -3286,14 +3286,6 @@
 <file path=ppt/slides/slide1.xml><?xml version="1.0" encoding="utf-8"?>
 <p:sld xmlns:a="http://schemas.openxmlformats.org/drawingml/2006/main" xmlns:p="http://schemas.openxmlformats.org/presentationml/2006/main" xmlns:r="http://schemas.openxmlformats.org/officeDocument/2006/relationships">
   <p:cSld>
-    <p:bg>
-      <p:bgPr>
-        <a:solidFill>
-          <a:srgbClr val="EFF5FA"/>
-        </a:solidFill>
-        <a:effectLst/>
-      </p:bgPr>
-    </p:bg>
     <p:spTree>
       <p:nvGrpSpPr>
         <p:cNvPr id="1" name=""/>
@@ -3301,157 +3293,30 @@
         <p:nvPr/>
       </p:nvGrpSpPr>
       <p:grpSpPr/>
-      <p:sp>
-        <p:nvSpPr>
-          <p:cNvPr id="3" name="장식"/>
-          <p:cNvSpPr/>
+      <p:pic>
+        <p:nvPicPr>
+          <p:cNvPr id="3" name="표지 그림" descr="review-22.jpg"/>
+          <p:cNvPicPr>
+            <a:picLocks noChangeAspect="1"/>
+          </p:cNvPicPr>
           <p:nvPr/>
-        </p:nvSpPr>
-        <p:spPr>
-          <a:xfrm>
-            <a:off x="7315017" y="960120"/>
-            <a:ext cx="3657508" cy="5897880"/>
-          </a:xfrm>
-          <a:prstGeom prst="round2SameRect">
-            <a:avLst>
-              <a:gd name="adj1" fmla="val 50000"/>
-              <a:gd name="adj2" fmla="val 0"/>
-            </a:avLst>
-          </a:prstGeom>
-          <a:solidFill>
-            <a:srgbClr val="CEE2F3"/>
-          </a:solidFill>
-          <a:ln>
-            <a:noFill/>
-          </a:ln>
-        </p:spPr>
-        <p:txBody>
-          <a:bodyPr rtlCol="0" anchor="ctr"/>
-          <a:lstStyle/>
-          <a:p>
-            <a:pPr algn="ctr"/>
-          </a:p>
-        </p:txBody>
-      </p:sp>
-      <p:sp>
-        <p:nvSpPr>
-          <p:cNvPr id="4" name="장식"/>
-          <p:cNvSpPr/>
-          <p:nvPr/>
-        </p:nvSpPr>
-        <p:spPr>
-          <a:xfrm>
-            <a:off x="7924601" y="1783080"/>
-            <a:ext cx="2438339" cy="5074920"/>
-          </a:xfrm>
-          <a:prstGeom prst="round2SameRect">
-            <a:avLst>
-              <a:gd name="adj1" fmla="val 50000"/>
-              <a:gd name="adj2" fmla="val 0"/>
-            </a:avLst>
-          </a:prstGeom>
-          <a:solidFill>
-            <a:srgbClr val="275A86"/>
-          </a:solidFill>
-          <a:ln>
-            <a:noFill/>
-          </a:ln>
-        </p:spPr>
-        <p:txBody>
-          <a:bodyPr rtlCol="0" anchor="ctr"/>
-          <a:lstStyle/>
-          <a:p>
-            <a:pPr algn="ctr"/>
-          </a:p>
-        </p:txBody>
-      </p:sp>
-      <p:sp>
-        <p:nvSpPr>
-          <p:cNvPr id="5" name="장식"/>
-          <p:cNvSpPr/>
-          <p:nvPr/>
-        </p:nvSpPr>
-        <p:spPr>
-          <a:xfrm>
-            <a:off x="8046518" y="3017533"/>
-            <a:ext cx="2194505" cy="548626"/>
-          </a:xfrm>
-          <a:prstGeom prst="wave">
+        </p:nvPicPr>
+        <p:blipFill>
+          <a:blip r:embed="rId2"/>
+          <a:stretch>
+            <a:fillRect/>
+          </a:stretch>
+        </p:blipFill>
+        <p:spPr>
+          <a:xfrm>
+            <a:off x="0" y="0"/>
+            <a:ext cx="12191695" cy="6858000"/>
+          </a:xfrm>
+          <a:prstGeom prst="rect">
             <a:avLst/>
           </a:prstGeom>
-          <a:solidFill>
-            <a:srgbClr val="CEE2F3"/>
-          </a:solidFill>
-          <a:ln>
-            <a:noFill/>
-          </a:ln>
-        </p:spPr>
-        <p:txBody>
-          <a:bodyPr rtlCol="0" anchor="ctr"/>
-          <a:lstStyle/>
-          <a:p>
-            <a:pPr algn="ctr"/>
-          </a:p>
-        </p:txBody>
-      </p:sp>
-      <p:sp>
-        <p:nvSpPr>
-          <p:cNvPr id="6" name="장식"/>
-          <p:cNvSpPr/>
-          <p:nvPr/>
-        </p:nvSpPr>
-        <p:spPr>
-          <a:xfrm>
-            <a:off x="8046518" y="3493009"/>
-            <a:ext cx="2194505" cy="548626"/>
-          </a:xfrm>
-          <a:prstGeom prst="wave">
-            <a:avLst/>
-          </a:prstGeom>
-          <a:solidFill>
-            <a:srgbClr val="FFFFFF"/>
-          </a:solidFill>
-          <a:ln>
-            <a:noFill/>
-          </a:ln>
-        </p:spPr>
-        <p:txBody>
-          <a:bodyPr rtlCol="0" anchor="ctr"/>
-          <a:lstStyle/>
-          <a:p>
-            <a:pPr algn="ctr"/>
-          </a:p>
-        </p:txBody>
-      </p:sp>
-      <p:sp>
-        <p:nvSpPr>
-          <p:cNvPr id="7" name="장식"/>
-          <p:cNvSpPr/>
-          <p:nvPr/>
-        </p:nvSpPr>
-        <p:spPr>
-          <a:xfrm>
-            <a:off x="8046518" y="3968485"/>
-            <a:ext cx="2194505" cy="548626"/>
-          </a:xfrm>
-          <a:prstGeom prst="wave">
-            <a:avLst/>
-          </a:prstGeom>
-          <a:solidFill>
-            <a:srgbClr val="913B3E"/>
-          </a:solidFill>
-          <a:ln>
-            <a:noFill/>
-          </a:ln>
-        </p:spPr>
-        <p:txBody>
-          <a:bodyPr rtlCol="0" anchor="ctr"/>
-          <a:lstStyle/>
-          <a:p>
-            <a:pPr algn="ctr"/>
-          </a:p>
-        </p:txBody>
-      </p:sp>
+        </p:spPr>
+      </p:pic>
       <p:sp>
         <p:nvSpPr>
           <p:cNvPr id="2" name="Title 1"/>
@@ -3492,14 +3357,14 @@
       </p:sp>
       <p:sp>
         <p:nvSpPr>
-          <p:cNvPr id="8" name="한 줄 문구"/>
+          <p:cNvPr id="4" name="한 줄 문구"/>
           <p:cNvSpPr txBox="1"/>
           <p:nvPr/>
         </p:nvSpPr>
         <p:spPr>
           <a:xfrm>
-            <a:off x="853418" y="3703320"/>
-            <a:ext cx="5852013" cy="822960"/>
+            <a:off x="853418" y="3749039"/>
+            <a:ext cx="6095847" cy="822960"/>
           </a:xfrm>
           <a:prstGeom prst="rect">
             <a:avLst/>
@@ -3523,21 +3388,21 @@
                   <a:srgbClr val="122A3F"/>
                 </a:solidFill>
               </a:rPr>
-              <a:t>먼 섬까지 가는 배편처럼 일정을 챙겨요</a:t>
+              <a:t>휴가 전에 둘이서 한 시간만 앉아 봅니다</a:t>
             </a:r>
           </a:p>
         </p:txBody>
       </p:sp>
       <p:sp>
         <p:nvSpPr>
-          <p:cNvPr id="9" name="안내 문구"/>
+          <p:cNvPr id="5" name="안내 문구"/>
           <p:cNvSpPr txBox="1"/>
           <p:nvPr/>
         </p:nvSpPr>
         <p:spPr>
           <a:xfrm>
-            <a:off x="853418" y="4572000"/>
-            <a:ext cx="5852013" cy="914400"/>
+            <a:off x="853418" y="4617720"/>
+            <a:ext cx="6095847" cy="914400"/>
           </a:xfrm>
           <a:prstGeom prst="rect">
             <a:avLst/>
@@ -3561,7 +3426,7 @@
                   <a:srgbClr val="666666"/>
                 </a:solidFill>
               </a:rPr>
-              <a:t>부부 점검 · 2026. 00. 00</a:t>
+              <a:t>부부 점검 · 2027. 00. 00</a:t>
             </a:r>
           </a:p>
           <a:p>
@@ -3641,93 +3506,6 @@
       </p:sp>
       <p:sp>
         <p:nvSpPr>
-          <p:cNvPr id="4" name="장식"/>
-          <p:cNvSpPr/>
-          <p:nvPr/>
-        </p:nvSpPr>
-        <p:spPr>
-          <a:xfrm>
-            <a:off x="10655503" y="557784"/>
-            <a:ext cx="877824" cy="219456"/>
-          </a:xfrm>
-          <a:prstGeom prst="wave">
-            <a:avLst/>
-          </a:prstGeom>
-          <a:solidFill>
-            <a:srgbClr val="CEE2F3"/>
-          </a:solidFill>
-          <a:ln>
-            <a:noFill/>
-          </a:ln>
-        </p:spPr>
-        <p:txBody>
-          <a:bodyPr rtlCol="0" anchor="ctr"/>
-          <a:lstStyle/>
-          <a:p>
-            <a:pPr algn="ctr"/>
-          </a:p>
-        </p:txBody>
-      </p:sp>
-      <p:sp>
-        <p:nvSpPr>
-          <p:cNvPr id="5" name="장식"/>
-          <p:cNvSpPr/>
-          <p:nvPr/>
-        </p:nvSpPr>
-        <p:spPr>
-          <a:xfrm>
-            <a:off x="10655503" y="747979"/>
-            <a:ext cx="877824" cy="219456"/>
-          </a:xfrm>
-          <a:prstGeom prst="wave">
-            <a:avLst/>
-          </a:prstGeom>
-          <a:solidFill>
-            <a:srgbClr val="275A86"/>
-          </a:solidFill>
-          <a:ln>
-            <a:noFill/>
-          </a:ln>
-        </p:spPr>
-        <p:txBody>
-          <a:bodyPr rtlCol="0" anchor="ctr"/>
-          <a:lstStyle/>
-          <a:p>
-            <a:pPr algn="ctr"/>
-          </a:p>
-        </p:txBody>
-      </p:sp>
-      <p:sp>
-        <p:nvSpPr>
-          <p:cNvPr id="6" name="장식"/>
-          <p:cNvSpPr/>
-          <p:nvPr/>
-        </p:nvSpPr>
-        <p:spPr>
-          <a:xfrm>
-            <a:off x="10655503" y="938174"/>
-            <a:ext cx="877824" cy="219456"/>
-          </a:xfrm>
-          <a:prstGeom prst="wave">
-            <a:avLst/>
-          </a:prstGeom>
-          <a:solidFill>
-            <a:srgbClr val="913B3E"/>
-          </a:solidFill>
-          <a:ln>
-            <a:noFill/>
-          </a:ln>
-        </p:spPr>
-        <p:txBody>
-          <a:bodyPr rtlCol="0" anchor="ctr"/>
-          <a:lstStyle/>
-          <a:p>
-            <a:pPr algn="ctr"/>
-          </a:p>
-        </p:txBody>
-      </p:sp>
-      <p:sp>
-        <p:nvSpPr>
           <p:cNvPr id="2" name="Title 1"/>
           <p:cNvSpPr>
             <a:spLocks noGrp="1"/>
@@ -3766,7 +3544,7 @@
       </p:sp>
       <p:graphicFrame>
         <p:nvGraphicFramePr>
-          <p:cNvPr id="7" name="표"/>
+          <p:cNvPr id="4" name="표"/>
           <p:cNvGraphicFramePr>
             <a:graphicFrameLocks noGrp="1"/>
           </p:cNvGraphicFramePr>
@@ -4551,93 +4329,6 @@
       </p:sp>
       <p:sp>
         <p:nvSpPr>
-          <p:cNvPr id="4" name="장식"/>
-          <p:cNvSpPr/>
-          <p:nvPr/>
-        </p:nvSpPr>
-        <p:spPr>
-          <a:xfrm>
-            <a:off x="10655503" y="557784"/>
-            <a:ext cx="877824" cy="219456"/>
-          </a:xfrm>
-          <a:prstGeom prst="wave">
-            <a:avLst/>
-          </a:prstGeom>
-          <a:solidFill>
-            <a:srgbClr val="CEE2F3"/>
-          </a:solidFill>
-          <a:ln>
-            <a:noFill/>
-          </a:ln>
-        </p:spPr>
-        <p:txBody>
-          <a:bodyPr rtlCol="0" anchor="ctr"/>
-          <a:lstStyle/>
-          <a:p>
-            <a:pPr algn="ctr"/>
-          </a:p>
-        </p:txBody>
-      </p:sp>
-      <p:sp>
-        <p:nvSpPr>
-          <p:cNvPr id="5" name="장식"/>
-          <p:cNvSpPr/>
-          <p:nvPr/>
-        </p:nvSpPr>
-        <p:spPr>
-          <a:xfrm>
-            <a:off x="10655503" y="747979"/>
-            <a:ext cx="877824" cy="219456"/>
-          </a:xfrm>
-          <a:prstGeom prst="wave">
-            <a:avLst/>
-          </a:prstGeom>
-          <a:solidFill>
-            <a:srgbClr val="275A86"/>
-          </a:solidFill>
-          <a:ln>
-            <a:noFill/>
-          </a:ln>
-        </p:spPr>
-        <p:txBody>
-          <a:bodyPr rtlCol="0" anchor="ctr"/>
-          <a:lstStyle/>
-          <a:p>
-            <a:pPr algn="ctr"/>
-          </a:p>
-        </p:txBody>
-      </p:sp>
-      <p:sp>
-        <p:nvSpPr>
-          <p:cNvPr id="6" name="장식"/>
-          <p:cNvSpPr/>
-          <p:nvPr/>
-        </p:nvSpPr>
-        <p:spPr>
-          <a:xfrm>
-            <a:off x="10655503" y="938174"/>
-            <a:ext cx="877824" cy="219456"/>
-          </a:xfrm>
-          <a:prstGeom prst="wave">
-            <a:avLst/>
-          </a:prstGeom>
-          <a:solidFill>
-            <a:srgbClr val="913B3E"/>
-          </a:solidFill>
-          <a:ln>
-            <a:noFill/>
-          </a:ln>
-        </p:spPr>
-        <p:txBody>
-          <a:bodyPr rtlCol="0" anchor="ctr"/>
-          <a:lstStyle/>
-          <a:p>
-            <a:pPr algn="ctr"/>
-          </a:p>
-        </p:txBody>
-      </p:sp>
-      <p:sp>
-        <p:nvSpPr>
           <p:cNvPr id="2" name="Title 1"/>
           <p:cNvSpPr>
             <a:spLocks noGrp="1"/>
@@ -4676,7 +4367,7 @@
       </p:sp>
       <p:graphicFrame>
         <p:nvGraphicFramePr>
-          <p:cNvPr id="7" name="표"/>
+          <p:cNvPr id="4" name="표"/>
           <p:cNvGraphicFramePr>
             <a:graphicFrameLocks noGrp="1"/>
           </p:cNvGraphicFramePr>
@@ -6387,93 +6078,6 @@
       </p:sp>
       <p:sp>
         <p:nvSpPr>
-          <p:cNvPr id="4" name="장식"/>
-          <p:cNvSpPr/>
-          <p:nvPr/>
-        </p:nvSpPr>
-        <p:spPr>
-          <a:xfrm>
-            <a:off x="10655503" y="557784"/>
-            <a:ext cx="877824" cy="219456"/>
-          </a:xfrm>
-          <a:prstGeom prst="wave">
-            <a:avLst/>
-          </a:prstGeom>
-          <a:solidFill>
-            <a:srgbClr val="CEE2F3"/>
-          </a:solidFill>
-          <a:ln>
-            <a:noFill/>
-          </a:ln>
-        </p:spPr>
-        <p:txBody>
-          <a:bodyPr rtlCol="0" anchor="ctr"/>
-          <a:lstStyle/>
-          <a:p>
-            <a:pPr algn="ctr"/>
-          </a:p>
-        </p:txBody>
-      </p:sp>
-      <p:sp>
-        <p:nvSpPr>
-          <p:cNvPr id="5" name="장식"/>
-          <p:cNvSpPr/>
-          <p:nvPr/>
-        </p:nvSpPr>
-        <p:spPr>
-          <a:xfrm>
-            <a:off x="10655503" y="747979"/>
-            <a:ext cx="877824" cy="219456"/>
-          </a:xfrm>
-          <a:prstGeom prst="wave">
-            <a:avLst/>
-          </a:prstGeom>
-          <a:solidFill>
-            <a:srgbClr val="275A86"/>
-          </a:solidFill>
-          <a:ln>
-            <a:noFill/>
-          </a:ln>
-        </p:spPr>
-        <p:txBody>
-          <a:bodyPr rtlCol="0" anchor="ctr"/>
-          <a:lstStyle/>
-          <a:p>
-            <a:pPr algn="ctr"/>
-          </a:p>
-        </p:txBody>
-      </p:sp>
-      <p:sp>
-        <p:nvSpPr>
-          <p:cNvPr id="6" name="장식"/>
-          <p:cNvSpPr/>
-          <p:nvPr/>
-        </p:nvSpPr>
-        <p:spPr>
-          <a:xfrm>
-            <a:off x="10655503" y="938174"/>
-            <a:ext cx="877824" cy="219456"/>
-          </a:xfrm>
-          <a:prstGeom prst="wave">
-            <a:avLst/>
-          </a:prstGeom>
-          <a:solidFill>
-            <a:srgbClr val="913B3E"/>
-          </a:solidFill>
-          <a:ln>
-            <a:noFill/>
-          </a:ln>
-        </p:spPr>
-        <p:txBody>
-          <a:bodyPr rtlCol="0" anchor="ctr"/>
-          <a:lstStyle/>
-          <a:p>
-            <a:pPr algn="ctr"/>
-          </a:p>
-        </p:txBody>
-      </p:sp>
-      <p:sp>
-        <p:nvSpPr>
           <p:cNvPr id="2" name="Title 1"/>
           <p:cNvSpPr>
             <a:spLocks noGrp="1"/>
@@ -6512,7 +6116,7 @@
       </p:sp>
       <p:graphicFrame>
         <p:nvGraphicFramePr>
-          <p:cNvPr id="7" name="표"/>
+          <p:cNvPr id="4" name="표"/>
           <p:cNvGraphicFramePr>
             <a:graphicFrameLocks noGrp="1"/>
           </p:cNvGraphicFramePr>
@@ -8272,93 +7876,6 @@
       </p:sp>
       <p:sp>
         <p:nvSpPr>
-          <p:cNvPr id="4" name="장식"/>
-          <p:cNvSpPr/>
-          <p:nvPr/>
-        </p:nvSpPr>
-        <p:spPr>
-          <a:xfrm>
-            <a:off x="10655503" y="557784"/>
-            <a:ext cx="877824" cy="219456"/>
-          </a:xfrm>
-          <a:prstGeom prst="wave">
-            <a:avLst/>
-          </a:prstGeom>
-          <a:solidFill>
-            <a:srgbClr val="CEE2F3"/>
-          </a:solidFill>
-          <a:ln>
-            <a:noFill/>
-          </a:ln>
-        </p:spPr>
-        <p:txBody>
-          <a:bodyPr rtlCol="0" anchor="ctr"/>
-          <a:lstStyle/>
-          <a:p>
-            <a:pPr algn="ctr"/>
-          </a:p>
-        </p:txBody>
-      </p:sp>
-      <p:sp>
-        <p:nvSpPr>
-          <p:cNvPr id="5" name="장식"/>
-          <p:cNvSpPr/>
-          <p:nvPr/>
-        </p:nvSpPr>
-        <p:spPr>
-          <a:xfrm>
-            <a:off x="10655503" y="747979"/>
-            <a:ext cx="877824" cy="219456"/>
-          </a:xfrm>
-          <a:prstGeom prst="wave">
-            <a:avLst/>
-          </a:prstGeom>
-          <a:solidFill>
-            <a:srgbClr val="275A86"/>
-          </a:solidFill>
-          <a:ln>
-            <a:noFill/>
-          </a:ln>
-        </p:spPr>
-        <p:txBody>
-          <a:bodyPr rtlCol="0" anchor="ctr"/>
-          <a:lstStyle/>
-          <a:p>
-            <a:pPr algn="ctr"/>
-          </a:p>
-        </p:txBody>
-      </p:sp>
-      <p:sp>
-        <p:nvSpPr>
-          <p:cNvPr id="6" name="장식"/>
-          <p:cNvSpPr/>
-          <p:nvPr/>
-        </p:nvSpPr>
-        <p:spPr>
-          <a:xfrm>
-            <a:off x="10655503" y="938174"/>
-            <a:ext cx="877824" cy="219456"/>
-          </a:xfrm>
-          <a:prstGeom prst="wave">
-            <a:avLst/>
-          </a:prstGeom>
-          <a:solidFill>
-            <a:srgbClr val="913B3E"/>
-          </a:solidFill>
-          <a:ln>
-            <a:noFill/>
-          </a:ln>
-        </p:spPr>
-        <p:txBody>
-          <a:bodyPr rtlCol="0" anchor="ctr"/>
-          <a:lstStyle/>
-          <a:p>
-            <a:pPr algn="ctr"/>
-          </a:p>
-        </p:txBody>
-      </p:sp>
-      <p:sp>
-        <p:nvSpPr>
           <p:cNvPr id="2" name="Title 1"/>
           <p:cNvSpPr>
             <a:spLocks noGrp="1"/>
@@ -8397,7 +7914,7 @@
       </p:sp>
       <p:sp>
         <p:nvSpPr>
-          <p:cNvPr id="7" name="카드 1"/>
+          <p:cNvPr id="4" name="카드 1"/>
           <p:cNvSpPr/>
           <p:nvPr/>
         </p:nvSpPr>
@@ -8430,7 +7947,7 @@
       </p:sp>
       <p:sp>
         <p:nvSpPr>
-          <p:cNvPr id="8" name="번호 1"/>
+          <p:cNvPr id="5" name="번호 1"/>
           <p:cNvSpPr/>
           <p:nvPr/>
         </p:nvSpPr>
@@ -8473,7 +7990,7 @@
       </p:sp>
       <p:sp>
         <p:nvSpPr>
-          <p:cNvPr id="9" name="TextBox 8"/>
+          <p:cNvPr id="6" name="TextBox 5"/>
           <p:cNvSpPr txBox="1"/>
           <p:nvPr/>
         </p:nvSpPr>
@@ -8511,7 +8028,7 @@
       </p:sp>
       <p:sp>
         <p:nvSpPr>
-          <p:cNvPr id="10" name="TextBox 9"/>
+          <p:cNvPr id="7" name="TextBox 6"/>
           <p:cNvSpPr txBox="1"/>
           <p:nvPr/>
         </p:nvSpPr>
@@ -8549,7 +8066,7 @@
       </p:sp>
       <p:sp>
         <p:nvSpPr>
-          <p:cNvPr id="11" name="카드 2"/>
+          <p:cNvPr id="8" name="카드 2"/>
           <p:cNvSpPr/>
           <p:nvPr/>
         </p:nvSpPr>
@@ -8582,7 +8099,7 @@
       </p:sp>
       <p:sp>
         <p:nvSpPr>
-          <p:cNvPr id="12" name="번호 2"/>
+          <p:cNvPr id="9" name="번호 2"/>
           <p:cNvSpPr/>
           <p:nvPr/>
         </p:nvSpPr>
@@ -8625,7 +8142,7 @@
       </p:sp>
       <p:sp>
         <p:nvSpPr>
-          <p:cNvPr id="13" name="TextBox 12"/>
+          <p:cNvPr id="10" name="TextBox 9"/>
           <p:cNvSpPr txBox="1"/>
           <p:nvPr/>
         </p:nvSpPr>
@@ -8663,7 +8180,7 @@
       </p:sp>
       <p:sp>
         <p:nvSpPr>
-          <p:cNvPr id="14" name="TextBox 13"/>
+          <p:cNvPr id="11" name="TextBox 10"/>
           <p:cNvSpPr txBox="1"/>
           <p:nvPr/>
         </p:nvSpPr>
@@ -8701,7 +8218,7 @@
       </p:sp>
       <p:sp>
         <p:nvSpPr>
-          <p:cNvPr id="15" name="카드 3"/>
+          <p:cNvPr id="12" name="카드 3"/>
           <p:cNvSpPr/>
           <p:nvPr/>
         </p:nvSpPr>
@@ -8734,7 +8251,7 @@
       </p:sp>
       <p:sp>
         <p:nvSpPr>
-          <p:cNvPr id="16" name="번호 3"/>
+          <p:cNvPr id="13" name="번호 3"/>
           <p:cNvSpPr/>
           <p:nvPr/>
         </p:nvSpPr>
@@ -8777,7 +8294,7 @@
       </p:sp>
       <p:sp>
         <p:nvSpPr>
-          <p:cNvPr id="17" name="TextBox 16"/>
+          <p:cNvPr id="14" name="TextBox 13"/>
           <p:cNvSpPr txBox="1"/>
           <p:nvPr/>
         </p:nvSpPr>
@@ -8815,7 +8332,7 @@
       </p:sp>
       <p:sp>
         <p:nvSpPr>
-          <p:cNvPr id="18" name="TextBox 17"/>
+          <p:cNvPr id="15" name="TextBox 14"/>
           <p:cNvSpPr txBox="1"/>
           <p:nvPr/>
         </p:nvSpPr>
@@ -8853,7 +8370,7 @@
       </p:sp>
       <p:sp>
         <p:nvSpPr>
-          <p:cNvPr id="19" name="안내"/>
+          <p:cNvPr id="16" name="안내"/>
           <p:cNvSpPr txBox="1"/>
           <p:nvPr/>
         </p:nvSpPr>
@@ -8949,93 +8466,6 @@
       </p:sp>
       <p:sp>
         <p:nvSpPr>
-          <p:cNvPr id="4" name="장식"/>
-          <p:cNvSpPr/>
-          <p:nvPr/>
-        </p:nvSpPr>
-        <p:spPr>
-          <a:xfrm>
-            <a:off x="10655503" y="557784"/>
-            <a:ext cx="877824" cy="219456"/>
-          </a:xfrm>
-          <a:prstGeom prst="wave">
-            <a:avLst/>
-          </a:prstGeom>
-          <a:solidFill>
-            <a:srgbClr val="CEE2F3"/>
-          </a:solidFill>
-          <a:ln>
-            <a:noFill/>
-          </a:ln>
-        </p:spPr>
-        <p:txBody>
-          <a:bodyPr rtlCol="0" anchor="ctr"/>
-          <a:lstStyle/>
-          <a:p>
-            <a:pPr algn="ctr"/>
-          </a:p>
-        </p:txBody>
-      </p:sp>
-      <p:sp>
-        <p:nvSpPr>
-          <p:cNvPr id="5" name="장식"/>
-          <p:cNvSpPr/>
-          <p:nvPr/>
-        </p:nvSpPr>
-        <p:spPr>
-          <a:xfrm>
-            <a:off x="10655503" y="747979"/>
-            <a:ext cx="877824" cy="219456"/>
-          </a:xfrm>
-          <a:prstGeom prst="wave">
-            <a:avLst/>
-          </a:prstGeom>
-          <a:solidFill>
-            <a:srgbClr val="275A86"/>
-          </a:solidFill>
-          <a:ln>
-            <a:noFill/>
-          </a:ln>
-        </p:spPr>
-        <p:txBody>
-          <a:bodyPr rtlCol="0" anchor="ctr"/>
-          <a:lstStyle/>
-          <a:p>
-            <a:pPr algn="ctr"/>
-          </a:p>
-        </p:txBody>
-      </p:sp>
-      <p:sp>
-        <p:nvSpPr>
-          <p:cNvPr id="6" name="장식"/>
-          <p:cNvSpPr/>
-          <p:nvPr/>
-        </p:nvSpPr>
-        <p:spPr>
-          <a:xfrm>
-            <a:off x="10655503" y="938174"/>
-            <a:ext cx="877824" cy="219456"/>
-          </a:xfrm>
-          <a:prstGeom prst="wave">
-            <a:avLst/>
-          </a:prstGeom>
-          <a:solidFill>
-            <a:srgbClr val="913B3E"/>
-          </a:solidFill>
-          <a:ln>
-            <a:noFill/>
-          </a:ln>
-        </p:spPr>
-        <p:txBody>
-          <a:bodyPr rtlCol="0" anchor="ctr"/>
-          <a:lstStyle/>
-          <a:p>
-            <a:pPr algn="ctr"/>
-          </a:p>
-        </p:txBody>
-      </p:sp>
-      <p:sp>
-        <p:nvSpPr>
           <p:cNvPr id="2" name="Title 1"/>
           <p:cNvSpPr>
             <a:spLocks noGrp="1"/>
@@ -9074,7 +8504,7 @@
       </p:sp>
       <p:sp>
         <p:nvSpPr>
-          <p:cNvPr id="7" name="카드 1"/>
+          <p:cNvPr id="4" name="카드 1"/>
           <p:cNvSpPr/>
           <p:nvPr/>
         </p:nvSpPr>
@@ -9107,7 +8537,7 @@
       </p:sp>
       <p:sp>
         <p:nvSpPr>
-          <p:cNvPr id="8" name="번호 1"/>
+          <p:cNvPr id="5" name="번호 1"/>
           <p:cNvSpPr/>
           <p:nvPr/>
         </p:nvSpPr>
@@ -9150,7 +8580,7 @@
       </p:sp>
       <p:sp>
         <p:nvSpPr>
-          <p:cNvPr id="9" name="TextBox 8"/>
+          <p:cNvPr id="6" name="TextBox 5"/>
           <p:cNvSpPr txBox="1"/>
           <p:nvPr/>
         </p:nvSpPr>
@@ -9188,7 +8618,7 @@
       </p:sp>
       <p:sp>
         <p:nvSpPr>
-          <p:cNvPr id="10" name="TextBox 9"/>
+          <p:cNvPr id="7" name="TextBox 6"/>
           <p:cNvSpPr txBox="1"/>
           <p:nvPr/>
         </p:nvSpPr>
@@ -9226,7 +8656,7 @@
       </p:sp>
       <p:sp>
         <p:nvSpPr>
-          <p:cNvPr id="11" name="카드 2"/>
+          <p:cNvPr id="8" name="카드 2"/>
           <p:cNvSpPr/>
           <p:nvPr/>
         </p:nvSpPr>
@@ -9259,7 +8689,7 @@
       </p:sp>
       <p:sp>
         <p:nvSpPr>
-          <p:cNvPr id="12" name="번호 2"/>
+          <p:cNvPr id="9" name="번호 2"/>
           <p:cNvSpPr/>
           <p:nvPr/>
         </p:nvSpPr>
@@ -9302,7 +8732,7 @@
       </p:sp>
       <p:sp>
         <p:nvSpPr>
-          <p:cNvPr id="13" name="TextBox 12"/>
+          <p:cNvPr id="10" name="TextBox 9"/>
           <p:cNvSpPr txBox="1"/>
           <p:nvPr/>
         </p:nvSpPr>
@@ -9340,7 +8770,7 @@
       </p:sp>
       <p:sp>
         <p:nvSpPr>
-          <p:cNvPr id="14" name="TextBox 13"/>
+          <p:cNvPr id="11" name="TextBox 10"/>
           <p:cNvSpPr txBox="1"/>
           <p:nvPr/>
         </p:nvSpPr>
@@ -9378,7 +8808,7 @@
       </p:sp>
       <p:sp>
         <p:nvSpPr>
-          <p:cNvPr id="15" name="카드 3"/>
+          <p:cNvPr id="12" name="카드 3"/>
           <p:cNvSpPr/>
           <p:nvPr/>
         </p:nvSpPr>
@@ -9411,7 +8841,7 @@
       </p:sp>
       <p:sp>
         <p:nvSpPr>
-          <p:cNvPr id="16" name="번호 3"/>
+          <p:cNvPr id="13" name="번호 3"/>
           <p:cNvSpPr/>
           <p:nvPr/>
         </p:nvSpPr>
@@ -9454,7 +8884,7 @@
       </p:sp>
       <p:sp>
         <p:nvSpPr>
-          <p:cNvPr id="17" name="TextBox 16"/>
+          <p:cNvPr id="14" name="TextBox 13"/>
           <p:cNvSpPr txBox="1"/>
           <p:nvPr/>
         </p:nvSpPr>
@@ -9492,7 +8922,7 @@
       </p:sp>
       <p:sp>
         <p:nvSpPr>
-          <p:cNvPr id="18" name="TextBox 17"/>
+          <p:cNvPr id="15" name="TextBox 14"/>
           <p:cNvSpPr txBox="1"/>
           <p:nvPr/>
         </p:nvSpPr>
@@ -9530,7 +8960,7 @@
       </p:sp>
       <p:sp>
         <p:nvSpPr>
-          <p:cNvPr id="19" name="안내 문구"/>
+          <p:cNvPr id="16" name="안내 문구"/>
           <p:cNvSpPr txBox="1"/>
           <p:nvPr/>
         </p:nvSpPr>

--- a/public/fun/pack/pptx/review/보장점검양식_22_부부점검_섬마을선착장.pptx
+++ b/public/fun/pack/pptx/review/보장점검양식_22_부부점검_섬마을선착장.pptx
@@ -3347,7 +3347,7 @@
             <a:r>
               <a:rPr sz="3600" b="1" i="0">
                 <a:solidFill>
-                  <a:srgbClr val="122A3F"/>
+                  <a:srgbClr val="113B5F"/>
                 </a:solidFill>
               </a:rPr>
               <a:t>우리 보험 점검 시간</a:t>
@@ -3385,7 +3385,7 @@
             <a:r>
               <a:rPr sz="1700" b="0" i="1">
                 <a:solidFill>
-                  <a:srgbClr val="122A3F"/>
+                  <a:srgbClr val="113B5F"/>
                 </a:solidFill>
               </a:rPr>
               <a:t>휴가 전에 둘이서 한 시간만 앉아 봅니다</a:t>
@@ -3460,7 +3460,7 @@
     <p:bg>
       <p:bgPr>
         <a:solidFill>
-          <a:srgbClr val="EFF5FA"/>
+          <a:srgbClr val="EEF5FC"/>
         </a:solidFill>
         <a:effectLst/>
       </p:bgPr>
@@ -3490,7 +3490,7 @@
             </a:avLst>
           </a:prstGeom>
           <a:solidFill>
-            <a:srgbClr val="CEE2F3"/>
+            <a:srgbClr val="D1E7FA"/>
           </a:solidFill>
           <a:ln>
             <a:noFill/>
@@ -3534,7 +3534,7 @@
             <a:r>
               <a:rPr sz="3000" b="1" i="0">
                 <a:solidFill>
-                  <a:srgbClr val="122A3F"/>
+                  <a:srgbClr val="113B5F"/>
                 </a:solidFill>
               </a:rPr>
               <a:t>점검 대상 현황</a:t>
@@ -3585,30 +3585,30 @@
                   <a:tcPr anchor="ctr" marL="73152" marR="73152">
                     <a:lnL w="9525" cap="flat" cmpd="sng" algn="ctr">
                       <a:solidFill>
-                        <a:srgbClr val="275A86"/>
+                        <a:srgbClr val="267BC5"/>
                       </a:solidFill>
                       <a:prstDash val="solid"/>
                     </a:lnL>
                     <a:lnR w="9525" cap="flat" cmpd="sng" algn="ctr">
                       <a:solidFill>
-                        <a:srgbClr val="275A86"/>
+                        <a:srgbClr val="267BC5"/>
                       </a:solidFill>
                       <a:prstDash val="solid"/>
                     </a:lnR>
                     <a:lnT w="9525" cap="flat" cmpd="sng" algn="ctr">
                       <a:solidFill>
-                        <a:srgbClr val="275A86"/>
+                        <a:srgbClr val="267BC5"/>
                       </a:solidFill>
                       <a:prstDash val="solid"/>
                     </a:lnT>
                     <a:lnB w="9525" cap="flat" cmpd="sng" algn="ctr">
                       <a:solidFill>
-                        <a:srgbClr val="275A86"/>
+                        <a:srgbClr val="267BC5"/>
                       </a:solidFill>
                       <a:prstDash val="solid"/>
                     </a:lnB>
                     <a:solidFill>
-                      <a:srgbClr val="275A86"/>
+                      <a:srgbClr val="267BC5"/>
                     </a:solidFill>
                   </a:tcPr>
                 </a:tc>
@@ -3631,30 +3631,30 @@
                   <a:tcPr anchor="ctr" marL="73152" marR="73152">
                     <a:lnL w="9525" cap="flat" cmpd="sng" algn="ctr">
                       <a:solidFill>
-                        <a:srgbClr val="275A86"/>
+                        <a:srgbClr val="267BC5"/>
                       </a:solidFill>
                       <a:prstDash val="solid"/>
                     </a:lnL>
                     <a:lnR w="9525" cap="flat" cmpd="sng" algn="ctr">
                       <a:solidFill>
-                        <a:srgbClr val="275A86"/>
+                        <a:srgbClr val="267BC5"/>
                       </a:solidFill>
                       <a:prstDash val="solid"/>
                     </a:lnR>
                     <a:lnT w="9525" cap="flat" cmpd="sng" algn="ctr">
                       <a:solidFill>
-                        <a:srgbClr val="275A86"/>
+                        <a:srgbClr val="267BC5"/>
                       </a:solidFill>
                       <a:prstDash val="solid"/>
                     </a:lnT>
                     <a:lnB w="9525" cap="flat" cmpd="sng" algn="ctr">
                       <a:solidFill>
-                        <a:srgbClr val="275A86"/>
+                        <a:srgbClr val="267BC5"/>
                       </a:solidFill>
                       <a:prstDash val="solid"/>
                     </a:lnB>
                     <a:solidFill>
-                      <a:srgbClr val="275A86"/>
+                      <a:srgbClr val="267BC5"/>
                     </a:solidFill>
                   </a:tcPr>
                 </a:tc>
@@ -3677,30 +3677,30 @@
                   <a:tcPr anchor="ctr" marL="73152" marR="73152">
                     <a:lnL w="9525" cap="flat" cmpd="sng" algn="ctr">
                       <a:solidFill>
-                        <a:srgbClr val="275A86"/>
+                        <a:srgbClr val="267BC5"/>
                       </a:solidFill>
                       <a:prstDash val="solid"/>
                     </a:lnL>
                     <a:lnR w="9525" cap="flat" cmpd="sng" algn="ctr">
                       <a:solidFill>
-                        <a:srgbClr val="275A86"/>
+                        <a:srgbClr val="267BC5"/>
                       </a:solidFill>
                       <a:prstDash val="solid"/>
                     </a:lnR>
                     <a:lnT w="9525" cap="flat" cmpd="sng" algn="ctr">
                       <a:solidFill>
-                        <a:srgbClr val="275A86"/>
+                        <a:srgbClr val="267BC5"/>
                       </a:solidFill>
                       <a:prstDash val="solid"/>
                     </a:lnT>
                     <a:lnB w="9525" cap="flat" cmpd="sng" algn="ctr">
                       <a:solidFill>
-                        <a:srgbClr val="275A86"/>
+                        <a:srgbClr val="267BC5"/>
                       </a:solidFill>
                       <a:prstDash val="solid"/>
                     </a:lnB>
                     <a:solidFill>
-                      <a:srgbClr val="275A86"/>
+                      <a:srgbClr val="267BC5"/>
                     </a:solidFill>
                   </a:tcPr>
                 </a:tc>
@@ -3715,7 +3715,7 @@
                       <a:r>
                         <a:rPr sz="1600" b="1">
                           <a:solidFill>
-                            <a:srgbClr val="122A3F"/>
+                            <a:srgbClr val="113B5F"/>
                           </a:solidFill>
                         </a:rPr>
                         <a:t>이름</a:t>
@@ -3725,30 +3725,30 @@
                   <a:tcPr anchor="ctr" marL="73152" marR="73152">
                     <a:lnL w="9525" cap="flat" cmpd="sng" algn="ctr">
                       <a:solidFill>
-                        <a:srgbClr val="CEE2F3"/>
+                        <a:srgbClr val="D1E7FA"/>
                       </a:solidFill>
                       <a:prstDash val="solid"/>
                     </a:lnL>
                     <a:lnR w="9525" cap="flat" cmpd="sng" algn="ctr">
                       <a:solidFill>
-                        <a:srgbClr val="CEE2F3"/>
+                        <a:srgbClr val="D1E7FA"/>
                       </a:solidFill>
                       <a:prstDash val="solid"/>
                     </a:lnR>
                     <a:lnT w="9525" cap="flat" cmpd="sng" algn="ctr">
                       <a:solidFill>
-                        <a:srgbClr val="CEE2F3"/>
+                        <a:srgbClr val="D1E7FA"/>
                       </a:solidFill>
                       <a:prstDash val="solid"/>
                     </a:lnT>
                     <a:lnB w="9525" cap="flat" cmpd="sng" algn="ctr">
                       <a:solidFill>
-                        <a:srgbClr val="CEE2F3"/>
+                        <a:srgbClr val="D1E7FA"/>
                       </a:solidFill>
                       <a:prstDash val="solid"/>
                     </a:lnB>
                     <a:solidFill>
-                      <a:srgbClr val="CEE2F3"/>
+                      <a:srgbClr val="D1E7FA"/>
                     </a:solidFill>
                   </a:tcPr>
                 </a:tc>
@@ -3771,25 +3771,25 @@
                   <a:tcPr anchor="ctr" marL="73152" marR="73152">
                     <a:lnL w="9525" cap="flat" cmpd="sng" algn="ctr">
                       <a:solidFill>
-                        <a:srgbClr val="CEE2F3"/>
+                        <a:srgbClr val="D1E7FA"/>
                       </a:solidFill>
                       <a:prstDash val="solid"/>
                     </a:lnL>
                     <a:lnR w="9525" cap="flat" cmpd="sng" algn="ctr">
                       <a:solidFill>
-                        <a:srgbClr val="CEE2F3"/>
+                        <a:srgbClr val="D1E7FA"/>
                       </a:solidFill>
                       <a:prstDash val="solid"/>
                     </a:lnR>
                     <a:lnT w="9525" cap="flat" cmpd="sng" algn="ctr">
                       <a:solidFill>
-                        <a:srgbClr val="CEE2F3"/>
+                        <a:srgbClr val="D1E7FA"/>
                       </a:solidFill>
                       <a:prstDash val="solid"/>
                     </a:lnT>
                     <a:lnB w="9525" cap="flat" cmpd="sng" algn="ctr">
                       <a:solidFill>
-                        <a:srgbClr val="CEE2F3"/>
+                        <a:srgbClr val="D1E7FA"/>
                       </a:solidFill>
                       <a:prstDash val="solid"/>
                     </a:lnB>
@@ -3817,25 +3817,25 @@
                   <a:tcPr anchor="ctr" marL="73152" marR="73152">
                     <a:lnL w="9525" cap="flat" cmpd="sng" algn="ctr">
                       <a:solidFill>
-                        <a:srgbClr val="CEE2F3"/>
+                        <a:srgbClr val="D1E7FA"/>
                       </a:solidFill>
                       <a:prstDash val="solid"/>
                     </a:lnL>
                     <a:lnR w="9525" cap="flat" cmpd="sng" algn="ctr">
                       <a:solidFill>
-                        <a:srgbClr val="CEE2F3"/>
+                        <a:srgbClr val="D1E7FA"/>
                       </a:solidFill>
                       <a:prstDash val="solid"/>
                     </a:lnR>
                     <a:lnT w="9525" cap="flat" cmpd="sng" algn="ctr">
                       <a:solidFill>
-                        <a:srgbClr val="CEE2F3"/>
+                        <a:srgbClr val="D1E7FA"/>
                       </a:solidFill>
                       <a:prstDash val="solid"/>
                     </a:lnT>
                     <a:lnB w="9525" cap="flat" cmpd="sng" algn="ctr">
                       <a:solidFill>
-                        <a:srgbClr val="CEE2F3"/>
+                        <a:srgbClr val="D1E7FA"/>
                       </a:solidFill>
                       <a:prstDash val="solid"/>
                     </a:lnB>
@@ -3855,7 +3855,7 @@
                       <a:r>
                         <a:rPr sz="1600" b="1">
                           <a:solidFill>
-                            <a:srgbClr val="122A3F"/>
+                            <a:srgbClr val="113B5F"/>
                           </a:solidFill>
                         </a:rPr>
                         <a:t>나이</a:t>
@@ -3865,30 +3865,30 @@
                   <a:tcPr anchor="ctr" marL="73152" marR="73152">
                     <a:lnL w="9525" cap="flat" cmpd="sng" algn="ctr">
                       <a:solidFill>
-                        <a:srgbClr val="CEE2F3"/>
+                        <a:srgbClr val="D1E7FA"/>
                       </a:solidFill>
                       <a:prstDash val="solid"/>
                     </a:lnL>
                     <a:lnR w="9525" cap="flat" cmpd="sng" algn="ctr">
                       <a:solidFill>
-                        <a:srgbClr val="CEE2F3"/>
+                        <a:srgbClr val="D1E7FA"/>
                       </a:solidFill>
                       <a:prstDash val="solid"/>
                     </a:lnR>
                     <a:lnT w="9525" cap="flat" cmpd="sng" algn="ctr">
                       <a:solidFill>
-                        <a:srgbClr val="CEE2F3"/>
+                        <a:srgbClr val="D1E7FA"/>
                       </a:solidFill>
                       <a:prstDash val="solid"/>
                     </a:lnT>
                     <a:lnB w="9525" cap="flat" cmpd="sng" algn="ctr">
                       <a:solidFill>
-                        <a:srgbClr val="CEE2F3"/>
+                        <a:srgbClr val="D1E7FA"/>
                       </a:solidFill>
                       <a:prstDash val="solid"/>
                     </a:lnB>
                     <a:solidFill>
-                      <a:srgbClr val="CEE2F3"/>
+                      <a:srgbClr val="D1E7FA"/>
                     </a:solidFill>
                   </a:tcPr>
                 </a:tc>
@@ -3911,30 +3911,30 @@
                   <a:tcPr anchor="ctr" marL="73152" marR="73152">
                     <a:lnL w="9525" cap="flat" cmpd="sng" algn="ctr">
                       <a:solidFill>
-                        <a:srgbClr val="CEE2F3"/>
+                        <a:srgbClr val="D1E7FA"/>
                       </a:solidFill>
                       <a:prstDash val="solid"/>
                     </a:lnL>
                     <a:lnR w="9525" cap="flat" cmpd="sng" algn="ctr">
                       <a:solidFill>
-                        <a:srgbClr val="CEE2F3"/>
+                        <a:srgbClr val="D1E7FA"/>
                       </a:solidFill>
                       <a:prstDash val="solid"/>
                     </a:lnR>
                     <a:lnT w="9525" cap="flat" cmpd="sng" algn="ctr">
                       <a:solidFill>
-                        <a:srgbClr val="CEE2F3"/>
+                        <a:srgbClr val="D1E7FA"/>
                       </a:solidFill>
                       <a:prstDash val="solid"/>
                     </a:lnT>
                     <a:lnB w="9525" cap="flat" cmpd="sng" algn="ctr">
                       <a:solidFill>
-                        <a:srgbClr val="CEE2F3"/>
+                        <a:srgbClr val="D1E7FA"/>
                       </a:solidFill>
                       <a:prstDash val="solid"/>
                     </a:lnB>
                     <a:solidFill>
-                      <a:srgbClr val="EFF5FA"/>
+                      <a:srgbClr val="EEF5FC"/>
                     </a:solidFill>
                   </a:tcPr>
                 </a:tc>
@@ -3957,30 +3957,30 @@
                   <a:tcPr anchor="ctr" marL="73152" marR="73152">
                     <a:lnL w="9525" cap="flat" cmpd="sng" algn="ctr">
                       <a:solidFill>
-                        <a:srgbClr val="CEE2F3"/>
+                        <a:srgbClr val="D1E7FA"/>
                       </a:solidFill>
                       <a:prstDash val="solid"/>
                     </a:lnL>
                     <a:lnR w="9525" cap="flat" cmpd="sng" algn="ctr">
                       <a:solidFill>
-                        <a:srgbClr val="CEE2F3"/>
+                        <a:srgbClr val="D1E7FA"/>
                       </a:solidFill>
                       <a:prstDash val="solid"/>
                     </a:lnR>
                     <a:lnT w="9525" cap="flat" cmpd="sng" algn="ctr">
                       <a:solidFill>
-                        <a:srgbClr val="CEE2F3"/>
+                        <a:srgbClr val="D1E7FA"/>
                       </a:solidFill>
                       <a:prstDash val="solid"/>
                     </a:lnT>
                     <a:lnB w="9525" cap="flat" cmpd="sng" algn="ctr">
                       <a:solidFill>
-                        <a:srgbClr val="CEE2F3"/>
+                        <a:srgbClr val="D1E7FA"/>
                       </a:solidFill>
                       <a:prstDash val="solid"/>
                     </a:lnB>
                     <a:solidFill>
-                      <a:srgbClr val="EFF5FA"/>
+                      <a:srgbClr val="EEF5FC"/>
                     </a:solidFill>
                   </a:tcPr>
                 </a:tc>
@@ -3995,7 +3995,7 @@
                       <a:r>
                         <a:rPr sz="1600" b="1">
                           <a:solidFill>
-                            <a:srgbClr val="122A3F"/>
+                            <a:srgbClr val="113B5F"/>
                           </a:solidFill>
                         </a:rPr>
                         <a:t>직업</a:t>
@@ -4005,30 +4005,30 @@
                   <a:tcPr anchor="ctr" marL="73152" marR="73152">
                     <a:lnL w="9525" cap="flat" cmpd="sng" algn="ctr">
                       <a:solidFill>
-                        <a:srgbClr val="CEE2F3"/>
+                        <a:srgbClr val="D1E7FA"/>
                       </a:solidFill>
                       <a:prstDash val="solid"/>
                     </a:lnL>
                     <a:lnR w="9525" cap="flat" cmpd="sng" algn="ctr">
                       <a:solidFill>
-                        <a:srgbClr val="CEE2F3"/>
+                        <a:srgbClr val="D1E7FA"/>
                       </a:solidFill>
                       <a:prstDash val="solid"/>
                     </a:lnR>
                     <a:lnT w="9525" cap="flat" cmpd="sng" algn="ctr">
                       <a:solidFill>
-                        <a:srgbClr val="CEE2F3"/>
+                        <a:srgbClr val="D1E7FA"/>
                       </a:solidFill>
                       <a:prstDash val="solid"/>
                     </a:lnT>
                     <a:lnB w="9525" cap="flat" cmpd="sng" algn="ctr">
                       <a:solidFill>
-                        <a:srgbClr val="CEE2F3"/>
+                        <a:srgbClr val="D1E7FA"/>
                       </a:solidFill>
                       <a:prstDash val="solid"/>
                     </a:lnB>
                     <a:solidFill>
-                      <a:srgbClr val="CEE2F3"/>
+                      <a:srgbClr val="D1E7FA"/>
                     </a:solidFill>
                   </a:tcPr>
                 </a:tc>
@@ -4051,25 +4051,25 @@
                   <a:tcPr anchor="ctr" marL="73152" marR="73152">
                     <a:lnL w="9525" cap="flat" cmpd="sng" algn="ctr">
                       <a:solidFill>
-                        <a:srgbClr val="CEE2F3"/>
+                        <a:srgbClr val="D1E7FA"/>
                       </a:solidFill>
                       <a:prstDash val="solid"/>
                     </a:lnL>
                     <a:lnR w="9525" cap="flat" cmpd="sng" algn="ctr">
                       <a:solidFill>
-                        <a:srgbClr val="CEE2F3"/>
+                        <a:srgbClr val="D1E7FA"/>
                       </a:solidFill>
                       <a:prstDash val="solid"/>
                     </a:lnR>
                     <a:lnT w="9525" cap="flat" cmpd="sng" algn="ctr">
                       <a:solidFill>
-                        <a:srgbClr val="CEE2F3"/>
+                        <a:srgbClr val="D1E7FA"/>
                       </a:solidFill>
                       <a:prstDash val="solid"/>
                     </a:lnT>
                     <a:lnB w="9525" cap="flat" cmpd="sng" algn="ctr">
                       <a:solidFill>
-                        <a:srgbClr val="CEE2F3"/>
+                        <a:srgbClr val="D1E7FA"/>
                       </a:solidFill>
                       <a:prstDash val="solid"/>
                     </a:lnB>
@@ -4097,25 +4097,25 @@
                   <a:tcPr anchor="ctr" marL="73152" marR="73152">
                     <a:lnL w="9525" cap="flat" cmpd="sng" algn="ctr">
                       <a:solidFill>
-                        <a:srgbClr val="CEE2F3"/>
+                        <a:srgbClr val="D1E7FA"/>
                       </a:solidFill>
                       <a:prstDash val="solid"/>
                     </a:lnL>
                     <a:lnR w="9525" cap="flat" cmpd="sng" algn="ctr">
                       <a:solidFill>
-                        <a:srgbClr val="CEE2F3"/>
+                        <a:srgbClr val="D1E7FA"/>
                       </a:solidFill>
                       <a:prstDash val="solid"/>
                     </a:lnR>
                     <a:lnT w="9525" cap="flat" cmpd="sng" algn="ctr">
                       <a:solidFill>
-                        <a:srgbClr val="CEE2F3"/>
+                        <a:srgbClr val="D1E7FA"/>
                       </a:solidFill>
                       <a:prstDash val="solid"/>
                     </a:lnT>
                     <a:lnB w="9525" cap="flat" cmpd="sng" algn="ctr">
                       <a:solidFill>
-                        <a:srgbClr val="CEE2F3"/>
+                        <a:srgbClr val="D1E7FA"/>
                       </a:solidFill>
                       <a:prstDash val="solid"/>
                     </a:lnB>
@@ -4135,7 +4135,7 @@
                       <a:r>
                         <a:rPr sz="1600" b="1">
                           <a:solidFill>
-                            <a:srgbClr val="122A3F"/>
+                            <a:srgbClr val="113B5F"/>
                           </a:solidFill>
                         </a:rPr>
                         <a:t>건강 상태 메모</a:t>
@@ -4145,30 +4145,30 @@
                   <a:tcPr anchor="ctr" marL="73152" marR="73152">
                     <a:lnL w="9525" cap="flat" cmpd="sng" algn="ctr">
                       <a:solidFill>
-                        <a:srgbClr val="CEE2F3"/>
+                        <a:srgbClr val="D1E7FA"/>
                       </a:solidFill>
                       <a:prstDash val="solid"/>
                     </a:lnL>
                     <a:lnR w="9525" cap="flat" cmpd="sng" algn="ctr">
                       <a:solidFill>
-                        <a:srgbClr val="CEE2F3"/>
+                        <a:srgbClr val="D1E7FA"/>
                       </a:solidFill>
                       <a:prstDash val="solid"/>
                     </a:lnR>
                     <a:lnT w="9525" cap="flat" cmpd="sng" algn="ctr">
                       <a:solidFill>
-                        <a:srgbClr val="CEE2F3"/>
+                        <a:srgbClr val="D1E7FA"/>
                       </a:solidFill>
                       <a:prstDash val="solid"/>
                     </a:lnT>
                     <a:lnB w="9525" cap="flat" cmpd="sng" algn="ctr">
                       <a:solidFill>
-                        <a:srgbClr val="CEE2F3"/>
+                        <a:srgbClr val="D1E7FA"/>
                       </a:solidFill>
                       <a:prstDash val="solid"/>
                     </a:lnB>
                     <a:solidFill>
-                      <a:srgbClr val="CEE2F3"/>
+                      <a:srgbClr val="D1E7FA"/>
                     </a:solidFill>
                   </a:tcPr>
                 </a:tc>
@@ -4191,30 +4191,30 @@
                   <a:tcPr anchor="ctr" marL="73152" marR="73152">
                     <a:lnL w="9525" cap="flat" cmpd="sng" algn="ctr">
                       <a:solidFill>
-                        <a:srgbClr val="CEE2F3"/>
+                        <a:srgbClr val="D1E7FA"/>
                       </a:solidFill>
                       <a:prstDash val="solid"/>
                     </a:lnL>
                     <a:lnR w="9525" cap="flat" cmpd="sng" algn="ctr">
                       <a:solidFill>
-                        <a:srgbClr val="CEE2F3"/>
+                        <a:srgbClr val="D1E7FA"/>
                       </a:solidFill>
                       <a:prstDash val="solid"/>
                     </a:lnR>
                     <a:lnT w="9525" cap="flat" cmpd="sng" algn="ctr">
                       <a:solidFill>
-                        <a:srgbClr val="CEE2F3"/>
+                        <a:srgbClr val="D1E7FA"/>
                       </a:solidFill>
                       <a:prstDash val="solid"/>
                     </a:lnT>
                     <a:lnB w="9525" cap="flat" cmpd="sng" algn="ctr">
                       <a:solidFill>
-                        <a:srgbClr val="CEE2F3"/>
+                        <a:srgbClr val="D1E7FA"/>
                       </a:solidFill>
                       <a:prstDash val="solid"/>
                     </a:lnB>
                     <a:solidFill>
-                      <a:srgbClr val="EFF5FA"/>
+                      <a:srgbClr val="EEF5FC"/>
                     </a:solidFill>
                   </a:tcPr>
                 </a:tc>
@@ -4237,30 +4237,30 @@
                   <a:tcPr anchor="ctr" marL="73152" marR="73152">
                     <a:lnL w="9525" cap="flat" cmpd="sng" algn="ctr">
                       <a:solidFill>
-                        <a:srgbClr val="CEE2F3"/>
+                        <a:srgbClr val="D1E7FA"/>
                       </a:solidFill>
                       <a:prstDash val="solid"/>
                     </a:lnL>
                     <a:lnR w="9525" cap="flat" cmpd="sng" algn="ctr">
                       <a:solidFill>
-                        <a:srgbClr val="CEE2F3"/>
+                        <a:srgbClr val="D1E7FA"/>
                       </a:solidFill>
                       <a:prstDash val="solid"/>
                     </a:lnR>
                     <a:lnT w="9525" cap="flat" cmpd="sng" algn="ctr">
                       <a:solidFill>
-                        <a:srgbClr val="CEE2F3"/>
+                        <a:srgbClr val="D1E7FA"/>
                       </a:solidFill>
                       <a:prstDash val="solid"/>
                     </a:lnT>
                     <a:lnB w="9525" cap="flat" cmpd="sng" algn="ctr">
                       <a:solidFill>
-                        <a:srgbClr val="CEE2F3"/>
+                        <a:srgbClr val="D1E7FA"/>
                       </a:solidFill>
                       <a:prstDash val="solid"/>
                     </a:lnB>
                     <a:solidFill>
-                      <a:srgbClr val="EFF5FA"/>
+                      <a:srgbClr val="EEF5FC"/>
                     </a:solidFill>
                   </a:tcPr>
                 </a:tc>
@@ -4283,7 +4283,7 @@
     <p:bg>
       <p:bgPr>
         <a:solidFill>
-          <a:srgbClr val="EFF5FA"/>
+          <a:srgbClr val="EEF5FC"/>
         </a:solidFill>
         <a:effectLst/>
       </p:bgPr>
@@ -4313,7 +4313,7 @@
             </a:avLst>
           </a:prstGeom>
           <a:solidFill>
-            <a:srgbClr val="CEE2F3"/>
+            <a:srgbClr val="D1E7FA"/>
           </a:solidFill>
           <a:ln>
             <a:noFill/>
@@ -4357,7 +4357,7 @@
             <a:r>
               <a:rPr sz="3000" b="1" i="0">
                 <a:solidFill>
-                  <a:srgbClr val="122A3F"/>
+                  <a:srgbClr val="113B5F"/>
                 </a:solidFill>
               </a:rPr>
               <a:t>가입한 보험 목록</a:t>
@@ -4410,30 +4410,30 @@
                   <a:tcPr anchor="ctr" marL="73152" marR="73152">
                     <a:lnL w="9525" cap="flat" cmpd="sng" algn="ctr">
                       <a:solidFill>
-                        <a:srgbClr val="275A86"/>
+                        <a:srgbClr val="267BC5"/>
                       </a:solidFill>
                       <a:prstDash val="solid"/>
                     </a:lnL>
                     <a:lnR w="9525" cap="flat" cmpd="sng" algn="ctr">
                       <a:solidFill>
-                        <a:srgbClr val="275A86"/>
+                        <a:srgbClr val="267BC5"/>
                       </a:solidFill>
                       <a:prstDash val="solid"/>
                     </a:lnR>
                     <a:lnT w="9525" cap="flat" cmpd="sng" algn="ctr">
                       <a:solidFill>
-                        <a:srgbClr val="275A86"/>
+                        <a:srgbClr val="267BC5"/>
                       </a:solidFill>
                       <a:prstDash val="solid"/>
                     </a:lnT>
                     <a:lnB w="9525" cap="flat" cmpd="sng" algn="ctr">
                       <a:solidFill>
-                        <a:srgbClr val="275A86"/>
+                        <a:srgbClr val="267BC5"/>
                       </a:solidFill>
                       <a:prstDash val="solid"/>
                     </a:lnB>
                     <a:solidFill>
-                      <a:srgbClr val="275A86"/>
+                      <a:srgbClr val="267BC5"/>
                     </a:solidFill>
                   </a:tcPr>
                 </a:tc>
@@ -4456,30 +4456,30 @@
                   <a:tcPr anchor="ctr" marL="73152" marR="73152">
                     <a:lnL w="9525" cap="flat" cmpd="sng" algn="ctr">
                       <a:solidFill>
-                        <a:srgbClr val="275A86"/>
+                        <a:srgbClr val="267BC5"/>
                       </a:solidFill>
                       <a:prstDash val="solid"/>
                     </a:lnL>
                     <a:lnR w="9525" cap="flat" cmpd="sng" algn="ctr">
                       <a:solidFill>
-                        <a:srgbClr val="275A86"/>
+                        <a:srgbClr val="267BC5"/>
                       </a:solidFill>
                       <a:prstDash val="solid"/>
                     </a:lnR>
                     <a:lnT w="9525" cap="flat" cmpd="sng" algn="ctr">
                       <a:solidFill>
-                        <a:srgbClr val="275A86"/>
+                        <a:srgbClr val="267BC5"/>
                       </a:solidFill>
                       <a:prstDash val="solid"/>
                     </a:lnT>
                     <a:lnB w="9525" cap="flat" cmpd="sng" algn="ctr">
                       <a:solidFill>
-                        <a:srgbClr val="275A86"/>
+                        <a:srgbClr val="267BC5"/>
                       </a:solidFill>
                       <a:prstDash val="solid"/>
                     </a:lnB>
                     <a:solidFill>
-                      <a:srgbClr val="275A86"/>
+                      <a:srgbClr val="267BC5"/>
                     </a:solidFill>
                   </a:tcPr>
                 </a:tc>
@@ -4502,30 +4502,30 @@
                   <a:tcPr anchor="ctr" marL="73152" marR="73152">
                     <a:lnL w="9525" cap="flat" cmpd="sng" algn="ctr">
                       <a:solidFill>
-                        <a:srgbClr val="275A86"/>
+                        <a:srgbClr val="267BC5"/>
                       </a:solidFill>
                       <a:prstDash val="solid"/>
                     </a:lnL>
                     <a:lnR w="9525" cap="flat" cmpd="sng" algn="ctr">
                       <a:solidFill>
-                        <a:srgbClr val="275A86"/>
+                        <a:srgbClr val="267BC5"/>
                       </a:solidFill>
                       <a:prstDash val="solid"/>
                     </a:lnR>
                     <a:lnT w="9525" cap="flat" cmpd="sng" algn="ctr">
                       <a:solidFill>
-                        <a:srgbClr val="275A86"/>
+                        <a:srgbClr val="267BC5"/>
                       </a:solidFill>
                       <a:prstDash val="solid"/>
                     </a:lnT>
                     <a:lnB w="9525" cap="flat" cmpd="sng" algn="ctr">
                       <a:solidFill>
-                        <a:srgbClr val="275A86"/>
+                        <a:srgbClr val="267BC5"/>
                       </a:solidFill>
                       <a:prstDash val="solid"/>
                     </a:lnB>
                     <a:solidFill>
-                      <a:srgbClr val="275A86"/>
+                      <a:srgbClr val="267BC5"/>
                     </a:solidFill>
                   </a:tcPr>
                 </a:tc>
@@ -4548,30 +4548,30 @@
                   <a:tcPr anchor="ctr" marL="73152" marR="73152">
                     <a:lnL w="9525" cap="flat" cmpd="sng" algn="ctr">
                       <a:solidFill>
-                        <a:srgbClr val="275A86"/>
+                        <a:srgbClr val="267BC5"/>
                       </a:solidFill>
                       <a:prstDash val="solid"/>
                     </a:lnL>
                     <a:lnR w="9525" cap="flat" cmpd="sng" algn="ctr">
                       <a:solidFill>
-                        <a:srgbClr val="275A86"/>
+                        <a:srgbClr val="267BC5"/>
                       </a:solidFill>
                       <a:prstDash val="solid"/>
                     </a:lnR>
                     <a:lnT w="9525" cap="flat" cmpd="sng" algn="ctr">
                       <a:solidFill>
-                        <a:srgbClr val="275A86"/>
+                        <a:srgbClr val="267BC5"/>
                       </a:solidFill>
                       <a:prstDash val="solid"/>
                     </a:lnT>
                     <a:lnB w="9525" cap="flat" cmpd="sng" algn="ctr">
                       <a:solidFill>
-                        <a:srgbClr val="275A86"/>
+                        <a:srgbClr val="267BC5"/>
                       </a:solidFill>
                       <a:prstDash val="solid"/>
                     </a:lnB>
                     <a:solidFill>
-                      <a:srgbClr val="275A86"/>
+                      <a:srgbClr val="267BC5"/>
                     </a:solidFill>
                   </a:tcPr>
                 </a:tc>
@@ -4594,30 +4594,30 @@
                   <a:tcPr anchor="ctr" marL="73152" marR="73152">
                     <a:lnL w="9525" cap="flat" cmpd="sng" algn="ctr">
                       <a:solidFill>
-                        <a:srgbClr val="275A86"/>
+                        <a:srgbClr val="267BC5"/>
                       </a:solidFill>
                       <a:prstDash val="solid"/>
                     </a:lnL>
                     <a:lnR w="9525" cap="flat" cmpd="sng" algn="ctr">
                       <a:solidFill>
-                        <a:srgbClr val="275A86"/>
+                        <a:srgbClr val="267BC5"/>
                       </a:solidFill>
                       <a:prstDash val="solid"/>
                     </a:lnR>
                     <a:lnT w="9525" cap="flat" cmpd="sng" algn="ctr">
                       <a:solidFill>
-                        <a:srgbClr val="275A86"/>
+                        <a:srgbClr val="267BC5"/>
                       </a:solidFill>
                       <a:prstDash val="solid"/>
                     </a:lnT>
                     <a:lnB w="9525" cap="flat" cmpd="sng" algn="ctr">
                       <a:solidFill>
-                        <a:srgbClr val="275A86"/>
+                        <a:srgbClr val="267BC5"/>
                       </a:solidFill>
                       <a:prstDash val="solid"/>
                     </a:lnB>
                     <a:solidFill>
-                      <a:srgbClr val="275A86"/>
+                      <a:srgbClr val="267BC5"/>
                     </a:solidFill>
                   </a:tcPr>
                 </a:tc>
@@ -4642,25 +4642,25 @@
                   <a:tcPr anchor="ctr" marL="73152" marR="73152">
                     <a:lnL w="9525" cap="flat" cmpd="sng" algn="ctr">
                       <a:solidFill>
-                        <a:srgbClr val="CEE2F3"/>
+                        <a:srgbClr val="D1E7FA"/>
                       </a:solidFill>
                       <a:prstDash val="solid"/>
                     </a:lnL>
                     <a:lnR w="9525" cap="flat" cmpd="sng" algn="ctr">
                       <a:solidFill>
-                        <a:srgbClr val="CEE2F3"/>
+                        <a:srgbClr val="D1E7FA"/>
                       </a:solidFill>
                       <a:prstDash val="solid"/>
                     </a:lnR>
                     <a:lnT w="9525" cap="flat" cmpd="sng" algn="ctr">
                       <a:solidFill>
-                        <a:srgbClr val="CEE2F3"/>
+                        <a:srgbClr val="D1E7FA"/>
                       </a:solidFill>
                       <a:prstDash val="solid"/>
                     </a:lnT>
                     <a:lnB w="9525" cap="flat" cmpd="sng" algn="ctr">
                       <a:solidFill>
-                        <a:srgbClr val="CEE2F3"/>
+                        <a:srgbClr val="D1E7FA"/>
                       </a:solidFill>
                       <a:prstDash val="solid"/>
                     </a:lnB>
@@ -4688,25 +4688,25 @@
                   <a:tcPr anchor="ctr" marL="73152" marR="73152">
                     <a:lnL w="9525" cap="flat" cmpd="sng" algn="ctr">
                       <a:solidFill>
-                        <a:srgbClr val="CEE2F3"/>
+                        <a:srgbClr val="D1E7FA"/>
                       </a:solidFill>
                       <a:prstDash val="solid"/>
                     </a:lnL>
                     <a:lnR w="9525" cap="flat" cmpd="sng" algn="ctr">
                       <a:solidFill>
-                        <a:srgbClr val="CEE2F3"/>
+                        <a:srgbClr val="D1E7FA"/>
                       </a:solidFill>
                       <a:prstDash val="solid"/>
                     </a:lnR>
                     <a:lnT w="9525" cap="flat" cmpd="sng" algn="ctr">
                       <a:solidFill>
-                        <a:srgbClr val="CEE2F3"/>
+                        <a:srgbClr val="D1E7FA"/>
                       </a:solidFill>
                       <a:prstDash val="solid"/>
                     </a:lnT>
                     <a:lnB w="9525" cap="flat" cmpd="sng" algn="ctr">
                       <a:solidFill>
-                        <a:srgbClr val="CEE2F3"/>
+                        <a:srgbClr val="D1E7FA"/>
                       </a:solidFill>
                       <a:prstDash val="solid"/>
                     </a:lnB>
@@ -4734,25 +4734,25 @@
                   <a:tcPr anchor="ctr" marL="73152" marR="73152">
                     <a:lnL w="9525" cap="flat" cmpd="sng" algn="ctr">
                       <a:solidFill>
-                        <a:srgbClr val="CEE2F3"/>
+                        <a:srgbClr val="D1E7FA"/>
                       </a:solidFill>
                       <a:prstDash val="solid"/>
                     </a:lnL>
                     <a:lnR w="9525" cap="flat" cmpd="sng" algn="ctr">
                       <a:solidFill>
-                        <a:srgbClr val="CEE2F3"/>
+                        <a:srgbClr val="D1E7FA"/>
                       </a:solidFill>
                       <a:prstDash val="solid"/>
                     </a:lnR>
                     <a:lnT w="9525" cap="flat" cmpd="sng" algn="ctr">
                       <a:solidFill>
-                        <a:srgbClr val="CEE2F3"/>
+                        <a:srgbClr val="D1E7FA"/>
                       </a:solidFill>
                       <a:prstDash val="solid"/>
                     </a:lnT>
                     <a:lnB w="9525" cap="flat" cmpd="sng" algn="ctr">
                       <a:solidFill>
-                        <a:srgbClr val="CEE2F3"/>
+                        <a:srgbClr val="D1E7FA"/>
                       </a:solidFill>
                       <a:prstDash val="solid"/>
                     </a:lnB>
@@ -4780,25 +4780,25 @@
                   <a:tcPr anchor="ctr" marL="73152" marR="73152">
                     <a:lnL w="9525" cap="flat" cmpd="sng" algn="ctr">
                       <a:solidFill>
-                        <a:srgbClr val="CEE2F3"/>
+                        <a:srgbClr val="D1E7FA"/>
                       </a:solidFill>
                       <a:prstDash val="solid"/>
                     </a:lnL>
                     <a:lnR w="9525" cap="flat" cmpd="sng" algn="ctr">
                       <a:solidFill>
-                        <a:srgbClr val="CEE2F3"/>
+                        <a:srgbClr val="D1E7FA"/>
                       </a:solidFill>
                       <a:prstDash val="solid"/>
                     </a:lnR>
                     <a:lnT w="9525" cap="flat" cmpd="sng" algn="ctr">
                       <a:solidFill>
-                        <a:srgbClr val="CEE2F3"/>
+                        <a:srgbClr val="D1E7FA"/>
                       </a:solidFill>
                       <a:prstDash val="solid"/>
                     </a:lnT>
                     <a:lnB w="9525" cap="flat" cmpd="sng" algn="ctr">
                       <a:solidFill>
-                        <a:srgbClr val="CEE2F3"/>
+                        <a:srgbClr val="D1E7FA"/>
                       </a:solidFill>
                       <a:prstDash val="solid"/>
                     </a:lnB>
@@ -4826,25 +4826,25 @@
                   <a:tcPr anchor="ctr" marL="73152" marR="73152">
                     <a:lnL w="9525" cap="flat" cmpd="sng" algn="ctr">
                       <a:solidFill>
-                        <a:srgbClr val="CEE2F3"/>
+                        <a:srgbClr val="D1E7FA"/>
                       </a:solidFill>
                       <a:prstDash val="solid"/>
                     </a:lnL>
                     <a:lnR w="9525" cap="flat" cmpd="sng" algn="ctr">
                       <a:solidFill>
-                        <a:srgbClr val="CEE2F3"/>
+                        <a:srgbClr val="D1E7FA"/>
                       </a:solidFill>
                       <a:prstDash val="solid"/>
                     </a:lnR>
                     <a:lnT w="9525" cap="flat" cmpd="sng" algn="ctr">
                       <a:solidFill>
-                        <a:srgbClr val="CEE2F3"/>
+                        <a:srgbClr val="D1E7FA"/>
                       </a:solidFill>
                       <a:prstDash val="solid"/>
                     </a:lnT>
                     <a:lnB w="9525" cap="flat" cmpd="sng" algn="ctr">
                       <a:solidFill>
-                        <a:srgbClr val="CEE2F3"/>
+                        <a:srgbClr val="D1E7FA"/>
                       </a:solidFill>
                       <a:prstDash val="solid"/>
                     </a:lnB>
@@ -4874,30 +4874,30 @@
                   <a:tcPr anchor="ctr" marL="73152" marR="73152">
                     <a:lnL w="9525" cap="flat" cmpd="sng" algn="ctr">
                       <a:solidFill>
-                        <a:srgbClr val="CEE2F3"/>
+                        <a:srgbClr val="D1E7FA"/>
                       </a:solidFill>
                       <a:prstDash val="solid"/>
                     </a:lnL>
                     <a:lnR w="9525" cap="flat" cmpd="sng" algn="ctr">
                       <a:solidFill>
-                        <a:srgbClr val="CEE2F3"/>
+                        <a:srgbClr val="D1E7FA"/>
                       </a:solidFill>
                       <a:prstDash val="solid"/>
                     </a:lnR>
                     <a:lnT w="9525" cap="flat" cmpd="sng" algn="ctr">
                       <a:solidFill>
-                        <a:srgbClr val="CEE2F3"/>
+                        <a:srgbClr val="D1E7FA"/>
                       </a:solidFill>
                       <a:prstDash val="solid"/>
                     </a:lnT>
                     <a:lnB w="9525" cap="flat" cmpd="sng" algn="ctr">
                       <a:solidFill>
-                        <a:srgbClr val="CEE2F3"/>
+                        <a:srgbClr val="D1E7FA"/>
                       </a:solidFill>
                       <a:prstDash val="solid"/>
                     </a:lnB>
                     <a:solidFill>
-                      <a:srgbClr val="EFF5FA"/>
+                      <a:srgbClr val="EEF5FC"/>
                     </a:solidFill>
                   </a:tcPr>
                 </a:tc>
@@ -4920,30 +4920,30 @@
                   <a:tcPr anchor="ctr" marL="73152" marR="73152">
                     <a:lnL w="9525" cap="flat" cmpd="sng" algn="ctr">
                       <a:solidFill>
-                        <a:srgbClr val="CEE2F3"/>
+                        <a:srgbClr val="D1E7FA"/>
                       </a:solidFill>
                       <a:prstDash val="solid"/>
                     </a:lnL>
                     <a:lnR w="9525" cap="flat" cmpd="sng" algn="ctr">
                       <a:solidFill>
-                        <a:srgbClr val="CEE2F3"/>
+                        <a:srgbClr val="D1E7FA"/>
                       </a:solidFill>
                       <a:prstDash val="solid"/>
                     </a:lnR>
                     <a:lnT w="9525" cap="flat" cmpd="sng" algn="ctr">
                       <a:solidFill>
-                        <a:srgbClr val="CEE2F3"/>
+                        <a:srgbClr val="D1E7FA"/>
                       </a:solidFill>
                       <a:prstDash val="solid"/>
                     </a:lnT>
                     <a:lnB w="9525" cap="flat" cmpd="sng" algn="ctr">
                       <a:solidFill>
-                        <a:srgbClr val="CEE2F3"/>
+                        <a:srgbClr val="D1E7FA"/>
                       </a:solidFill>
                       <a:prstDash val="solid"/>
                     </a:lnB>
                     <a:solidFill>
-                      <a:srgbClr val="EFF5FA"/>
+                      <a:srgbClr val="EEF5FC"/>
                     </a:solidFill>
                   </a:tcPr>
                 </a:tc>
@@ -4966,30 +4966,30 @@
                   <a:tcPr anchor="ctr" marL="73152" marR="73152">
                     <a:lnL w="9525" cap="flat" cmpd="sng" algn="ctr">
                       <a:solidFill>
-                        <a:srgbClr val="CEE2F3"/>
+                        <a:srgbClr val="D1E7FA"/>
                       </a:solidFill>
                       <a:prstDash val="solid"/>
                     </a:lnL>
                     <a:lnR w="9525" cap="flat" cmpd="sng" algn="ctr">
                       <a:solidFill>
-                        <a:srgbClr val="CEE2F3"/>
+                        <a:srgbClr val="D1E7FA"/>
                       </a:solidFill>
                       <a:prstDash val="solid"/>
                     </a:lnR>
                     <a:lnT w="9525" cap="flat" cmpd="sng" algn="ctr">
                       <a:solidFill>
-                        <a:srgbClr val="CEE2F3"/>
+                        <a:srgbClr val="D1E7FA"/>
                       </a:solidFill>
                       <a:prstDash val="solid"/>
                     </a:lnT>
                     <a:lnB w="9525" cap="flat" cmpd="sng" algn="ctr">
                       <a:solidFill>
-                        <a:srgbClr val="CEE2F3"/>
+                        <a:srgbClr val="D1E7FA"/>
                       </a:solidFill>
                       <a:prstDash val="solid"/>
                     </a:lnB>
                     <a:solidFill>
-                      <a:srgbClr val="EFF5FA"/>
+                      <a:srgbClr val="EEF5FC"/>
                     </a:solidFill>
                   </a:tcPr>
                 </a:tc>
@@ -5012,30 +5012,30 @@
                   <a:tcPr anchor="ctr" marL="73152" marR="73152">
                     <a:lnL w="9525" cap="flat" cmpd="sng" algn="ctr">
                       <a:solidFill>
-                        <a:srgbClr val="CEE2F3"/>
+                        <a:srgbClr val="D1E7FA"/>
                       </a:solidFill>
                       <a:prstDash val="solid"/>
                     </a:lnL>
                     <a:lnR w="9525" cap="flat" cmpd="sng" algn="ctr">
                       <a:solidFill>
-                        <a:srgbClr val="CEE2F3"/>
+                        <a:srgbClr val="D1E7FA"/>
                       </a:solidFill>
                       <a:prstDash val="solid"/>
                     </a:lnR>
                     <a:lnT w="9525" cap="flat" cmpd="sng" algn="ctr">
                       <a:solidFill>
-                        <a:srgbClr val="CEE2F3"/>
+                        <a:srgbClr val="D1E7FA"/>
                       </a:solidFill>
                       <a:prstDash val="solid"/>
                     </a:lnT>
                     <a:lnB w="9525" cap="flat" cmpd="sng" algn="ctr">
                       <a:solidFill>
-                        <a:srgbClr val="CEE2F3"/>
+                        <a:srgbClr val="D1E7FA"/>
                       </a:solidFill>
                       <a:prstDash val="solid"/>
                     </a:lnB>
                     <a:solidFill>
-                      <a:srgbClr val="EFF5FA"/>
+                      <a:srgbClr val="EEF5FC"/>
                     </a:solidFill>
                   </a:tcPr>
                 </a:tc>
@@ -5058,30 +5058,30 @@
                   <a:tcPr anchor="ctr" marL="73152" marR="73152">
                     <a:lnL w="9525" cap="flat" cmpd="sng" algn="ctr">
                       <a:solidFill>
-                        <a:srgbClr val="CEE2F3"/>
+                        <a:srgbClr val="D1E7FA"/>
                       </a:solidFill>
                       <a:prstDash val="solid"/>
                     </a:lnL>
                     <a:lnR w="9525" cap="flat" cmpd="sng" algn="ctr">
                       <a:solidFill>
-                        <a:srgbClr val="CEE2F3"/>
+                        <a:srgbClr val="D1E7FA"/>
                       </a:solidFill>
                       <a:prstDash val="solid"/>
                     </a:lnR>
                     <a:lnT w="9525" cap="flat" cmpd="sng" algn="ctr">
                       <a:solidFill>
-                        <a:srgbClr val="CEE2F3"/>
+                        <a:srgbClr val="D1E7FA"/>
                       </a:solidFill>
                       <a:prstDash val="solid"/>
                     </a:lnT>
                     <a:lnB w="9525" cap="flat" cmpd="sng" algn="ctr">
                       <a:solidFill>
-                        <a:srgbClr val="CEE2F3"/>
+                        <a:srgbClr val="D1E7FA"/>
                       </a:solidFill>
                       <a:prstDash val="solid"/>
                     </a:lnB>
                     <a:solidFill>
-                      <a:srgbClr val="EFF5FA"/>
+                      <a:srgbClr val="EEF5FC"/>
                     </a:solidFill>
                   </a:tcPr>
                 </a:tc>
@@ -5106,25 +5106,25 @@
                   <a:tcPr anchor="ctr" marL="73152" marR="73152">
                     <a:lnL w="9525" cap="flat" cmpd="sng" algn="ctr">
                       <a:solidFill>
-                        <a:srgbClr val="CEE2F3"/>
+                        <a:srgbClr val="D1E7FA"/>
                       </a:solidFill>
                       <a:prstDash val="solid"/>
                     </a:lnL>
                     <a:lnR w="9525" cap="flat" cmpd="sng" algn="ctr">
                       <a:solidFill>
-                        <a:srgbClr val="CEE2F3"/>
+                        <a:srgbClr val="D1E7FA"/>
                       </a:solidFill>
                       <a:prstDash val="solid"/>
                     </a:lnR>
                     <a:lnT w="9525" cap="flat" cmpd="sng" algn="ctr">
                       <a:solidFill>
-                        <a:srgbClr val="CEE2F3"/>
+                        <a:srgbClr val="D1E7FA"/>
                       </a:solidFill>
                       <a:prstDash val="solid"/>
                     </a:lnT>
                     <a:lnB w="9525" cap="flat" cmpd="sng" algn="ctr">
                       <a:solidFill>
-                        <a:srgbClr val="CEE2F3"/>
+                        <a:srgbClr val="D1E7FA"/>
                       </a:solidFill>
                       <a:prstDash val="solid"/>
                     </a:lnB>
@@ -5152,25 +5152,25 @@
                   <a:tcPr anchor="ctr" marL="73152" marR="73152">
                     <a:lnL w="9525" cap="flat" cmpd="sng" algn="ctr">
                       <a:solidFill>
-                        <a:srgbClr val="CEE2F3"/>
+                        <a:srgbClr val="D1E7FA"/>
                       </a:solidFill>
                       <a:prstDash val="solid"/>
                     </a:lnL>
                     <a:lnR w="9525" cap="flat" cmpd="sng" algn="ctr">
                       <a:solidFill>
-                        <a:srgbClr val="CEE2F3"/>
+                        <a:srgbClr val="D1E7FA"/>
                       </a:solidFill>
                       <a:prstDash val="solid"/>
                     </a:lnR>
                     <a:lnT w="9525" cap="flat" cmpd="sng" algn="ctr">
                       <a:solidFill>
-                        <a:srgbClr val="CEE2F3"/>
+                        <a:srgbClr val="D1E7FA"/>
                       </a:solidFill>
                       <a:prstDash val="solid"/>
                     </a:lnT>
                     <a:lnB w="9525" cap="flat" cmpd="sng" algn="ctr">
                       <a:solidFill>
-                        <a:srgbClr val="CEE2F3"/>
+                        <a:srgbClr val="D1E7FA"/>
                       </a:solidFill>
                       <a:prstDash val="solid"/>
                     </a:lnB>
@@ -5198,25 +5198,25 @@
                   <a:tcPr anchor="ctr" marL="73152" marR="73152">
                     <a:lnL w="9525" cap="flat" cmpd="sng" algn="ctr">
                       <a:solidFill>
-                        <a:srgbClr val="CEE2F3"/>
+                        <a:srgbClr val="D1E7FA"/>
                       </a:solidFill>
                       <a:prstDash val="solid"/>
                     </a:lnL>
                     <a:lnR w="9525" cap="flat" cmpd="sng" algn="ctr">
                       <a:solidFill>
-                        <a:srgbClr val="CEE2F3"/>
+                        <a:srgbClr val="D1E7FA"/>
                       </a:solidFill>
                       <a:prstDash val="solid"/>
                     </a:lnR>
                     <a:lnT w="9525" cap="flat" cmpd="sng" algn="ctr">
                       <a:solidFill>
-                        <a:srgbClr val="CEE2F3"/>
+                        <a:srgbClr val="D1E7FA"/>
                       </a:solidFill>
                       <a:prstDash val="solid"/>
                     </a:lnT>
                     <a:lnB w="9525" cap="flat" cmpd="sng" algn="ctr">
                       <a:solidFill>
-                        <a:srgbClr val="CEE2F3"/>
+                        <a:srgbClr val="D1E7FA"/>
                       </a:solidFill>
                       <a:prstDash val="solid"/>
                     </a:lnB>
@@ -5244,25 +5244,25 @@
                   <a:tcPr anchor="ctr" marL="73152" marR="73152">
                     <a:lnL w="9525" cap="flat" cmpd="sng" algn="ctr">
                       <a:solidFill>
-                        <a:srgbClr val="CEE2F3"/>
+                        <a:srgbClr val="D1E7FA"/>
                       </a:solidFill>
                       <a:prstDash val="solid"/>
                     </a:lnL>
                     <a:lnR w="9525" cap="flat" cmpd="sng" algn="ctr">
                       <a:solidFill>
-                        <a:srgbClr val="CEE2F3"/>
+                        <a:srgbClr val="D1E7FA"/>
                       </a:solidFill>
                       <a:prstDash val="solid"/>
                     </a:lnR>
                     <a:lnT w="9525" cap="flat" cmpd="sng" algn="ctr">
                       <a:solidFill>
-                        <a:srgbClr val="CEE2F3"/>
+                        <a:srgbClr val="D1E7FA"/>
                       </a:solidFill>
                       <a:prstDash val="solid"/>
                     </a:lnT>
                     <a:lnB w="9525" cap="flat" cmpd="sng" algn="ctr">
                       <a:solidFill>
-                        <a:srgbClr val="CEE2F3"/>
+                        <a:srgbClr val="D1E7FA"/>
                       </a:solidFill>
                       <a:prstDash val="solid"/>
                     </a:lnB>
@@ -5290,25 +5290,25 @@
                   <a:tcPr anchor="ctr" marL="73152" marR="73152">
                     <a:lnL w="9525" cap="flat" cmpd="sng" algn="ctr">
                       <a:solidFill>
-                        <a:srgbClr val="CEE2F3"/>
+                        <a:srgbClr val="D1E7FA"/>
                       </a:solidFill>
                       <a:prstDash val="solid"/>
                     </a:lnL>
                     <a:lnR w="9525" cap="flat" cmpd="sng" algn="ctr">
                       <a:solidFill>
-                        <a:srgbClr val="CEE2F3"/>
+                        <a:srgbClr val="D1E7FA"/>
                       </a:solidFill>
                       <a:prstDash val="solid"/>
                     </a:lnR>
                     <a:lnT w="9525" cap="flat" cmpd="sng" algn="ctr">
                       <a:solidFill>
-                        <a:srgbClr val="CEE2F3"/>
+                        <a:srgbClr val="D1E7FA"/>
                       </a:solidFill>
                       <a:prstDash val="solid"/>
                     </a:lnT>
                     <a:lnB w="9525" cap="flat" cmpd="sng" algn="ctr">
                       <a:solidFill>
-                        <a:srgbClr val="CEE2F3"/>
+                        <a:srgbClr val="D1E7FA"/>
                       </a:solidFill>
                       <a:prstDash val="solid"/>
                     </a:lnB>
@@ -5338,30 +5338,30 @@
                   <a:tcPr anchor="ctr" marL="73152" marR="73152">
                     <a:lnL w="9525" cap="flat" cmpd="sng" algn="ctr">
                       <a:solidFill>
-                        <a:srgbClr val="CEE2F3"/>
+                        <a:srgbClr val="D1E7FA"/>
                       </a:solidFill>
                       <a:prstDash val="solid"/>
                     </a:lnL>
                     <a:lnR w="9525" cap="flat" cmpd="sng" algn="ctr">
                       <a:solidFill>
-                        <a:srgbClr val="CEE2F3"/>
+                        <a:srgbClr val="D1E7FA"/>
                       </a:solidFill>
                       <a:prstDash val="solid"/>
                     </a:lnR>
                     <a:lnT w="9525" cap="flat" cmpd="sng" algn="ctr">
                       <a:solidFill>
-                        <a:srgbClr val="CEE2F3"/>
+                        <a:srgbClr val="D1E7FA"/>
                       </a:solidFill>
                       <a:prstDash val="solid"/>
                     </a:lnT>
                     <a:lnB w="9525" cap="flat" cmpd="sng" algn="ctr">
                       <a:solidFill>
-                        <a:srgbClr val="CEE2F3"/>
+                        <a:srgbClr val="D1E7FA"/>
                       </a:solidFill>
                       <a:prstDash val="solid"/>
                     </a:lnB>
                     <a:solidFill>
-                      <a:srgbClr val="EFF5FA"/>
+                      <a:srgbClr val="EEF5FC"/>
                     </a:solidFill>
                   </a:tcPr>
                 </a:tc>
@@ -5384,30 +5384,30 @@
                   <a:tcPr anchor="ctr" marL="73152" marR="73152">
                     <a:lnL w="9525" cap="flat" cmpd="sng" algn="ctr">
                       <a:solidFill>
-                        <a:srgbClr val="CEE2F3"/>
+                        <a:srgbClr val="D1E7FA"/>
                       </a:solidFill>
                       <a:prstDash val="solid"/>
                     </a:lnL>
                     <a:lnR w="9525" cap="flat" cmpd="sng" algn="ctr">
                       <a:solidFill>
-                        <a:srgbClr val="CEE2F3"/>
+                        <a:srgbClr val="D1E7FA"/>
                       </a:solidFill>
                       <a:prstDash val="solid"/>
                     </a:lnR>
                     <a:lnT w="9525" cap="flat" cmpd="sng" algn="ctr">
                       <a:solidFill>
-                        <a:srgbClr val="CEE2F3"/>
+                        <a:srgbClr val="D1E7FA"/>
                       </a:solidFill>
                       <a:prstDash val="solid"/>
                     </a:lnT>
                     <a:lnB w="9525" cap="flat" cmpd="sng" algn="ctr">
                       <a:solidFill>
-                        <a:srgbClr val="CEE2F3"/>
+                        <a:srgbClr val="D1E7FA"/>
                       </a:solidFill>
                       <a:prstDash val="solid"/>
                     </a:lnB>
                     <a:solidFill>
-                      <a:srgbClr val="EFF5FA"/>
+                      <a:srgbClr val="EEF5FC"/>
                     </a:solidFill>
                   </a:tcPr>
                 </a:tc>
@@ -5430,30 +5430,30 @@
                   <a:tcPr anchor="ctr" marL="73152" marR="73152">
                     <a:lnL w="9525" cap="flat" cmpd="sng" algn="ctr">
                       <a:solidFill>
-                        <a:srgbClr val="CEE2F3"/>
+                        <a:srgbClr val="D1E7FA"/>
                       </a:solidFill>
                       <a:prstDash val="solid"/>
                     </a:lnL>
                     <a:lnR w="9525" cap="flat" cmpd="sng" algn="ctr">
                       <a:solidFill>
-                        <a:srgbClr val="CEE2F3"/>
+                        <a:srgbClr val="D1E7FA"/>
                       </a:solidFill>
                       <a:prstDash val="solid"/>
                     </a:lnR>
                     <a:lnT w="9525" cap="flat" cmpd="sng" algn="ctr">
                       <a:solidFill>
-                        <a:srgbClr val="CEE2F3"/>
+                        <a:srgbClr val="D1E7FA"/>
                       </a:solidFill>
                       <a:prstDash val="solid"/>
                     </a:lnT>
                     <a:lnB w="9525" cap="flat" cmpd="sng" algn="ctr">
                       <a:solidFill>
-                        <a:srgbClr val="CEE2F3"/>
+                        <a:srgbClr val="D1E7FA"/>
                       </a:solidFill>
                       <a:prstDash val="solid"/>
                     </a:lnB>
                     <a:solidFill>
-                      <a:srgbClr val="EFF5FA"/>
+                      <a:srgbClr val="EEF5FC"/>
                     </a:solidFill>
                   </a:tcPr>
                 </a:tc>
@@ -5476,30 +5476,30 @@
                   <a:tcPr anchor="ctr" marL="73152" marR="73152">
                     <a:lnL w="9525" cap="flat" cmpd="sng" algn="ctr">
                       <a:solidFill>
-                        <a:srgbClr val="CEE2F3"/>
+                        <a:srgbClr val="D1E7FA"/>
                       </a:solidFill>
                       <a:prstDash val="solid"/>
                     </a:lnL>
                     <a:lnR w="9525" cap="flat" cmpd="sng" algn="ctr">
                       <a:solidFill>
-                        <a:srgbClr val="CEE2F3"/>
+                        <a:srgbClr val="D1E7FA"/>
                       </a:solidFill>
                       <a:prstDash val="solid"/>
                     </a:lnR>
                     <a:lnT w="9525" cap="flat" cmpd="sng" algn="ctr">
                       <a:solidFill>
-                        <a:srgbClr val="CEE2F3"/>
+                        <a:srgbClr val="D1E7FA"/>
                       </a:solidFill>
                       <a:prstDash val="solid"/>
                     </a:lnT>
                     <a:lnB w="9525" cap="flat" cmpd="sng" algn="ctr">
                       <a:solidFill>
-                        <a:srgbClr val="CEE2F3"/>
+                        <a:srgbClr val="D1E7FA"/>
                       </a:solidFill>
                       <a:prstDash val="solid"/>
                     </a:lnB>
                     <a:solidFill>
-                      <a:srgbClr val="EFF5FA"/>
+                      <a:srgbClr val="EEF5FC"/>
                     </a:solidFill>
                   </a:tcPr>
                 </a:tc>
@@ -5522,30 +5522,30 @@
                   <a:tcPr anchor="ctr" marL="73152" marR="73152">
                     <a:lnL w="9525" cap="flat" cmpd="sng" algn="ctr">
                       <a:solidFill>
-                        <a:srgbClr val="CEE2F3"/>
+                        <a:srgbClr val="D1E7FA"/>
                       </a:solidFill>
                       <a:prstDash val="solid"/>
                     </a:lnL>
                     <a:lnR w="9525" cap="flat" cmpd="sng" algn="ctr">
                       <a:solidFill>
-                        <a:srgbClr val="CEE2F3"/>
+                        <a:srgbClr val="D1E7FA"/>
                       </a:solidFill>
                       <a:prstDash val="solid"/>
                     </a:lnR>
                     <a:lnT w="9525" cap="flat" cmpd="sng" algn="ctr">
                       <a:solidFill>
-                        <a:srgbClr val="CEE2F3"/>
+                        <a:srgbClr val="D1E7FA"/>
                       </a:solidFill>
                       <a:prstDash val="solid"/>
                     </a:lnT>
                     <a:lnB w="9525" cap="flat" cmpd="sng" algn="ctr">
                       <a:solidFill>
-                        <a:srgbClr val="CEE2F3"/>
+                        <a:srgbClr val="D1E7FA"/>
                       </a:solidFill>
                       <a:prstDash val="solid"/>
                     </a:lnB>
                     <a:solidFill>
-                      <a:srgbClr val="EFF5FA"/>
+                      <a:srgbClr val="EEF5FC"/>
                     </a:solidFill>
                   </a:tcPr>
                 </a:tc>
@@ -5570,25 +5570,25 @@
                   <a:tcPr anchor="ctr" marL="73152" marR="73152">
                     <a:lnL w="9525" cap="flat" cmpd="sng" algn="ctr">
                       <a:solidFill>
-                        <a:srgbClr val="CEE2F3"/>
+                        <a:srgbClr val="D1E7FA"/>
                       </a:solidFill>
                       <a:prstDash val="solid"/>
                     </a:lnL>
                     <a:lnR w="9525" cap="flat" cmpd="sng" algn="ctr">
                       <a:solidFill>
-                        <a:srgbClr val="CEE2F3"/>
+                        <a:srgbClr val="D1E7FA"/>
                       </a:solidFill>
                       <a:prstDash val="solid"/>
                     </a:lnR>
                     <a:lnT w="9525" cap="flat" cmpd="sng" algn="ctr">
                       <a:solidFill>
-                        <a:srgbClr val="CEE2F3"/>
+                        <a:srgbClr val="D1E7FA"/>
                       </a:solidFill>
                       <a:prstDash val="solid"/>
                     </a:lnT>
                     <a:lnB w="9525" cap="flat" cmpd="sng" algn="ctr">
                       <a:solidFill>
-                        <a:srgbClr val="CEE2F3"/>
+                        <a:srgbClr val="D1E7FA"/>
                       </a:solidFill>
                       <a:prstDash val="solid"/>
                     </a:lnB>
@@ -5616,25 +5616,25 @@
                   <a:tcPr anchor="ctr" marL="73152" marR="73152">
                     <a:lnL w="9525" cap="flat" cmpd="sng" algn="ctr">
                       <a:solidFill>
-                        <a:srgbClr val="CEE2F3"/>
+                        <a:srgbClr val="D1E7FA"/>
                       </a:solidFill>
                       <a:prstDash val="solid"/>
                     </a:lnL>
                     <a:lnR w="9525" cap="flat" cmpd="sng" algn="ctr">
                       <a:solidFill>
-                        <a:srgbClr val="CEE2F3"/>
+                        <a:srgbClr val="D1E7FA"/>
                       </a:solidFill>
                       <a:prstDash val="solid"/>
                     </a:lnR>
                     <a:lnT w="9525" cap="flat" cmpd="sng" algn="ctr">
                       <a:solidFill>
-                        <a:srgbClr val="CEE2F3"/>
+                        <a:srgbClr val="D1E7FA"/>
                       </a:solidFill>
                       <a:prstDash val="solid"/>
                     </a:lnT>
                     <a:lnB w="9525" cap="flat" cmpd="sng" algn="ctr">
                       <a:solidFill>
-                        <a:srgbClr val="CEE2F3"/>
+                        <a:srgbClr val="D1E7FA"/>
                       </a:solidFill>
                       <a:prstDash val="solid"/>
                     </a:lnB>
@@ -5662,25 +5662,25 @@
                   <a:tcPr anchor="ctr" marL="73152" marR="73152">
                     <a:lnL w="9525" cap="flat" cmpd="sng" algn="ctr">
                       <a:solidFill>
-                        <a:srgbClr val="CEE2F3"/>
+                        <a:srgbClr val="D1E7FA"/>
                       </a:solidFill>
                       <a:prstDash val="solid"/>
                     </a:lnL>
                     <a:lnR w="9525" cap="flat" cmpd="sng" algn="ctr">
                       <a:solidFill>
-                        <a:srgbClr val="CEE2F3"/>
+                        <a:srgbClr val="D1E7FA"/>
                       </a:solidFill>
                       <a:prstDash val="solid"/>
                     </a:lnR>
                     <a:lnT w="9525" cap="flat" cmpd="sng" algn="ctr">
                       <a:solidFill>
-                        <a:srgbClr val="CEE2F3"/>
+                        <a:srgbClr val="D1E7FA"/>
                       </a:solidFill>
                       <a:prstDash val="solid"/>
                     </a:lnT>
                     <a:lnB w="9525" cap="flat" cmpd="sng" algn="ctr">
                       <a:solidFill>
-                        <a:srgbClr val="CEE2F3"/>
+                        <a:srgbClr val="D1E7FA"/>
                       </a:solidFill>
                       <a:prstDash val="solid"/>
                     </a:lnB>
@@ -5708,25 +5708,25 @@
                   <a:tcPr anchor="ctr" marL="73152" marR="73152">
                     <a:lnL w="9525" cap="flat" cmpd="sng" algn="ctr">
                       <a:solidFill>
-                        <a:srgbClr val="CEE2F3"/>
+                        <a:srgbClr val="D1E7FA"/>
                       </a:solidFill>
                       <a:prstDash val="solid"/>
                     </a:lnL>
                     <a:lnR w="9525" cap="flat" cmpd="sng" algn="ctr">
                       <a:solidFill>
-                        <a:srgbClr val="CEE2F3"/>
+                        <a:srgbClr val="D1E7FA"/>
                       </a:solidFill>
                       <a:prstDash val="solid"/>
                     </a:lnR>
                     <a:lnT w="9525" cap="flat" cmpd="sng" algn="ctr">
                       <a:solidFill>
-                        <a:srgbClr val="CEE2F3"/>
+                        <a:srgbClr val="D1E7FA"/>
                       </a:solidFill>
                       <a:prstDash val="solid"/>
                     </a:lnT>
                     <a:lnB w="9525" cap="flat" cmpd="sng" algn="ctr">
                       <a:solidFill>
-                        <a:srgbClr val="CEE2F3"/>
+                        <a:srgbClr val="D1E7FA"/>
                       </a:solidFill>
                       <a:prstDash val="solid"/>
                     </a:lnB>
@@ -5754,25 +5754,25 @@
                   <a:tcPr anchor="ctr" marL="73152" marR="73152">
                     <a:lnL w="9525" cap="flat" cmpd="sng" algn="ctr">
                       <a:solidFill>
-                        <a:srgbClr val="CEE2F3"/>
+                        <a:srgbClr val="D1E7FA"/>
                       </a:solidFill>
                       <a:prstDash val="solid"/>
                     </a:lnL>
                     <a:lnR w="9525" cap="flat" cmpd="sng" algn="ctr">
                       <a:solidFill>
-                        <a:srgbClr val="CEE2F3"/>
+                        <a:srgbClr val="D1E7FA"/>
                       </a:solidFill>
                       <a:prstDash val="solid"/>
                     </a:lnR>
                     <a:lnT w="9525" cap="flat" cmpd="sng" algn="ctr">
                       <a:solidFill>
-                        <a:srgbClr val="CEE2F3"/>
+                        <a:srgbClr val="D1E7FA"/>
                       </a:solidFill>
                       <a:prstDash val="solid"/>
                     </a:lnT>
                     <a:lnB w="9525" cap="flat" cmpd="sng" algn="ctr">
                       <a:solidFill>
-                        <a:srgbClr val="CEE2F3"/>
+                        <a:srgbClr val="D1E7FA"/>
                       </a:solidFill>
                       <a:prstDash val="solid"/>
                     </a:lnB>
@@ -5802,30 +5802,30 @@
                   <a:tcPr anchor="ctr" marL="73152" marR="73152">
                     <a:lnL w="9525" cap="flat" cmpd="sng" algn="ctr">
                       <a:solidFill>
-                        <a:srgbClr val="CEE2F3"/>
+                        <a:srgbClr val="D1E7FA"/>
                       </a:solidFill>
                       <a:prstDash val="solid"/>
                     </a:lnL>
                     <a:lnR w="9525" cap="flat" cmpd="sng" algn="ctr">
                       <a:solidFill>
-                        <a:srgbClr val="CEE2F3"/>
+                        <a:srgbClr val="D1E7FA"/>
                       </a:solidFill>
                       <a:prstDash val="solid"/>
                     </a:lnR>
                     <a:lnT w="9525" cap="flat" cmpd="sng" algn="ctr">
                       <a:solidFill>
-                        <a:srgbClr val="CEE2F3"/>
+                        <a:srgbClr val="D1E7FA"/>
                       </a:solidFill>
                       <a:prstDash val="solid"/>
                     </a:lnT>
                     <a:lnB w="9525" cap="flat" cmpd="sng" algn="ctr">
                       <a:solidFill>
-                        <a:srgbClr val="CEE2F3"/>
+                        <a:srgbClr val="D1E7FA"/>
                       </a:solidFill>
                       <a:prstDash val="solid"/>
                     </a:lnB>
                     <a:solidFill>
-                      <a:srgbClr val="EFF5FA"/>
+                      <a:srgbClr val="EEF5FC"/>
                     </a:solidFill>
                   </a:tcPr>
                 </a:tc>
@@ -5848,30 +5848,30 @@
                   <a:tcPr anchor="ctr" marL="73152" marR="73152">
                     <a:lnL w="9525" cap="flat" cmpd="sng" algn="ctr">
                       <a:solidFill>
-                        <a:srgbClr val="CEE2F3"/>
+                        <a:srgbClr val="D1E7FA"/>
                       </a:solidFill>
                       <a:prstDash val="solid"/>
                     </a:lnL>
                     <a:lnR w="9525" cap="flat" cmpd="sng" algn="ctr">
                       <a:solidFill>
-                        <a:srgbClr val="CEE2F3"/>
+                        <a:srgbClr val="D1E7FA"/>
                       </a:solidFill>
                       <a:prstDash val="solid"/>
                     </a:lnR>
                     <a:lnT w="9525" cap="flat" cmpd="sng" algn="ctr">
                       <a:solidFill>
-                        <a:srgbClr val="CEE2F3"/>
+                        <a:srgbClr val="D1E7FA"/>
                       </a:solidFill>
                       <a:prstDash val="solid"/>
                     </a:lnT>
                     <a:lnB w="9525" cap="flat" cmpd="sng" algn="ctr">
                       <a:solidFill>
-                        <a:srgbClr val="CEE2F3"/>
+                        <a:srgbClr val="D1E7FA"/>
                       </a:solidFill>
                       <a:prstDash val="solid"/>
                     </a:lnB>
                     <a:solidFill>
-                      <a:srgbClr val="EFF5FA"/>
+                      <a:srgbClr val="EEF5FC"/>
                     </a:solidFill>
                   </a:tcPr>
                 </a:tc>
@@ -5894,30 +5894,30 @@
                   <a:tcPr anchor="ctr" marL="73152" marR="73152">
                     <a:lnL w="9525" cap="flat" cmpd="sng" algn="ctr">
                       <a:solidFill>
-                        <a:srgbClr val="CEE2F3"/>
+                        <a:srgbClr val="D1E7FA"/>
                       </a:solidFill>
                       <a:prstDash val="solid"/>
                     </a:lnL>
                     <a:lnR w="9525" cap="flat" cmpd="sng" algn="ctr">
                       <a:solidFill>
-                        <a:srgbClr val="CEE2F3"/>
+                        <a:srgbClr val="D1E7FA"/>
                       </a:solidFill>
                       <a:prstDash val="solid"/>
                     </a:lnR>
                     <a:lnT w="9525" cap="flat" cmpd="sng" algn="ctr">
                       <a:solidFill>
-                        <a:srgbClr val="CEE2F3"/>
+                        <a:srgbClr val="D1E7FA"/>
                       </a:solidFill>
                       <a:prstDash val="solid"/>
                     </a:lnT>
                     <a:lnB w="9525" cap="flat" cmpd="sng" algn="ctr">
                       <a:solidFill>
-                        <a:srgbClr val="CEE2F3"/>
+                        <a:srgbClr val="D1E7FA"/>
                       </a:solidFill>
                       <a:prstDash val="solid"/>
                     </a:lnB>
                     <a:solidFill>
-                      <a:srgbClr val="EFF5FA"/>
+                      <a:srgbClr val="EEF5FC"/>
                     </a:solidFill>
                   </a:tcPr>
                 </a:tc>
@@ -5940,30 +5940,30 @@
                   <a:tcPr anchor="ctr" marL="73152" marR="73152">
                     <a:lnL w="9525" cap="flat" cmpd="sng" algn="ctr">
                       <a:solidFill>
-                        <a:srgbClr val="CEE2F3"/>
+                        <a:srgbClr val="D1E7FA"/>
                       </a:solidFill>
                       <a:prstDash val="solid"/>
                     </a:lnL>
                     <a:lnR w="9525" cap="flat" cmpd="sng" algn="ctr">
                       <a:solidFill>
-                        <a:srgbClr val="CEE2F3"/>
+                        <a:srgbClr val="D1E7FA"/>
                       </a:solidFill>
                       <a:prstDash val="solid"/>
                     </a:lnR>
                     <a:lnT w="9525" cap="flat" cmpd="sng" algn="ctr">
                       <a:solidFill>
-                        <a:srgbClr val="CEE2F3"/>
+                        <a:srgbClr val="D1E7FA"/>
                       </a:solidFill>
                       <a:prstDash val="solid"/>
                     </a:lnT>
                     <a:lnB w="9525" cap="flat" cmpd="sng" algn="ctr">
                       <a:solidFill>
-                        <a:srgbClr val="CEE2F3"/>
+                        <a:srgbClr val="D1E7FA"/>
                       </a:solidFill>
                       <a:prstDash val="solid"/>
                     </a:lnB>
                     <a:solidFill>
-                      <a:srgbClr val="EFF5FA"/>
+                      <a:srgbClr val="EEF5FC"/>
                     </a:solidFill>
                   </a:tcPr>
                 </a:tc>
@@ -5986,30 +5986,30 @@
                   <a:tcPr anchor="ctr" marL="73152" marR="73152">
                     <a:lnL w="9525" cap="flat" cmpd="sng" algn="ctr">
                       <a:solidFill>
-                        <a:srgbClr val="CEE2F3"/>
+                        <a:srgbClr val="D1E7FA"/>
                       </a:solidFill>
                       <a:prstDash val="solid"/>
                     </a:lnL>
                     <a:lnR w="9525" cap="flat" cmpd="sng" algn="ctr">
                       <a:solidFill>
-                        <a:srgbClr val="CEE2F3"/>
+                        <a:srgbClr val="D1E7FA"/>
                       </a:solidFill>
                       <a:prstDash val="solid"/>
                     </a:lnR>
                     <a:lnT w="9525" cap="flat" cmpd="sng" algn="ctr">
                       <a:solidFill>
-                        <a:srgbClr val="CEE2F3"/>
+                        <a:srgbClr val="D1E7FA"/>
                       </a:solidFill>
                       <a:prstDash val="solid"/>
                     </a:lnT>
                     <a:lnB w="9525" cap="flat" cmpd="sng" algn="ctr">
                       <a:solidFill>
-                        <a:srgbClr val="CEE2F3"/>
+                        <a:srgbClr val="D1E7FA"/>
                       </a:solidFill>
                       <a:prstDash val="solid"/>
                     </a:lnB>
                     <a:solidFill>
-                      <a:srgbClr val="EFF5FA"/>
+                      <a:srgbClr val="EEF5FC"/>
                     </a:solidFill>
                   </a:tcPr>
                 </a:tc>
@@ -6032,7 +6032,7 @@
     <p:bg>
       <p:bgPr>
         <a:solidFill>
-          <a:srgbClr val="EFF5FA"/>
+          <a:srgbClr val="EEF5FC"/>
         </a:solidFill>
         <a:effectLst/>
       </p:bgPr>
@@ -6062,7 +6062,7 @@
             </a:avLst>
           </a:prstGeom>
           <a:solidFill>
-            <a:srgbClr val="CEE2F3"/>
+            <a:srgbClr val="D1E7FA"/>
           </a:solidFill>
           <a:ln>
             <a:noFill/>
@@ -6106,7 +6106,7 @@
             <a:r>
               <a:rPr sz="3000" b="1" i="0">
                 <a:solidFill>
-                  <a:srgbClr val="122A3F"/>
+                  <a:srgbClr val="113B5F"/>
                 </a:solidFill>
               </a:rPr>
               <a:t>보장 항목 체크</a:t>
@@ -6158,30 +6158,30 @@
                   <a:tcPr anchor="ctr" marL="73152" marR="73152">
                     <a:lnL w="9525" cap="flat" cmpd="sng" algn="ctr">
                       <a:solidFill>
-                        <a:srgbClr val="275A86"/>
+                        <a:srgbClr val="267BC5"/>
                       </a:solidFill>
                       <a:prstDash val="solid"/>
                     </a:lnL>
                     <a:lnR w="9525" cap="flat" cmpd="sng" algn="ctr">
                       <a:solidFill>
-                        <a:srgbClr val="275A86"/>
+                        <a:srgbClr val="267BC5"/>
                       </a:solidFill>
                       <a:prstDash val="solid"/>
                     </a:lnR>
                     <a:lnT w="9525" cap="flat" cmpd="sng" algn="ctr">
                       <a:solidFill>
-                        <a:srgbClr val="275A86"/>
+                        <a:srgbClr val="267BC5"/>
                       </a:solidFill>
                       <a:prstDash val="solid"/>
                     </a:lnT>
                     <a:lnB w="9525" cap="flat" cmpd="sng" algn="ctr">
                       <a:solidFill>
-                        <a:srgbClr val="275A86"/>
+                        <a:srgbClr val="267BC5"/>
                       </a:solidFill>
                       <a:prstDash val="solid"/>
                     </a:lnB>
                     <a:solidFill>
-                      <a:srgbClr val="275A86"/>
+                      <a:srgbClr val="267BC5"/>
                     </a:solidFill>
                   </a:tcPr>
                 </a:tc>
@@ -6204,30 +6204,30 @@
                   <a:tcPr anchor="ctr" marL="73152" marR="73152">
                     <a:lnL w="9525" cap="flat" cmpd="sng" algn="ctr">
                       <a:solidFill>
-                        <a:srgbClr val="275A86"/>
+                        <a:srgbClr val="267BC5"/>
                       </a:solidFill>
                       <a:prstDash val="solid"/>
                     </a:lnL>
                     <a:lnR w="9525" cap="flat" cmpd="sng" algn="ctr">
                       <a:solidFill>
-                        <a:srgbClr val="275A86"/>
+                        <a:srgbClr val="267BC5"/>
                       </a:solidFill>
                       <a:prstDash val="solid"/>
                     </a:lnR>
                     <a:lnT w="9525" cap="flat" cmpd="sng" algn="ctr">
                       <a:solidFill>
-                        <a:srgbClr val="275A86"/>
+                        <a:srgbClr val="267BC5"/>
                       </a:solidFill>
                       <a:prstDash val="solid"/>
                     </a:lnT>
                     <a:lnB w="9525" cap="flat" cmpd="sng" algn="ctr">
                       <a:solidFill>
-                        <a:srgbClr val="275A86"/>
+                        <a:srgbClr val="267BC5"/>
                       </a:solidFill>
                       <a:prstDash val="solid"/>
                     </a:lnB>
                     <a:solidFill>
-                      <a:srgbClr val="275A86"/>
+                      <a:srgbClr val="267BC5"/>
                     </a:solidFill>
                   </a:tcPr>
                 </a:tc>
@@ -6250,30 +6250,30 @@
                   <a:tcPr anchor="ctr" marL="73152" marR="73152">
                     <a:lnL w="9525" cap="flat" cmpd="sng" algn="ctr">
                       <a:solidFill>
-                        <a:srgbClr val="275A86"/>
+                        <a:srgbClr val="267BC5"/>
                       </a:solidFill>
                       <a:prstDash val="solid"/>
                     </a:lnL>
                     <a:lnR w="9525" cap="flat" cmpd="sng" algn="ctr">
                       <a:solidFill>
-                        <a:srgbClr val="275A86"/>
+                        <a:srgbClr val="267BC5"/>
                       </a:solidFill>
                       <a:prstDash val="solid"/>
                     </a:lnR>
                     <a:lnT w="9525" cap="flat" cmpd="sng" algn="ctr">
                       <a:solidFill>
-                        <a:srgbClr val="275A86"/>
+                        <a:srgbClr val="267BC5"/>
                       </a:solidFill>
                       <a:prstDash val="solid"/>
                     </a:lnT>
                     <a:lnB w="9525" cap="flat" cmpd="sng" algn="ctr">
                       <a:solidFill>
-                        <a:srgbClr val="275A86"/>
+                        <a:srgbClr val="267BC5"/>
                       </a:solidFill>
                       <a:prstDash val="solid"/>
                     </a:lnB>
                     <a:solidFill>
-                      <a:srgbClr val="275A86"/>
+                      <a:srgbClr val="267BC5"/>
                     </a:solidFill>
                   </a:tcPr>
                 </a:tc>
@@ -6296,30 +6296,30 @@
                   <a:tcPr anchor="ctr" marL="73152" marR="73152">
                     <a:lnL w="9525" cap="flat" cmpd="sng" algn="ctr">
                       <a:solidFill>
-                        <a:srgbClr val="275A86"/>
+                        <a:srgbClr val="267BC5"/>
                       </a:solidFill>
                       <a:prstDash val="solid"/>
                     </a:lnL>
                     <a:lnR w="9525" cap="flat" cmpd="sng" algn="ctr">
                       <a:solidFill>
-                        <a:srgbClr val="275A86"/>
+                        <a:srgbClr val="267BC5"/>
                       </a:solidFill>
                       <a:prstDash val="solid"/>
                     </a:lnR>
                     <a:lnT w="9525" cap="flat" cmpd="sng" algn="ctr">
                       <a:solidFill>
-                        <a:srgbClr val="275A86"/>
+                        <a:srgbClr val="267BC5"/>
                       </a:solidFill>
                       <a:prstDash val="solid"/>
                     </a:lnT>
                     <a:lnB w="9525" cap="flat" cmpd="sng" algn="ctr">
                       <a:solidFill>
-                        <a:srgbClr val="275A86"/>
+                        <a:srgbClr val="267BC5"/>
                       </a:solidFill>
                       <a:prstDash val="solid"/>
                     </a:lnB>
                     <a:solidFill>
-                      <a:srgbClr val="275A86"/>
+                      <a:srgbClr val="267BC5"/>
                     </a:solidFill>
                   </a:tcPr>
                 </a:tc>
@@ -6334,7 +6334,7 @@
                       <a:r>
                         <a:rPr sz="1400" b="1">
                           <a:solidFill>
-                            <a:srgbClr val="122A3F"/>
+                            <a:srgbClr val="113B5F"/>
                           </a:solidFill>
                         </a:rPr>
                         <a:t>사망·재해</a:t>
@@ -6344,30 +6344,30 @@
                   <a:tcPr anchor="ctr" marL="73152" marR="73152">
                     <a:lnL w="9525" cap="flat" cmpd="sng" algn="ctr">
                       <a:solidFill>
-                        <a:srgbClr val="CEE2F3"/>
+                        <a:srgbClr val="D1E7FA"/>
                       </a:solidFill>
                       <a:prstDash val="solid"/>
                     </a:lnL>
                     <a:lnR w="9525" cap="flat" cmpd="sng" algn="ctr">
                       <a:solidFill>
-                        <a:srgbClr val="CEE2F3"/>
+                        <a:srgbClr val="D1E7FA"/>
                       </a:solidFill>
                       <a:prstDash val="solid"/>
                     </a:lnR>
                     <a:lnT w="9525" cap="flat" cmpd="sng" algn="ctr">
                       <a:solidFill>
-                        <a:srgbClr val="CEE2F3"/>
+                        <a:srgbClr val="D1E7FA"/>
                       </a:solidFill>
                       <a:prstDash val="solid"/>
                     </a:lnT>
                     <a:lnB w="9525" cap="flat" cmpd="sng" algn="ctr">
                       <a:solidFill>
-                        <a:srgbClr val="CEE2F3"/>
+                        <a:srgbClr val="D1E7FA"/>
                       </a:solidFill>
                       <a:prstDash val="solid"/>
                     </a:lnB>
                     <a:solidFill>
-                      <a:srgbClr val="CEE2F3"/>
+                      <a:srgbClr val="D1E7FA"/>
                     </a:solidFill>
                   </a:tcPr>
                 </a:tc>
@@ -6390,25 +6390,25 @@
                   <a:tcPr anchor="ctr" marL="73152" marR="73152">
                     <a:lnL w="9525" cap="flat" cmpd="sng" algn="ctr">
                       <a:solidFill>
-                        <a:srgbClr val="CEE2F3"/>
+                        <a:srgbClr val="D1E7FA"/>
                       </a:solidFill>
                       <a:prstDash val="solid"/>
                     </a:lnL>
                     <a:lnR w="9525" cap="flat" cmpd="sng" algn="ctr">
                       <a:solidFill>
-                        <a:srgbClr val="CEE2F3"/>
+                        <a:srgbClr val="D1E7FA"/>
                       </a:solidFill>
                       <a:prstDash val="solid"/>
                     </a:lnR>
                     <a:lnT w="9525" cap="flat" cmpd="sng" algn="ctr">
                       <a:solidFill>
-                        <a:srgbClr val="CEE2F3"/>
+                        <a:srgbClr val="D1E7FA"/>
                       </a:solidFill>
                       <a:prstDash val="solid"/>
                     </a:lnT>
                     <a:lnB w="9525" cap="flat" cmpd="sng" algn="ctr">
                       <a:solidFill>
-                        <a:srgbClr val="CEE2F3"/>
+                        <a:srgbClr val="D1E7FA"/>
                       </a:solidFill>
                       <a:prstDash val="solid"/>
                     </a:lnB>
@@ -6436,25 +6436,25 @@
                   <a:tcPr anchor="ctr" marL="73152" marR="73152">
                     <a:lnL w="9525" cap="flat" cmpd="sng" algn="ctr">
                       <a:solidFill>
-                        <a:srgbClr val="CEE2F3"/>
+                        <a:srgbClr val="D1E7FA"/>
                       </a:solidFill>
                       <a:prstDash val="solid"/>
                     </a:lnL>
                     <a:lnR w="9525" cap="flat" cmpd="sng" algn="ctr">
                       <a:solidFill>
-                        <a:srgbClr val="CEE2F3"/>
+                        <a:srgbClr val="D1E7FA"/>
                       </a:solidFill>
                       <a:prstDash val="solid"/>
                     </a:lnR>
                     <a:lnT w="9525" cap="flat" cmpd="sng" algn="ctr">
                       <a:solidFill>
-                        <a:srgbClr val="CEE2F3"/>
+                        <a:srgbClr val="D1E7FA"/>
                       </a:solidFill>
                       <a:prstDash val="solid"/>
                     </a:lnT>
                     <a:lnB w="9525" cap="flat" cmpd="sng" algn="ctr">
                       <a:solidFill>
-                        <a:srgbClr val="CEE2F3"/>
+                        <a:srgbClr val="D1E7FA"/>
                       </a:solidFill>
                       <a:prstDash val="solid"/>
                     </a:lnB>
@@ -6482,25 +6482,25 @@
                   <a:tcPr anchor="ctr" marL="73152" marR="73152">
                     <a:lnL w="9525" cap="flat" cmpd="sng" algn="ctr">
                       <a:solidFill>
-                        <a:srgbClr val="CEE2F3"/>
+                        <a:srgbClr val="D1E7FA"/>
                       </a:solidFill>
                       <a:prstDash val="solid"/>
                     </a:lnL>
                     <a:lnR w="9525" cap="flat" cmpd="sng" algn="ctr">
                       <a:solidFill>
-                        <a:srgbClr val="CEE2F3"/>
+                        <a:srgbClr val="D1E7FA"/>
                       </a:solidFill>
                       <a:prstDash val="solid"/>
                     </a:lnR>
                     <a:lnT w="9525" cap="flat" cmpd="sng" algn="ctr">
                       <a:solidFill>
-                        <a:srgbClr val="CEE2F3"/>
+                        <a:srgbClr val="D1E7FA"/>
                       </a:solidFill>
                       <a:prstDash val="solid"/>
                     </a:lnT>
                     <a:lnB w="9525" cap="flat" cmpd="sng" algn="ctr">
                       <a:solidFill>
-                        <a:srgbClr val="CEE2F3"/>
+                        <a:srgbClr val="D1E7FA"/>
                       </a:solidFill>
                       <a:prstDash val="solid"/>
                     </a:lnB>
@@ -6520,7 +6520,7 @@
                       <a:r>
                         <a:rPr sz="1400" b="1">
                           <a:solidFill>
-                            <a:srgbClr val="122A3F"/>
+                            <a:srgbClr val="113B5F"/>
                           </a:solidFill>
                         </a:rPr>
                         <a:t>질병 진단</a:t>
@@ -6530,30 +6530,30 @@
                   <a:tcPr anchor="ctr" marL="73152" marR="73152">
                     <a:lnL w="9525" cap="flat" cmpd="sng" algn="ctr">
                       <a:solidFill>
-                        <a:srgbClr val="CEE2F3"/>
+                        <a:srgbClr val="D1E7FA"/>
                       </a:solidFill>
                       <a:prstDash val="solid"/>
                     </a:lnL>
                     <a:lnR w="9525" cap="flat" cmpd="sng" algn="ctr">
                       <a:solidFill>
-                        <a:srgbClr val="CEE2F3"/>
+                        <a:srgbClr val="D1E7FA"/>
                       </a:solidFill>
                       <a:prstDash val="solid"/>
                     </a:lnR>
                     <a:lnT w="9525" cap="flat" cmpd="sng" algn="ctr">
                       <a:solidFill>
-                        <a:srgbClr val="CEE2F3"/>
+                        <a:srgbClr val="D1E7FA"/>
                       </a:solidFill>
                       <a:prstDash val="solid"/>
                     </a:lnT>
                     <a:lnB w="9525" cap="flat" cmpd="sng" algn="ctr">
                       <a:solidFill>
-                        <a:srgbClr val="CEE2F3"/>
+                        <a:srgbClr val="D1E7FA"/>
                       </a:solidFill>
                       <a:prstDash val="solid"/>
                     </a:lnB>
                     <a:solidFill>
-                      <a:srgbClr val="CEE2F3"/>
+                      <a:srgbClr val="D1E7FA"/>
                     </a:solidFill>
                   </a:tcPr>
                 </a:tc>
@@ -6576,30 +6576,30 @@
                   <a:tcPr anchor="ctr" marL="73152" marR="73152">
                     <a:lnL w="9525" cap="flat" cmpd="sng" algn="ctr">
                       <a:solidFill>
-                        <a:srgbClr val="CEE2F3"/>
+                        <a:srgbClr val="D1E7FA"/>
                       </a:solidFill>
                       <a:prstDash val="solid"/>
                     </a:lnL>
                     <a:lnR w="9525" cap="flat" cmpd="sng" algn="ctr">
                       <a:solidFill>
-                        <a:srgbClr val="CEE2F3"/>
+                        <a:srgbClr val="D1E7FA"/>
                       </a:solidFill>
                       <a:prstDash val="solid"/>
                     </a:lnR>
                     <a:lnT w="9525" cap="flat" cmpd="sng" algn="ctr">
                       <a:solidFill>
-                        <a:srgbClr val="CEE2F3"/>
+                        <a:srgbClr val="D1E7FA"/>
                       </a:solidFill>
                       <a:prstDash val="solid"/>
                     </a:lnT>
                     <a:lnB w="9525" cap="flat" cmpd="sng" algn="ctr">
                       <a:solidFill>
-                        <a:srgbClr val="CEE2F3"/>
+                        <a:srgbClr val="D1E7FA"/>
                       </a:solidFill>
                       <a:prstDash val="solid"/>
                     </a:lnB>
                     <a:solidFill>
-                      <a:srgbClr val="EFF5FA"/>
+                      <a:srgbClr val="EEF5FC"/>
                     </a:solidFill>
                   </a:tcPr>
                 </a:tc>
@@ -6622,30 +6622,30 @@
                   <a:tcPr anchor="ctr" marL="73152" marR="73152">
                     <a:lnL w="9525" cap="flat" cmpd="sng" algn="ctr">
                       <a:solidFill>
-                        <a:srgbClr val="CEE2F3"/>
+                        <a:srgbClr val="D1E7FA"/>
                       </a:solidFill>
                       <a:prstDash val="solid"/>
                     </a:lnL>
                     <a:lnR w="9525" cap="flat" cmpd="sng" algn="ctr">
                       <a:solidFill>
-                        <a:srgbClr val="CEE2F3"/>
+                        <a:srgbClr val="D1E7FA"/>
                       </a:solidFill>
                       <a:prstDash val="solid"/>
                     </a:lnR>
                     <a:lnT w="9525" cap="flat" cmpd="sng" algn="ctr">
                       <a:solidFill>
-                        <a:srgbClr val="CEE2F3"/>
+                        <a:srgbClr val="D1E7FA"/>
                       </a:solidFill>
                       <a:prstDash val="solid"/>
                     </a:lnT>
                     <a:lnB w="9525" cap="flat" cmpd="sng" algn="ctr">
                       <a:solidFill>
-                        <a:srgbClr val="CEE2F3"/>
+                        <a:srgbClr val="D1E7FA"/>
                       </a:solidFill>
                       <a:prstDash val="solid"/>
                     </a:lnB>
                     <a:solidFill>
-                      <a:srgbClr val="EFF5FA"/>
+                      <a:srgbClr val="EEF5FC"/>
                     </a:solidFill>
                   </a:tcPr>
                 </a:tc>
@@ -6668,30 +6668,30 @@
                   <a:tcPr anchor="ctr" marL="73152" marR="73152">
                     <a:lnL w="9525" cap="flat" cmpd="sng" algn="ctr">
                       <a:solidFill>
-                        <a:srgbClr val="CEE2F3"/>
+                        <a:srgbClr val="D1E7FA"/>
                       </a:solidFill>
                       <a:prstDash val="solid"/>
                     </a:lnL>
                     <a:lnR w="9525" cap="flat" cmpd="sng" algn="ctr">
                       <a:solidFill>
-                        <a:srgbClr val="CEE2F3"/>
+                        <a:srgbClr val="D1E7FA"/>
                       </a:solidFill>
                       <a:prstDash val="solid"/>
                     </a:lnR>
                     <a:lnT w="9525" cap="flat" cmpd="sng" algn="ctr">
                       <a:solidFill>
-                        <a:srgbClr val="CEE2F3"/>
+                        <a:srgbClr val="D1E7FA"/>
                       </a:solidFill>
                       <a:prstDash val="solid"/>
                     </a:lnT>
                     <a:lnB w="9525" cap="flat" cmpd="sng" algn="ctr">
                       <a:solidFill>
-                        <a:srgbClr val="CEE2F3"/>
+                        <a:srgbClr val="D1E7FA"/>
                       </a:solidFill>
                       <a:prstDash val="solid"/>
                     </a:lnB>
                     <a:solidFill>
-                      <a:srgbClr val="EFF5FA"/>
+                      <a:srgbClr val="EEF5FC"/>
                     </a:solidFill>
                   </a:tcPr>
                 </a:tc>
@@ -6706,7 +6706,7 @@
                       <a:r>
                         <a:rPr sz="1400" b="1">
                           <a:solidFill>
-                            <a:srgbClr val="122A3F"/>
+                            <a:srgbClr val="113B5F"/>
                           </a:solidFill>
                         </a:rPr>
                         <a:t>암</a:t>
@@ -6716,30 +6716,30 @@
                   <a:tcPr anchor="ctr" marL="73152" marR="73152">
                     <a:lnL w="9525" cap="flat" cmpd="sng" algn="ctr">
                       <a:solidFill>
-                        <a:srgbClr val="CEE2F3"/>
+                        <a:srgbClr val="D1E7FA"/>
                       </a:solidFill>
                       <a:prstDash val="solid"/>
                     </a:lnL>
                     <a:lnR w="9525" cap="flat" cmpd="sng" algn="ctr">
                       <a:solidFill>
-                        <a:srgbClr val="CEE2F3"/>
+                        <a:srgbClr val="D1E7FA"/>
                       </a:solidFill>
                       <a:prstDash val="solid"/>
                     </a:lnR>
                     <a:lnT w="9525" cap="flat" cmpd="sng" algn="ctr">
                       <a:solidFill>
-                        <a:srgbClr val="CEE2F3"/>
+                        <a:srgbClr val="D1E7FA"/>
                       </a:solidFill>
                       <a:prstDash val="solid"/>
                     </a:lnT>
                     <a:lnB w="9525" cap="flat" cmpd="sng" algn="ctr">
                       <a:solidFill>
-                        <a:srgbClr val="CEE2F3"/>
+                        <a:srgbClr val="D1E7FA"/>
                       </a:solidFill>
                       <a:prstDash val="solid"/>
                     </a:lnB>
                     <a:solidFill>
-                      <a:srgbClr val="CEE2F3"/>
+                      <a:srgbClr val="D1E7FA"/>
                     </a:solidFill>
                   </a:tcPr>
                 </a:tc>
@@ -6762,25 +6762,25 @@
                   <a:tcPr anchor="ctr" marL="73152" marR="73152">
                     <a:lnL w="9525" cap="flat" cmpd="sng" algn="ctr">
                       <a:solidFill>
-                        <a:srgbClr val="CEE2F3"/>
+                        <a:srgbClr val="D1E7FA"/>
                       </a:solidFill>
                       <a:prstDash val="solid"/>
                     </a:lnL>
                     <a:lnR w="9525" cap="flat" cmpd="sng" algn="ctr">
                       <a:solidFill>
-                        <a:srgbClr val="CEE2F3"/>
+                        <a:srgbClr val="D1E7FA"/>
                       </a:solidFill>
                       <a:prstDash val="solid"/>
                     </a:lnR>
                     <a:lnT w="9525" cap="flat" cmpd="sng" algn="ctr">
                       <a:solidFill>
-                        <a:srgbClr val="CEE2F3"/>
+                        <a:srgbClr val="D1E7FA"/>
                       </a:solidFill>
                       <a:prstDash val="solid"/>
                     </a:lnT>
                     <a:lnB w="9525" cap="flat" cmpd="sng" algn="ctr">
                       <a:solidFill>
-                        <a:srgbClr val="CEE2F3"/>
+                        <a:srgbClr val="D1E7FA"/>
                       </a:solidFill>
                       <a:prstDash val="solid"/>
                     </a:lnB>
@@ -6808,25 +6808,25 @@
                   <a:tcPr anchor="ctr" marL="73152" marR="73152">
                     <a:lnL w="9525" cap="flat" cmpd="sng" algn="ctr">
                       <a:solidFill>
-                        <a:srgbClr val="CEE2F3"/>
+                        <a:srgbClr val="D1E7FA"/>
                       </a:solidFill>
                       <a:prstDash val="solid"/>
                     </a:lnL>
                     <a:lnR w="9525" cap="flat" cmpd="sng" algn="ctr">
                       <a:solidFill>
-                        <a:srgbClr val="CEE2F3"/>
+                        <a:srgbClr val="D1E7FA"/>
                       </a:solidFill>
                       <a:prstDash val="solid"/>
                     </a:lnR>
                     <a:lnT w="9525" cap="flat" cmpd="sng" algn="ctr">
                       <a:solidFill>
-                        <a:srgbClr val="CEE2F3"/>
+                        <a:srgbClr val="D1E7FA"/>
                       </a:solidFill>
                       <a:prstDash val="solid"/>
                     </a:lnT>
                     <a:lnB w="9525" cap="flat" cmpd="sng" algn="ctr">
                       <a:solidFill>
-                        <a:srgbClr val="CEE2F3"/>
+                        <a:srgbClr val="D1E7FA"/>
                       </a:solidFill>
                       <a:prstDash val="solid"/>
                     </a:lnB>
@@ -6854,25 +6854,25 @@
                   <a:tcPr anchor="ctr" marL="73152" marR="73152">
                     <a:lnL w="9525" cap="flat" cmpd="sng" algn="ctr">
                       <a:solidFill>
-                        <a:srgbClr val="CEE2F3"/>
+                        <a:srgbClr val="D1E7FA"/>
                       </a:solidFill>
                       <a:prstDash val="solid"/>
                     </a:lnL>
                     <a:lnR w="9525" cap="flat" cmpd="sng" algn="ctr">
                       <a:solidFill>
-                        <a:srgbClr val="CEE2F3"/>
+                        <a:srgbClr val="D1E7FA"/>
                       </a:solidFill>
                       <a:prstDash val="solid"/>
                     </a:lnR>
                     <a:lnT w="9525" cap="flat" cmpd="sng" algn="ctr">
                       <a:solidFill>
-                        <a:srgbClr val="CEE2F3"/>
+                        <a:srgbClr val="D1E7FA"/>
                       </a:solidFill>
                       <a:prstDash val="solid"/>
                     </a:lnT>
                     <a:lnB w="9525" cap="flat" cmpd="sng" algn="ctr">
                       <a:solidFill>
-                        <a:srgbClr val="CEE2F3"/>
+                        <a:srgbClr val="D1E7FA"/>
                       </a:solidFill>
                       <a:prstDash val="solid"/>
                     </a:lnB>
@@ -6892,7 +6892,7 @@
                       <a:r>
                         <a:rPr sz="1400" b="1">
                           <a:solidFill>
-                            <a:srgbClr val="122A3F"/>
+                            <a:srgbClr val="113B5F"/>
                           </a:solidFill>
                         </a:rPr>
                         <a:t>뇌·심장</a:t>
@@ -6902,30 +6902,30 @@
                   <a:tcPr anchor="ctr" marL="73152" marR="73152">
                     <a:lnL w="9525" cap="flat" cmpd="sng" algn="ctr">
                       <a:solidFill>
-                        <a:srgbClr val="CEE2F3"/>
+                        <a:srgbClr val="D1E7FA"/>
                       </a:solidFill>
                       <a:prstDash val="solid"/>
                     </a:lnL>
                     <a:lnR w="9525" cap="flat" cmpd="sng" algn="ctr">
                       <a:solidFill>
-                        <a:srgbClr val="CEE2F3"/>
+                        <a:srgbClr val="D1E7FA"/>
                       </a:solidFill>
                       <a:prstDash val="solid"/>
                     </a:lnR>
                     <a:lnT w="9525" cap="flat" cmpd="sng" algn="ctr">
                       <a:solidFill>
-                        <a:srgbClr val="CEE2F3"/>
+                        <a:srgbClr val="D1E7FA"/>
                       </a:solidFill>
                       <a:prstDash val="solid"/>
                     </a:lnT>
                     <a:lnB w="9525" cap="flat" cmpd="sng" algn="ctr">
                       <a:solidFill>
-                        <a:srgbClr val="CEE2F3"/>
+                        <a:srgbClr val="D1E7FA"/>
                       </a:solidFill>
                       <a:prstDash val="solid"/>
                     </a:lnB>
                     <a:solidFill>
-                      <a:srgbClr val="CEE2F3"/>
+                      <a:srgbClr val="D1E7FA"/>
                     </a:solidFill>
                   </a:tcPr>
                 </a:tc>
@@ -6948,30 +6948,30 @@
                   <a:tcPr anchor="ctr" marL="73152" marR="73152">
                     <a:lnL w="9525" cap="flat" cmpd="sng" algn="ctr">
                       <a:solidFill>
-                        <a:srgbClr val="CEE2F3"/>
+                        <a:srgbClr val="D1E7FA"/>
                       </a:solidFill>
                       <a:prstDash val="solid"/>
                     </a:lnL>
                     <a:lnR w="9525" cap="flat" cmpd="sng" algn="ctr">
                       <a:solidFill>
-                        <a:srgbClr val="CEE2F3"/>
+                        <a:srgbClr val="D1E7FA"/>
                       </a:solidFill>
                       <a:prstDash val="solid"/>
                     </a:lnR>
                     <a:lnT w="9525" cap="flat" cmpd="sng" algn="ctr">
                       <a:solidFill>
-                        <a:srgbClr val="CEE2F3"/>
+                        <a:srgbClr val="D1E7FA"/>
                       </a:solidFill>
                       <a:prstDash val="solid"/>
                     </a:lnT>
                     <a:lnB w="9525" cap="flat" cmpd="sng" algn="ctr">
                       <a:solidFill>
-                        <a:srgbClr val="CEE2F3"/>
+                        <a:srgbClr val="D1E7FA"/>
                       </a:solidFill>
                       <a:prstDash val="solid"/>
                     </a:lnB>
                     <a:solidFill>
-                      <a:srgbClr val="EFF5FA"/>
+                      <a:srgbClr val="EEF5FC"/>
                     </a:solidFill>
                   </a:tcPr>
                 </a:tc>
@@ -6994,30 +6994,30 @@
                   <a:tcPr anchor="ctr" marL="73152" marR="73152">
                     <a:lnL w="9525" cap="flat" cmpd="sng" algn="ctr">
                       <a:solidFill>
-                        <a:srgbClr val="CEE2F3"/>
+                        <a:srgbClr val="D1E7FA"/>
                       </a:solidFill>
                       <a:prstDash val="solid"/>
                     </a:lnL>
                     <a:lnR w="9525" cap="flat" cmpd="sng" algn="ctr">
                       <a:solidFill>
-                        <a:srgbClr val="CEE2F3"/>
+                        <a:srgbClr val="D1E7FA"/>
                       </a:solidFill>
                       <a:prstDash val="solid"/>
                     </a:lnR>
                     <a:lnT w="9525" cap="flat" cmpd="sng" algn="ctr">
                       <a:solidFill>
-                        <a:srgbClr val="CEE2F3"/>
+                        <a:srgbClr val="D1E7FA"/>
                       </a:solidFill>
                       <a:prstDash val="solid"/>
                     </a:lnT>
                     <a:lnB w="9525" cap="flat" cmpd="sng" algn="ctr">
                       <a:solidFill>
-                        <a:srgbClr val="CEE2F3"/>
+                        <a:srgbClr val="D1E7FA"/>
                       </a:solidFill>
                       <a:prstDash val="solid"/>
                     </a:lnB>
                     <a:solidFill>
-                      <a:srgbClr val="EFF5FA"/>
+                      <a:srgbClr val="EEF5FC"/>
                     </a:solidFill>
                   </a:tcPr>
                 </a:tc>
@@ -7040,30 +7040,30 @@
                   <a:tcPr anchor="ctr" marL="73152" marR="73152">
                     <a:lnL w="9525" cap="flat" cmpd="sng" algn="ctr">
                       <a:solidFill>
-                        <a:srgbClr val="CEE2F3"/>
+                        <a:srgbClr val="D1E7FA"/>
                       </a:solidFill>
                       <a:prstDash val="solid"/>
                     </a:lnL>
                     <a:lnR w="9525" cap="flat" cmpd="sng" algn="ctr">
                       <a:solidFill>
-                        <a:srgbClr val="CEE2F3"/>
+                        <a:srgbClr val="D1E7FA"/>
                       </a:solidFill>
                       <a:prstDash val="solid"/>
                     </a:lnR>
                     <a:lnT w="9525" cap="flat" cmpd="sng" algn="ctr">
                       <a:solidFill>
-                        <a:srgbClr val="CEE2F3"/>
+                        <a:srgbClr val="D1E7FA"/>
                       </a:solidFill>
                       <a:prstDash val="solid"/>
                     </a:lnT>
                     <a:lnB w="9525" cap="flat" cmpd="sng" algn="ctr">
                       <a:solidFill>
-                        <a:srgbClr val="CEE2F3"/>
+                        <a:srgbClr val="D1E7FA"/>
                       </a:solidFill>
                       <a:prstDash val="solid"/>
                     </a:lnB>
                     <a:solidFill>
-                      <a:srgbClr val="EFF5FA"/>
+                      <a:srgbClr val="EEF5FC"/>
                     </a:solidFill>
                   </a:tcPr>
                 </a:tc>
@@ -7078,7 +7078,7 @@
                       <a:r>
                         <a:rPr sz="1400" b="1">
                           <a:solidFill>
-                            <a:srgbClr val="122A3F"/>
+                            <a:srgbClr val="113B5F"/>
                           </a:solidFill>
                         </a:rPr>
                         <a:t>입원·수술</a:t>
@@ -7088,30 +7088,30 @@
                   <a:tcPr anchor="ctr" marL="73152" marR="73152">
                     <a:lnL w="9525" cap="flat" cmpd="sng" algn="ctr">
                       <a:solidFill>
-                        <a:srgbClr val="CEE2F3"/>
+                        <a:srgbClr val="D1E7FA"/>
                       </a:solidFill>
                       <a:prstDash val="solid"/>
                     </a:lnL>
                     <a:lnR w="9525" cap="flat" cmpd="sng" algn="ctr">
                       <a:solidFill>
-                        <a:srgbClr val="CEE2F3"/>
+                        <a:srgbClr val="D1E7FA"/>
                       </a:solidFill>
                       <a:prstDash val="solid"/>
                     </a:lnR>
                     <a:lnT w="9525" cap="flat" cmpd="sng" algn="ctr">
                       <a:solidFill>
-                        <a:srgbClr val="CEE2F3"/>
+                        <a:srgbClr val="D1E7FA"/>
                       </a:solidFill>
                       <a:prstDash val="solid"/>
                     </a:lnT>
                     <a:lnB w="9525" cap="flat" cmpd="sng" algn="ctr">
                       <a:solidFill>
-                        <a:srgbClr val="CEE2F3"/>
+                        <a:srgbClr val="D1E7FA"/>
                       </a:solidFill>
                       <a:prstDash val="solid"/>
                     </a:lnB>
                     <a:solidFill>
-                      <a:srgbClr val="CEE2F3"/>
+                      <a:srgbClr val="D1E7FA"/>
                     </a:solidFill>
                   </a:tcPr>
                 </a:tc>
@@ -7134,25 +7134,25 @@
                   <a:tcPr anchor="ctr" marL="73152" marR="73152">
                     <a:lnL w="9525" cap="flat" cmpd="sng" algn="ctr">
                       <a:solidFill>
-                        <a:srgbClr val="CEE2F3"/>
+                        <a:srgbClr val="D1E7FA"/>
                       </a:solidFill>
                       <a:prstDash val="solid"/>
                     </a:lnL>
                     <a:lnR w="9525" cap="flat" cmpd="sng" algn="ctr">
                       <a:solidFill>
-                        <a:srgbClr val="CEE2F3"/>
+                        <a:srgbClr val="D1E7FA"/>
                       </a:solidFill>
                       <a:prstDash val="solid"/>
                     </a:lnR>
                     <a:lnT w="9525" cap="flat" cmpd="sng" algn="ctr">
                       <a:solidFill>
-                        <a:srgbClr val="CEE2F3"/>
+                        <a:srgbClr val="D1E7FA"/>
                       </a:solidFill>
                       <a:prstDash val="solid"/>
                     </a:lnT>
                     <a:lnB w="9525" cap="flat" cmpd="sng" algn="ctr">
                       <a:solidFill>
-                        <a:srgbClr val="CEE2F3"/>
+                        <a:srgbClr val="D1E7FA"/>
                       </a:solidFill>
                       <a:prstDash val="solid"/>
                     </a:lnB>
@@ -7180,25 +7180,25 @@
                   <a:tcPr anchor="ctr" marL="73152" marR="73152">
                     <a:lnL w="9525" cap="flat" cmpd="sng" algn="ctr">
                       <a:solidFill>
-                        <a:srgbClr val="CEE2F3"/>
+                        <a:srgbClr val="D1E7FA"/>
                       </a:solidFill>
                       <a:prstDash val="solid"/>
                     </a:lnL>
                     <a:lnR w="9525" cap="flat" cmpd="sng" algn="ctr">
                       <a:solidFill>
-                        <a:srgbClr val="CEE2F3"/>
+                        <a:srgbClr val="D1E7FA"/>
                       </a:solidFill>
                       <a:prstDash val="solid"/>
                     </a:lnR>
                     <a:lnT w="9525" cap="flat" cmpd="sng" algn="ctr">
                       <a:solidFill>
-                        <a:srgbClr val="CEE2F3"/>
+                        <a:srgbClr val="D1E7FA"/>
                       </a:solidFill>
                       <a:prstDash val="solid"/>
                     </a:lnT>
                     <a:lnB w="9525" cap="flat" cmpd="sng" algn="ctr">
                       <a:solidFill>
-                        <a:srgbClr val="CEE2F3"/>
+                        <a:srgbClr val="D1E7FA"/>
                       </a:solidFill>
                       <a:prstDash val="solid"/>
                     </a:lnB>
@@ -7226,25 +7226,25 @@
                   <a:tcPr anchor="ctr" marL="73152" marR="73152">
                     <a:lnL w="9525" cap="flat" cmpd="sng" algn="ctr">
                       <a:solidFill>
-                        <a:srgbClr val="CEE2F3"/>
+                        <a:srgbClr val="D1E7FA"/>
                       </a:solidFill>
                       <a:prstDash val="solid"/>
                     </a:lnL>
                     <a:lnR w="9525" cap="flat" cmpd="sng" algn="ctr">
                       <a:solidFill>
-                        <a:srgbClr val="CEE2F3"/>
+                        <a:srgbClr val="D1E7FA"/>
                       </a:solidFill>
                       <a:prstDash val="solid"/>
                     </a:lnR>
                     <a:lnT w="9525" cap="flat" cmpd="sng" algn="ctr">
                       <a:solidFill>
-                        <a:srgbClr val="CEE2F3"/>
+                        <a:srgbClr val="D1E7FA"/>
                       </a:solidFill>
                       <a:prstDash val="solid"/>
                     </a:lnT>
                     <a:lnB w="9525" cap="flat" cmpd="sng" algn="ctr">
                       <a:solidFill>
-                        <a:srgbClr val="CEE2F3"/>
+                        <a:srgbClr val="D1E7FA"/>
                       </a:solidFill>
                       <a:prstDash val="solid"/>
                     </a:lnB>
@@ -7264,7 +7264,7 @@
                       <a:r>
                         <a:rPr sz="1400" b="1">
                           <a:solidFill>
-                            <a:srgbClr val="122A3F"/>
+                            <a:srgbClr val="113B5F"/>
                           </a:solidFill>
                         </a:rPr>
                         <a:t>상해</a:t>
@@ -7274,30 +7274,30 @@
                   <a:tcPr anchor="ctr" marL="73152" marR="73152">
                     <a:lnL w="9525" cap="flat" cmpd="sng" algn="ctr">
                       <a:solidFill>
-                        <a:srgbClr val="CEE2F3"/>
+                        <a:srgbClr val="D1E7FA"/>
                       </a:solidFill>
                       <a:prstDash val="solid"/>
                     </a:lnL>
                     <a:lnR w="9525" cap="flat" cmpd="sng" algn="ctr">
                       <a:solidFill>
-                        <a:srgbClr val="CEE2F3"/>
+                        <a:srgbClr val="D1E7FA"/>
                       </a:solidFill>
                       <a:prstDash val="solid"/>
                     </a:lnR>
                     <a:lnT w="9525" cap="flat" cmpd="sng" algn="ctr">
                       <a:solidFill>
-                        <a:srgbClr val="CEE2F3"/>
+                        <a:srgbClr val="D1E7FA"/>
                       </a:solidFill>
                       <a:prstDash val="solid"/>
                     </a:lnT>
                     <a:lnB w="9525" cap="flat" cmpd="sng" algn="ctr">
                       <a:solidFill>
-                        <a:srgbClr val="CEE2F3"/>
+                        <a:srgbClr val="D1E7FA"/>
                       </a:solidFill>
                       <a:prstDash val="solid"/>
                     </a:lnB>
                     <a:solidFill>
-                      <a:srgbClr val="CEE2F3"/>
+                      <a:srgbClr val="D1E7FA"/>
                     </a:solidFill>
                   </a:tcPr>
                 </a:tc>
@@ -7320,30 +7320,30 @@
                   <a:tcPr anchor="ctr" marL="73152" marR="73152">
                     <a:lnL w="9525" cap="flat" cmpd="sng" algn="ctr">
                       <a:solidFill>
-                        <a:srgbClr val="CEE2F3"/>
+                        <a:srgbClr val="D1E7FA"/>
                       </a:solidFill>
                       <a:prstDash val="solid"/>
                     </a:lnL>
                     <a:lnR w="9525" cap="flat" cmpd="sng" algn="ctr">
                       <a:solidFill>
-                        <a:srgbClr val="CEE2F3"/>
+                        <a:srgbClr val="D1E7FA"/>
                       </a:solidFill>
                       <a:prstDash val="solid"/>
                     </a:lnR>
                     <a:lnT w="9525" cap="flat" cmpd="sng" algn="ctr">
                       <a:solidFill>
-                        <a:srgbClr val="CEE2F3"/>
+                        <a:srgbClr val="D1E7FA"/>
                       </a:solidFill>
                       <a:prstDash val="solid"/>
                     </a:lnT>
                     <a:lnB w="9525" cap="flat" cmpd="sng" algn="ctr">
                       <a:solidFill>
-                        <a:srgbClr val="CEE2F3"/>
+                        <a:srgbClr val="D1E7FA"/>
                       </a:solidFill>
                       <a:prstDash val="solid"/>
                     </a:lnB>
                     <a:solidFill>
-                      <a:srgbClr val="EFF5FA"/>
+                      <a:srgbClr val="EEF5FC"/>
                     </a:solidFill>
                   </a:tcPr>
                 </a:tc>
@@ -7366,30 +7366,30 @@
                   <a:tcPr anchor="ctr" marL="73152" marR="73152">
                     <a:lnL w="9525" cap="flat" cmpd="sng" algn="ctr">
                       <a:solidFill>
-                        <a:srgbClr val="CEE2F3"/>
+                        <a:srgbClr val="D1E7FA"/>
                       </a:solidFill>
                       <a:prstDash val="solid"/>
                     </a:lnL>
                     <a:lnR w="9525" cap="flat" cmpd="sng" algn="ctr">
                       <a:solidFill>
-                        <a:srgbClr val="CEE2F3"/>
+                        <a:srgbClr val="D1E7FA"/>
                       </a:solidFill>
                       <a:prstDash val="solid"/>
                     </a:lnR>
                     <a:lnT w="9525" cap="flat" cmpd="sng" algn="ctr">
                       <a:solidFill>
-                        <a:srgbClr val="CEE2F3"/>
+                        <a:srgbClr val="D1E7FA"/>
                       </a:solidFill>
                       <a:prstDash val="solid"/>
                     </a:lnT>
                     <a:lnB w="9525" cap="flat" cmpd="sng" algn="ctr">
                       <a:solidFill>
-                        <a:srgbClr val="CEE2F3"/>
+                        <a:srgbClr val="D1E7FA"/>
                       </a:solidFill>
                       <a:prstDash val="solid"/>
                     </a:lnB>
                     <a:solidFill>
-                      <a:srgbClr val="EFF5FA"/>
+                      <a:srgbClr val="EEF5FC"/>
                     </a:solidFill>
                   </a:tcPr>
                 </a:tc>
@@ -7412,30 +7412,30 @@
                   <a:tcPr anchor="ctr" marL="73152" marR="73152">
                     <a:lnL w="9525" cap="flat" cmpd="sng" algn="ctr">
                       <a:solidFill>
-                        <a:srgbClr val="CEE2F3"/>
+                        <a:srgbClr val="D1E7FA"/>
                       </a:solidFill>
                       <a:prstDash val="solid"/>
                     </a:lnL>
                     <a:lnR w="9525" cap="flat" cmpd="sng" algn="ctr">
                       <a:solidFill>
-                        <a:srgbClr val="CEE2F3"/>
+                        <a:srgbClr val="D1E7FA"/>
                       </a:solidFill>
                       <a:prstDash val="solid"/>
                     </a:lnR>
                     <a:lnT w="9525" cap="flat" cmpd="sng" algn="ctr">
                       <a:solidFill>
-                        <a:srgbClr val="CEE2F3"/>
+                        <a:srgbClr val="D1E7FA"/>
                       </a:solidFill>
                       <a:prstDash val="solid"/>
                     </a:lnT>
                     <a:lnB w="9525" cap="flat" cmpd="sng" algn="ctr">
                       <a:solidFill>
-                        <a:srgbClr val="CEE2F3"/>
+                        <a:srgbClr val="D1E7FA"/>
                       </a:solidFill>
                       <a:prstDash val="solid"/>
                     </a:lnB>
                     <a:solidFill>
-                      <a:srgbClr val="EFF5FA"/>
+                      <a:srgbClr val="EEF5FC"/>
                     </a:solidFill>
                   </a:tcPr>
                 </a:tc>
@@ -7450,7 +7450,7 @@
                       <a:r>
                         <a:rPr sz="1400" b="1">
                           <a:solidFill>
-                            <a:srgbClr val="122A3F"/>
+                            <a:srgbClr val="113B5F"/>
                           </a:solidFill>
                         </a:rPr>
                         <a:t>실손의료</a:t>
@@ -7460,30 +7460,30 @@
                   <a:tcPr anchor="ctr" marL="73152" marR="73152">
                     <a:lnL w="9525" cap="flat" cmpd="sng" algn="ctr">
                       <a:solidFill>
-                        <a:srgbClr val="CEE2F3"/>
+                        <a:srgbClr val="D1E7FA"/>
                       </a:solidFill>
                       <a:prstDash val="solid"/>
                     </a:lnL>
                     <a:lnR w="9525" cap="flat" cmpd="sng" algn="ctr">
                       <a:solidFill>
-                        <a:srgbClr val="CEE2F3"/>
+                        <a:srgbClr val="D1E7FA"/>
                       </a:solidFill>
                       <a:prstDash val="solid"/>
                     </a:lnR>
                     <a:lnT w="9525" cap="flat" cmpd="sng" algn="ctr">
                       <a:solidFill>
-                        <a:srgbClr val="CEE2F3"/>
+                        <a:srgbClr val="D1E7FA"/>
                       </a:solidFill>
                       <a:prstDash val="solid"/>
                     </a:lnT>
                     <a:lnB w="9525" cap="flat" cmpd="sng" algn="ctr">
                       <a:solidFill>
-                        <a:srgbClr val="CEE2F3"/>
+                        <a:srgbClr val="D1E7FA"/>
                       </a:solidFill>
                       <a:prstDash val="solid"/>
                     </a:lnB>
                     <a:solidFill>
-                      <a:srgbClr val="CEE2F3"/>
+                      <a:srgbClr val="D1E7FA"/>
                     </a:solidFill>
                   </a:tcPr>
                 </a:tc>
@@ -7506,25 +7506,25 @@
                   <a:tcPr anchor="ctr" marL="73152" marR="73152">
                     <a:lnL w="9525" cap="flat" cmpd="sng" algn="ctr">
                       <a:solidFill>
-                        <a:srgbClr val="CEE2F3"/>
+                        <a:srgbClr val="D1E7FA"/>
                       </a:solidFill>
                       <a:prstDash val="solid"/>
                     </a:lnL>
                     <a:lnR w="9525" cap="flat" cmpd="sng" algn="ctr">
                       <a:solidFill>
-                        <a:srgbClr val="CEE2F3"/>
+                        <a:srgbClr val="D1E7FA"/>
                       </a:solidFill>
                       <a:prstDash val="solid"/>
                     </a:lnR>
                     <a:lnT w="9525" cap="flat" cmpd="sng" algn="ctr">
                       <a:solidFill>
-                        <a:srgbClr val="CEE2F3"/>
+                        <a:srgbClr val="D1E7FA"/>
                       </a:solidFill>
                       <a:prstDash val="solid"/>
                     </a:lnT>
                     <a:lnB w="9525" cap="flat" cmpd="sng" algn="ctr">
                       <a:solidFill>
-                        <a:srgbClr val="CEE2F3"/>
+                        <a:srgbClr val="D1E7FA"/>
                       </a:solidFill>
                       <a:prstDash val="solid"/>
                     </a:lnB>
@@ -7552,25 +7552,25 @@
                   <a:tcPr anchor="ctr" marL="73152" marR="73152">
                     <a:lnL w="9525" cap="flat" cmpd="sng" algn="ctr">
                       <a:solidFill>
-                        <a:srgbClr val="CEE2F3"/>
+                        <a:srgbClr val="D1E7FA"/>
                       </a:solidFill>
                       <a:prstDash val="solid"/>
                     </a:lnL>
                     <a:lnR w="9525" cap="flat" cmpd="sng" algn="ctr">
                       <a:solidFill>
-                        <a:srgbClr val="CEE2F3"/>
+                        <a:srgbClr val="D1E7FA"/>
                       </a:solidFill>
                       <a:prstDash val="solid"/>
                     </a:lnR>
                     <a:lnT w="9525" cap="flat" cmpd="sng" algn="ctr">
                       <a:solidFill>
-                        <a:srgbClr val="CEE2F3"/>
+                        <a:srgbClr val="D1E7FA"/>
                       </a:solidFill>
                       <a:prstDash val="solid"/>
                     </a:lnT>
                     <a:lnB w="9525" cap="flat" cmpd="sng" algn="ctr">
                       <a:solidFill>
-                        <a:srgbClr val="CEE2F3"/>
+                        <a:srgbClr val="D1E7FA"/>
                       </a:solidFill>
                       <a:prstDash val="solid"/>
                     </a:lnB>
@@ -7598,25 +7598,25 @@
                   <a:tcPr anchor="ctr" marL="73152" marR="73152">
                     <a:lnL w="9525" cap="flat" cmpd="sng" algn="ctr">
                       <a:solidFill>
-                        <a:srgbClr val="CEE2F3"/>
+                        <a:srgbClr val="D1E7FA"/>
                       </a:solidFill>
                       <a:prstDash val="solid"/>
                     </a:lnL>
                     <a:lnR w="9525" cap="flat" cmpd="sng" algn="ctr">
                       <a:solidFill>
-                        <a:srgbClr val="CEE2F3"/>
+                        <a:srgbClr val="D1E7FA"/>
                       </a:solidFill>
                       <a:prstDash val="solid"/>
                     </a:lnR>
                     <a:lnT w="9525" cap="flat" cmpd="sng" algn="ctr">
                       <a:solidFill>
-                        <a:srgbClr val="CEE2F3"/>
+                        <a:srgbClr val="D1E7FA"/>
                       </a:solidFill>
                       <a:prstDash val="solid"/>
                     </a:lnT>
                     <a:lnB w="9525" cap="flat" cmpd="sng" algn="ctr">
                       <a:solidFill>
-                        <a:srgbClr val="CEE2F3"/>
+                        <a:srgbClr val="D1E7FA"/>
                       </a:solidFill>
                       <a:prstDash val="solid"/>
                     </a:lnB>
@@ -7636,7 +7636,7 @@
                       <a:r>
                         <a:rPr sz="1400" b="1">
                           <a:solidFill>
-                            <a:srgbClr val="122A3F"/>
+                            <a:srgbClr val="113B5F"/>
                           </a:solidFill>
                         </a:rPr>
                         <a:t>연금·노후자금</a:t>
@@ -7646,30 +7646,30 @@
                   <a:tcPr anchor="ctr" marL="73152" marR="73152">
                     <a:lnL w="9525" cap="flat" cmpd="sng" algn="ctr">
                       <a:solidFill>
-                        <a:srgbClr val="CEE2F3"/>
+                        <a:srgbClr val="D1E7FA"/>
                       </a:solidFill>
                       <a:prstDash val="solid"/>
                     </a:lnL>
                     <a:lnR w="9525" cap="flat" cmpd="sng" algn="ctr">
                       <a:solidFill>
-                        <a:srgbClr val="CEE2F3"/>
+                        <a:srgbClr val="D1E7FA"/>
                       </a:solidFill>
                       <a:prstDash val="solid"/>
                     </a:lnR>
                     <a:lnT w="9525" cap="flat" cmpd="sng" algn="ctr">
                       <a:solidFill>
-                        <a:srgbClr val="CEE2F3"/>
+                        <a:srgbClr val="D1E7FA"/>
                       </a:solidFill>
                       <a:prstDash val="solid"/>
                     </a:lnT>
                     <a:lnB w="9525" cap="flat" cmpd="sng" algn="ctr">
                       <a:solidFill>
-                        <a:srgbClr val="CEE2F3"/>
+                        <a:srgbClr val="D1E7FA"/>
                       </a:solidFill>
                       <a:prstDash val="solid"/>
                     </a:lnB>
                     <a:solidFill>
-                      <a:srgbClr val="CEE2F3"/>
+                      <a:srgbClr val="D1E7FA"/>
                     </a:solidFill>
                   </a:tcPr>
                 </a:tc>
@@ -7692,30 +7692,30 @@
                   <a:tcPr anchor="ctr" marL="73152" marR="73152">
                     <a:lnL w="9525" cap="flat" cmpd="sng" algn="ctr">
                       <a:solidFill>
-                        <a:srgbClr val="CEE2F3"/>
+                        <a:srgbClr val="D1E7FA"/>
                       </a:solidFill>
                       <a:prstDash val="solid"/>
                     </a:lnL>
                     <a:lnR w="9525" cap="flat" cmpd="sng" algn="ctr">
                       <a:solidFill>
-                        <a:srgbClr val="CEE2F3"/>
+                        <a:srgbClr val="D1E7FA"/>
                       </a:solidFill>
                       <a:prstDash val="solid"/>
                     </a:lnR>
                     <a:lnT w="9525" cap="flat" cmpd="sng" algn="ctr">
                       <a:solidFill>
-                        <a:srgbClr val="CEE2F3"/>
+                        <a:srgbClr val="D1E7FA"/>
                       </a:solidFill>
                       <a:prstDash val="solid"/>
                     </a:lnT>
                     <a:lnB w="9525" cap="flat" cmpd="sng" algn="ctr">
                       <a:solidFill>
-                        <a:srgbClr val="CEE2F3"/>
+                        <a:srgbClr val="D1E7FA"/>
                       </a:solidFill>
                       <a:prstDash val="solid"/>
                     </a:lnB>
                     <a:solidFill>
-                      <a:srgbClr val="EFF5FA"/>
+                      <a:srgbClr val="EEF5FC"/>
                     </a:solidFill>
                   </a:tcPr>
                 </a:tc>
@@ -7738,30 +7738,30 @@
                   <a:tcPr anchor="ctr" marL="73152" marR="73152">
                     <a:lnL w="9525" cap="flat" cmpd="sng" algn="ctr">
                       <a:solidFill>
-                        <a:srgbClr val="CEE2F3"/>
+                        <a:srgbClr val="D1E7FA"/>
                       </a:solidFill>
                       <a:prstDash val="solid"/>
                     </a:lnL>
                     <a:lnR w="9525" cap="flat" cmpd="sng" algn="ctr">
                       <a:solidFill>
-                        <a:srgbClr val="CEE2F3"/>
+                        <a:srgbClr val="D1E7FA"/>
                       </a:solidFill>
                       <a:prstDash val="solid"/>
                     </a:lnR>
                     <a:lnT w="9525" cap="flat" cmpd="sng" algn="ctr">
                       <a:solidFill>
-                        <a:srgbClr val="CEE2F3"/>
+                        <a:srgbClr val="D1E7FA"/>
                       </a:solidFill>
                       <a:prstDash val="solid"/>
                     </a:lnT>
                     <a:lnB w="9525" cap="flat" cmpd="sng" algn="ctr">
                       <a:solidFill>
-                        <a:srgbClr val="CEE2F3"/>
+                        <a:srgbClr val="D1E7FA"/>
                       </a:solidFill>
                       <a:prstDash val="solid"/>
                     </a:lnB>
                     <a:solidFill>
-                      <a:srgbClr val="EFF5FA"/>
+                      <a:srgbClr val="EEF5FC"/>
                     </a:solidFill>
                   </a:tcPr>
                 </a:tc>
@@ -7784,30 +7784,30 @@
                   <a:tcPr anchor="ctr" marL="73152" marR="73152">
                     <a:lnL w="9525" cap="flat" cmpd="sng" algn="ctr">
                       <a:solidFill>
-                        <a:srgbClr val="CEE2F3"/>
+                        <a:srgbClr val="D1E7FA"/>
                       </a:solidFill>
                       <a:prstDash val="solid"/>
                     </a:lnL>
                     <a:lnR w="9525" cap="flat" cmpd="sng" algn="ctr">
                       <a:solidFill>
-                        <a:srgbClr val="CEE2F3"/>
+                        <a:srgbClr val="D1E7FA"/>
                       </a:solidFill>
                       <a:prstDash val="solid"/>
                     </a:lnR>
                     <a:lnT w="9525" cap="flat" cmpd="sng" algn="ctr">
                       <a:solidFill>
-                        <a:srgbClr val="CEE2F3"/>
+                        <a:srgbClr val="D1E7FA"/>
                       </a:solidFill>
                       <a:prstDash val="solid"/>
                     </a:lnT>
                     <a:lnB w="9525" cap="flat" cmpd="sng" algn="ctr">
                       <a:solidFill>
-                        <a:srgbClr val="CEE2F3"/>
+                        <a:srgbClr val="D1E7FA"/>
                       </a:solidFill>
                       <a:prstDash val="solid"/>
                     </a:lnB>
                     <a:solidFill>
-                      <a:srgbClr val="EFF5FA"/>
+                      <a:srgbClr val="EEF5FC"/>
                     </a:solidFill>
                   </a:tcPr>
                 </a:tc>
@@ -7830,7 +7830,7 @@
     <p:bg>
       <p:bgPr>
         <a:solidFill>
-          <a:srgbClr val="EFF5FA"/>
+          <a:srgbClr val="EEF5FC"/>
         </a:solidFill>
         <a:effectLst/>
       </p:bgPr>
@@ -7860,7 +7860,7 @@
             </a:avLst>
           </a:prstGeom>
           <a:solidFill>
-            <a:srgbClr val="CEE2F3"/>
+            <a:srgbClr val="D1E7FA"/>
           </a:solidFill>
           <a:ln>
             <a:noFill/>
@@ -7904,7 +7904,7 @@
             <a:r>
               <a:rPr sz="3000" b="1" i="0">
                 <a:solidFill>
-                  <a:srgbClr val="122A3F"/>
+                  <a:srgbClr val="113B5F"/>
                 </a:solidFill>
               </a:rPr>
               <a:t>월 보험료 한눈에</a:t>
@@ -7929,11 +7929,11 @@
             </a:avLst>
           </a:prstGeom>
           <a:solidFill>
-            <a:srgbClr val="EFF5FA"/>
+            <a:srgbClr val="EEF5FC"/>
           </a:solidFill>
           <a:ln w="15875">
             <a:solidFill>
-              <a:srgbClr val="CEE2F3"/>
+              <a:srgbClr val="D1E7FA"/>
             </a:solidFill>
           </a:ln>
         </p:spPr>
@@ -7960,7 +7960,7 @@
             <a:avLst/>
           </a:prstGeom>
           <a:solidFill>
-            <a:srgbClr val="275A86"/>
+            <a:srgbClr val="267BC5"/>
           </a:solidFill>
           <a:ln>
             <a:noFill/>
@@ -8018,7 +8018,7 @@
             <a:r>
               <a:rPr sz="1700" b="1" i="0">
                 <a:solidFill>
-                  <a:srgbClr val="122A3F"/>
+                  <a:srgbClr val="113B5F"/>
                 </a:solidFill>
               </a:rPr>
               <a:t>월 보험료 합계</a:t>
@@ -8081,11 +8081,11 @@
             </a:avLst>
           </a:prstGeom>
           <a:solidFill>
-            <a:srgbClr val="EFF5FA"/>
+            <a:srgbClr val="EEF5FC"/>
           </a:solidFill>
           <a:ln w="15875">
             <a:solidFill>
-              <a:srgbClr val="CEE2F3"/>
+              <a:srgbClr val="D1E7FA"/>
             </a:solidFill>
           </a:ln>
         </p:spPr>
@@ -8112,7 +8112,7 @@
             <a:avLst/>
           </a:prstGeom>
           <a:solidFill>
-            <a:srgbClr val="275A86"/>
+            <a:srgbClr val="267BC5"/>
           </a:solidFill>
           <a:ln>
             <a:noFill/>
@@ -8170,7 +8170,7 @@
             <a:r>
               <a:rPr sz="1700" b="1" i="0">
                 <a:solidFill>
-                  <a:srgbClr val="122A3F"/>
+                  <a:srgbClr val="113B5F"/>
                 </a:solidFill>
               </a:rPr>
               <a:t>연 보험료 합계</a:t>
@@ -8233,11 +8233,11 @@
             </a:avLst>
           </a:prstGeom>
           <a:solidFill>
-            <a:srgbClr val="EFF5FA"/>
+            <a:srgbClr val="EEF5FC"/>
           </a:solidFill>
           <a:ln w="15875">
             <a:solidFill>
-              <a:srgbClr val="CEE2F3"/>
+              <a:srgbClr val="D1E7FA"/>
             </a:solidFill>
           </a:ln>
         </p:spPr>
@@ -8264,7 +8264,7 @@
             <a:avLst/>
           </a:prstGeom>
           <a:solidFill>
-            <a:srgbClr val="275A86"/>
+            <a:srgbClr val="267BC5"/>
           </a:solidFill>
           <a:ln>
             <a:noFill/>
@@ -8322,7 +8322,7 @@
             <a:r>
               <a:rPr sz="1700" b="1" i="0">
                 <a:solidFill>
-                  <a:srgbClr val="122A3F"/>
+                  <a:srgbClr val="113B5F"/>
                 </a:solidFill>
               </a:rPr>
               <a:t>월 소득 대비</a:t>
@@ -8420,7 +8420,7 @@
     <p:bg>
       <p:bgPr>
         <a:solidFill>
-          <a:srgbClr val="EFF5FA"/>
+          <a:srgbClr val="EEF5FC"/>
         </a:solidFill>
         <a:effectLst/>
       </p:bgPr>
@@ -8450,7 +8450,7 @@
             </a:avLst>
           </a:prstGeom>
           <a:solidFill>
-            <a:srgbClr val="CEE2F3"/>
+            <a:srgbClr val="D1E7FA"/>
           </a:solidFill>
           <a:ln>
             <a:noFill/>
@@ -8494,7 +8494,7 @@
             <a:r>
               <a:rPr sz="3000" b="1" i="0">
                 <a:solidFill>
-                  <a:srgbClr val="122A3F"/>
+                  <a:srgbClr val="113B5F"/>
                 </a:solidFill>
               </a:rPr>
               <a:t>점검 메모와 다음 할 일</a:t>
@@ -8519,11 +8519,11 @@
             </a:avLst>
           </a:prstGeom>
           <a:solidFill>
-            <a:srgbClr val="EFF5FA"/>
+            <a:srgbClr val="EEF5FC"/>
           </a:solidFill>
           <a:ln w="15875">
             <a:solidFill>
-              <a:srgbClr val="CEE2F3"/>
+              <a:srgbClr val="D1E7FA"/>
             </a:solidFill>
           </a:ln>
         </p:spPr>
@@ -8550,7 +8550,7 @@
             <a:avLst/>
           </a:prstGeom>
           <a:solidFill>
-            <a:srgbClr val="275A86"/>
+            <a:srgbClr val="267BC5"/>
           </a:solidFill>
           <a:ln>
             <a:noFill/>
@@ -8608,7 +8608,7 @@
             <a:r>
               <a:rPr sz="1800" b="1" i="0">
                 <a:solidFill>
-                  <a:srgbClr val="122A3F"/>
+                  <a:srgbClr val="113B5F"/>
                 </a:solidFill>
               </a:rPr>
               <a:t>확인할 것</a:t>
@@ -8671,11 +8671,11 @@
             </a:avLst>
           </a:prstGeom>
           <a:solidFill>
-            <a:srgbClr val="EFF5FA"/>
+            <a:srgbClr val="EEF5FC"/>
           </a:solidFill>
           <a:ln w="15875">
             <a:solidFill>
-              <a:srgbClr val="CEE2F3"/>
+              <a:srgbClr val="D1E7FA"/>
             </a:solidFill>
           </a:ln>
         </p:spPr>
@@ -8702,7 +8702,7 @@
             <a:avLst/>
           </a:prstGeom>
           <a:solidFill>
-            <a:srgbClr val="275A86"/>
+            <a:srgbClr val="267BC5"/>
           </a:solidFill>
           <a:ln>
             <a:noFill/>
@@ -8760,7 +8760,7 @@
             <a:r>
               <a:rPr sz="1800" b="1" i="0">
                 <a:solidFill>
-                  <a:srgbClr val="122A3F"/>
+                  <a:srgbClr val="113B5F"/>
                 </a:solidFill>
               </a:rPr>
               <a:t>문의할 것</a:t>
@@ -8823,11 +8823,11 @@
             </a:avLst>
           </a:prstGeom>
           <a:solidFill>
-            <a:srgbClr val="EFF5FA"/>
+            <a:srgbClr val="EEF5FC"/>
           </a:solidFill>
           <a:ln w="15875">
             <a:solidFill>
-              <a:srgbClr val="CEE2F3"/>
+              <a:srgbClr val="D1E7FA"/>
             </a:solidFill>
           </a:ln>
         </p:spPr>
@@ -8854,7 +8854,7 @@
             <a:avLst/>
           </a:prstGeom>
           <a:solidFill>
-            <a:srgbClr val="275A86"/>
+            <a:srgbClr val="267BC5"/>
           </a:solidFill>
           <a:ln>
             <a:noFill/>
@@ -8912,7 +8912,7 @@
             <a:r>
               <a:rPr sz="1800" b="1" i="0">
                 <a:solidFill>
-                  <a:srgbClr val="122A3F"/>
+                  <a:srgbClr val="113B5F"/>
                 </a:solidFill>
               </a:rPr>
               <a:t>정리할 날짜</a:t>
@@ -9015,34 +9015,34 @@
         <a:sysClr val="window" lastClr="FFFFFF"/>
       </a:lt1>
       <a:dk2>
-        <a:srgbClr val="122A3F"/>
+        <a:srgbClr val="113B5F"/>
       </a:dk2>
       <a:lt2>
-        <a:srgbClr val="EFF5FA"/>
+        <a:srgbClr val="EEF5FC"/>
       </a:lt2>
       <a:accent1>
-        <a:srgbClr val="275A86"/>
+        <a:srgbClr val="267BC5"/>
       </a:accent1>
       <a:accent2>
-        <a:srgbClr val="913B3E"/>
+        <a:srgbClr val="209DB6"/>
       </a:accent2>
       <a:accent3>
-        <a:srgbClr val="122A3F"/>
+        <a:srgbClr val="113B5F"/>
       </a:accent3>
       <a:accent4>
-        <a:srgbClr val="CEE2F3"/>
+        <a:srgbClr val="D1E7FA"/>
       </a:accent4>
       <a:accent5>
-        <a:srgbClr val="5C4A62"/>
+        <a:srgbClr val="238CBE"/>
       </a:accent5>
       <a:accent6>
-        <a:srgbClr val="717F8C"/>
+        <a:srgbClr val="70899F"/>
       </a:accent6>
       <a:hlink>
-        <a:srgbClr val="275A86"/>
+        <a:srgbClr val="267BC5"/>
       </a:hlink>
       <a:folHlink>
-        <a:srgbClr val="122A3F"/>
+        <a:srgbClr val="113B5F"/>
       </a:folHlink>
     </a:clrScheme>
     <a:fontScheme name="Office">

--- a/public/fun/pack/pptx/review/보장점검양식_22_부부점검_섬마을선착장.pptx
+++ b/public/fun/pack/pptx/review/보장점검양식_22_부부점검_섬마을선착장.pptx
@@ -3286,6 +3286,14 @@
 <file path=ppt/slides/slide1.xml><?xml version="1.0" encoding="utf-8"?>
 <p:sld xmlns:a="http://schemas.openxmlformats.org/drawingml/2006/main" xmlns:p="http://schemas.openxmlformats.org/presentationml/2006/main" xmlns:r="http://schemas.openxmlformats.org/officeDocument/2006/relationships">
   <p:cSld>
+    <p:bg>
+      <p:bgPr>
+        <a:solidFill>
+          <a:srgbClr val="EAF4FD"/>
+        </a:solidFill>
+        <a:effectLst/>
+      </p:bgPr>
+    </p:bg>
     <p:spTree>
       <p:nvGrpSpPr>
         <p:cNvPr id="1" name=""/>
@@ -3293,30 +3301,102 @@
         <p:nvPr/>
       </p:nvGrpSpPr>
       <p:grpSpPr/>
-      <p:pic>
-        <p:nvPicPr>
-          <p:cNvPr id="3" name="표지 그림" descr="review-22.jpg"/>
-          <p:cNvPicPr>
-            <a:picLocks noChangeAspect="1"/>
-          </p:cNvPicPr>
+      <p:sp>
+        <p:nvSpPr>
+          <p:cNvPr id="3" name="장식"/>
+          <p:cNvSpPr/>
           <p:nvPr/>
-        </p:nvPicPr>
-        <p:blipFill>
-          <a:blip r:embed="rId2"/>
-          <a:stretch>
-            <a:fillRect/>
-          </a:stretch>
-        </p:blipFill>
-        <p:spPr>
-          <a:xfrm>
-            <a:off x="0" y="0"/>
-            <a:ext cx="12191695" cy="6858000"/>
+        </p:nvSpPr>
+        <p:spPr>
+          <a:xfrm>
+            <a:off x="-1280288" y="-3200400"/>
+            <a:ext cx="6400800" cy="6400800"/>
+          </a:xfrm>
+          <a:prstGeom prst="ellipse">
+            <a:avLst/>
+          </a:prstGeom>
+          <a:solidFill>
+            <a:srgbClr val="A5CFF3"/>
+          </a:solidFill>
+          <a:ln>
+            <a:noFill/>
+          </a:ln>
+        </p:spPr>
+        <p:txBody>
+          <a:bodyPr rtlCol="0" anchor="ctr"/>
+          <a:lstStyle/>
+          <a:p>
+            <a:pPr algn="ctr"/>
+          </a:p>
+        </p:txBody>
+      </p:sp>
+      <p:sp>
+        <p:nvSpPr>
+          <p:cNvPr id="4" name="장식"/>
+          <p:cNvSpPr/>
+          <p:nvPr/>
+        </p:nvSpPr>
+        <p:spPr>
+          <a:xfrm>
+            <a:off x="365668" y="-914400"/>
+            <a:ext cx="3291840" cy="3291840"/>
+          </a:xfrm>
+          <a:prstGeom prst="ellipse">
+            <a:avLst/>
+          </a:prstGeom>
+          <a:solidFill>
+            <a:srgbClr val="7BB6EA"/>
+          </a:solidFill>
+          <a:ln>
+            <a:noFill/>
+          </a:ln>
+        </p:spPr>
+        <p:txBody>
+          <a:bodyPr rtlCol="0" anchor="ctr"/>
+          <a:lstStyle/>
+          <a:p>
+            <a:pPr algn="ctr"/>
+          </a:p>
+        </p:txBody>
+      </p:sp>
+      <p:sp>
+        <p:nvSpPr>
+          <p:cNvPr id="5" name="라벨"/>
+          <p:cNvSpPr txBox="1"/>
+          <p:nvPr/>
+        </p:nvSpPr>
+        <p:spPr>
+          <a:xfrm>
+            <a:off x="6827349" y="2148840"/>
+            <a:ext cx="4632844" cy="274320"/>
           </a:xfrm>
           <a:prstGeom prst="rect">
             <a:avLst/>
           </a:prstGeom>
-        </p:spPr>
-      </p:pic>
+          <a:noFill/>
+        </p:spPr>
+        <p:txBody>
+          <a:bodyPr wrap="square" lIns="54864" rIns="54864" tIns="27432" bIns="27432" anchor="t">
+            <a:noAutofit/>
+          </a:bodyPr>
+          <a:lstStyle/>
+          <a:p>
+            <a:pPr algn="l">
+              <a:lnSpc>
+                <a:spcPct val="115000"/>
+              </a:lnSpc>
+            </a:pPr>
+            <a:r>
+              <a:rPr sz="1000" b="1" i="0" spc="250">
+                <a:solidFill>
+                  <a:srgbClr val="26231F"/>
+                </a:solidFill>
+              </a:rPr>
+              <a:t>INSURANCE CHECK</a:t>
+            </a:r>
+          </a:p>
+        </p:txBody>
+      </p:sp>
       <p:sp>
         <p:nvSpPr>
           <p:cNvPr id="2" name="Title 1"/>
@@ -3329,8 +3409,8 @@
         </p:nvSpPr>
         <p:spPr>
           <a:xfrm>
-            <a:off x="853418" y="2057400"/>
-            <a:ext cx="6095847" cy="1554480"/>
+            <a:off x="6827349" y="2606040"/>
+            <a:ext cx="4632844" cy="1188720"/>
           </a:xfrm>
         </p:spPr>
         <p:txBody>
@@ -3347,7 +3427,7 @@
             <a:r>
               <a:rPr sz="3600" b="1" i="0">
                 <a:solidFill>
-                  <a:srgbClr val="113B5F"/>
+                  <a:srgbClr val="26231F"/>
                 </a:solidFill>
               </a:rPr>
               <a:t>우리 보험 점검 시간</a:t>
@@ -3357,14 +3437,14 @@
       </p:sp>
       <p:sp>
         <p:nvSpPr>
-          <p:cNvPr id="4" name="한 줄 문구"/>
+          <p:cNvPr id="6" name="한 줄 문구"/>
           <p:cNvSpPr txBox="1"/>
           <p:nvPr/>
         </p:nvSpPr>
         <p:spPr>
           <a:xfrm>
-            <a:off x="853418" y="3749039"/>
-            <a:ext cx="6095847" cy="822960"/>
+            <a:off x="6827349" y="3886200"/>
+            <a:ext cx="4632844" cy="822960"/>
           </a:xfrm>
           <a:prstGeom prst="rect">
             <a:avLst/>
@@ -3383,26 +3463,26 @@
               </a:lnSpc>
             </a:pPr>
             <a:r>
-              <a:rPr sz="1700" b="0" i="1">
+              <a:rPr sz="1700" b="0" i="0">
                 <a:solidFill>
-                  <a:srgbClr val="113B5F"/>
+                  <a:srgbClr val="26231F"/>
                 </a:solidFill>
               </a:rPr>
-              <a:t>휴가 전에 둘이서 한 시간만 앉아 봅니다</a:t>
+              <a:t>둘이서 한 시간만 앉아 봅니다</a:t>
             </a:r>
           </a:p>
         </p:txBody>
       </p:sp>
       <p:sp>
         <p:nvSpPr>
-          <p:cNvPr id="5" name="안내 문구"/>
+          <p:cNvPr id="7" name="안내 문구"/>
           <p:cNvSpPr txBox="1"/>
           <p:nvPr/>
         </p:nvSpPr>
         <p:spPr>
           <a:xfrm>
-            <a:off x="853418" y="4617720"/>
-            <a:ext cx="6095847" cy="914400"/>
+            <a:off x="6827349" y="4754880"/>
+            <a:ext cx="4632844" cy="914400"/>
           </a:xfrm>
           <a:prstGeom prst="rect">
             <a:avLst/>
@@ -3423,10 +3503,10 @@
             <a:r>
               <a:rPr sz="1400" b="0" i="0">
                 <a:solidFill>
-                  <a:srgbClr val="666666"/>
+                  <a:srgbClr val="26231F"/>
                 </a:solidFill>
               </a:rPr>
-              <a:t>부부 점검 · 2027. 00. 00</a:t>
+              <a:t>부부 점검 · 날짜 입력</a:t>
             </a:r>
           </a:p>
           <a:p>
@@ -3438,7 +3518,7 @@
             <a:r>
               <a:rPr sz="1400" b="0" i="0">
                 <a:solidFill>
-                  <a:srgbClr val="666666"/>
+                  <a:srgbClr val="26231F"/>
                 </a:solidFill>
               </a:rPr>
               <a:t>가입 내용을 정리하고 함께 확인하는 양식</a:t>
@@ -3460,7 +3540,7 @@
     <p:bg>
       <p:bgPr>
         <a:solidFill>
-          <a:srgbClr val="EEF5FC"/>
+          <a:srgbClr val="FFFFFF"/>
         </a:solidFill>
         <a:effectLst/>
       </p:bgPr>
@@ -3479,18 +3559,82 @@
           <p:nvPr/>
         </p:nvSpPr>
         <p:spPr>
-          <a:xfrm rot="10800000">
-            <a:off x="10637215" y="0"/>
-            <a:ext cx="914400" cy="1554480"/>
-          </a:xfrm>
-          <a:prstGeom prst="round2SameRect">
-            <a:avLst>
-              <a:gd name="adj1" fmla="val 50000"/>
-              <a:gd name="adj2" fmla="val 0"/>
-            </a:avLst>
+          <a:xfrm>
+            <a:off x="10180015" y="-1645920"/>
+            <a:ext cx="3474720" cy="3474720"/>
+          </a:xfrm>
+          <a:prstGeom prst="ellipse">
+            <a:avLst/>
           </a:prstGeom>
           <a:solidFill>
-            <a:srgbClr val="D1E7FA"/>
+            <a:srgbClr val="A5CFF3"/>
+          </a:solidFill>
+          <a:ln>
+            <a:noFill/>
+          </a:ln>
+        </p:spPr>
+        <p:txBody>
+          <a:bodyPr rtlCol="0" anchor="ctr"/>
+          <a:lstStyle/>
+          <a:p>
+            <a:pPr algn="ctr"/>
+          </a:p>
+        </p:txBody>
+      </p:sp>
+      <p:sp>
+        <p:nvSpPr>
+          <p:cNvPr id="4" name="상단 라벨"/>
+          <p:cNvSpPr txBox="1"/>
+          <p:nvPr/>
+        </p:nvSpPr>
+        <p:spPr>
+          <a:xfrm>
+            <a:off x="640080" y="274320"/>
+            <a:ext cx="5486400" cy="274320"/>
+          </a:xfrm>
+          <a:prstGeom prst="rect">
+            <a:avLst/>
+          </a:prstGeom>
+          <a:noFill/>
+        </p:spPr>
+        <p:txBody>
+          <a:bodyPr wrap="square" lIns="54864" rIns="54864" tIns="27432" bIns="27432" anchor="ctr">
+            <a:noAutofit/>
+          </a:bodyPr>
+          <a:lstStyle/>
+          <a:p>
+            <a:pPr algn="l">
+              <a:lnSpc>
+                <a:spcPct val="115000"/>
+              </a:lnSpc>
+            </a:pPr>
+            <a:r>
+              <a:rPr sz="900" b="1" i="0" spc="250">
+                <a:solidFill>
+                  <a:srgbClr val="26231F"/>
+                </a:solidFill>
+              </a:rPr>
+              <a:t>INSURANCE CHECK</a:t>
+            </a:r>
+          </a:p>
+        </p:txBody>
+      </p:sp>
+      <p:sp>
+        <p:nvSpPr>
+          <p:cNvPr id="5" name="포인트"/>
+          <p:cNvSpPr/>
+          <p:nvPr/>
+        </p:nvSpPr>
+        <p:spPr>
+          <a:xfrm>
+            <a:off x="11048695" y="502919"/>
+            <a:ext cx="274320" cy="274320"/>
+          </a:xfrm>
+          <a:prstGeom prst="mathPlus">
+            <a:avLst/>
+          </a:prstGeom>
+          <a:solidFill>
+            <a:srgbClr val="FFFFFF"/>
           </a:solidFill>
           <a:ln>
             <a:noFill/>
@@ -3516,8 +3660,8 @@
         </p:nvSpPr>
         <p:spPr>
           <a:xfrm>
-            <a:off x="640080" y="457200"/>
-            <a:ext cx="9722815" cy="868680"/>
+            <a:off x="640080" y="658368"/>
+            <a:ext cx="9082735" cy="868680"/>
           </a:xfrm>
         </p:spPr>
         <p:txBody>
@@ -3534,7 +3678,7 @@
             <a:r>
               <a:rPr sz="3000" b="1" i="0">
                 <a:solidFill>
-                  <a:srgbClr val="113B5F"/>
+                  <a:srgbClr val="26231F"/>
                 </a:solidFill>
               </a:rPr>
               <a:t>점검 대상 현황</a:t>
@@ -3544,14 +3688,14 @@
       </p:sp>
       <p:graphicFrame>
         <p:nvGraphicFramePr>
-          <p:cNvPr id="4" name="표"/>
+          <p:cNvPr id="6" name="표"/>
           <p:cNvGraphicFramePr>
             <a:graphicFrameLocks noGrp="1"/>
           </p:cNvGraphicFramePr>
           <p:nvPr/>
         </p:nvGraphicFramePr>
         <p:xfrm>
-          <a:off x="640080" y="1600200"/>
+          <a:off x="640080" y="1783080"/>
           <a:ext cx="10911534" cy="3657600"/>
         </p:xfrm>
         <a:graphic>
@@ -3575,7 +3719,7 @@
                       <a:r>
                         <a:rPr sz="1600" b="1">
                           <a:solidFill>
-                            <a:srgbClr val="FFFFFF"/>
+                            <a:srgbClr val="26231F"/>
                           </a:solidFill>
                         </a:rPr>
                         <a:t>구분</a:t>
@@ -3585,30 +3729,30 @@
                   <a:tcPr anchor="ctr" marL="73152" marR="73152">
                     <a:lnL w="9525" cap="flat" cmpd="sng" algn="ctr">
                       <a:solidFill>
-                        <a:srgbClr val="267BC5"/>
+                        <a:srgbClr val="7BB6EA"/>
                       </a:solidFill>
                       <a:prstDash val="solid"/>
                     </a:lnL>
                     <a:lnR w="9525" cap="flat" cmpd="sng" algn="ctr">
                       <a:solidFill>
-                        <a:srgbClr val="267BC5"/>
+                        <a:srgbClr val="7BB6EA"/>
                       </a:solidFill>
                       <a:prstDash val="solid"/>
                     </a:lnR>
                     <a:lnT w="9525" cap="flat" cmpd="sng" algn="ctr">
                       <a:solidFill>
-                        <a:srgbClr val="267BC5"/>
+                        <a:srgbClr val="7BB6EA"/>
                       </a:solidFill>
                       <a:prstDash val="solid"/>
                     </a:lnT>
                     <a:lnB w="9525" cap="flat" cmpd="sng" algn="ctr">
                       <a:solidFill>
-                        <a:srgbClr val="267BC5"/>
+                        <a:srgbClr val="7BB6EA"/>
                       </a:solidFill>
                       <a:prstDash val="solid"/>
                     </a:lnB>
                     <a:solidFill>
-                      <a:srgbClr val="267BC5"/>
+                      <a:srgbClr val="7BB6EA"/>
                     </a:solidFill>
                   </a:tcPr>
                 </a:tc>
@@ -3621,7 +3765,7 @@
                       <a:r>
                         <a:rPr sz="1600" b="1">
                           <a:solidFill>
-                            <a:srgbClr val="FFFFFF"/>
+                            <a:srgbClr val="26231F"/>
                           </a:solidFill>
                         </a:rPr>
                         <a:t>남편</a:t>
@@ -3631,30 +3775,30 @@
                   <a:tcPr anchor="ctr" marL="73152" marR="73152">
                     <a:lnL w="9525" cap="flat" cmpd="sng" algn="ctr">
                       <a:solidFill>
-                        <a:srgbClr val="267BC5"/>
+                        <a:srgbClr val="7BB6EA"/>
                       </a:solidFill>
                       <a:prstDash val="solid"/>
                     </a:lnL>
                     <a:lnR w="9525" cap="flat" cmpd="sng" algn="ctr">
                       <a:solidFill>
-                        <a:srgbClr val="267BC5"/>
+                        <a:srgbClr val="7BB6EA"/>
                       </a:solidFill>
                       <a:prstDash val="solid"/>
                     </a:lnR>
                     <a:lnT w="9525" cap="flat" cmpd="sng" algn="ctr">
                       <a:solidFill>
-                        <a:srgbClr val="267BC5"/>
+                        <a:srgbClr val="7BB6EA"/>
                       </a:solidFill>
                       <a:prstDash val="solid"/>
                     </a:lnT>
                     <a:lnB w="9525" cap="flat" cmpd="sng" algn="ctr">
                       <a:solidFill>
-                        <a:srgbClr val="267BC5"/>
+                        <a:srgbClr val="7BB6EA"/>
                       </a:solidFill>
                       <a:prstDash val="solid"/>
                     </a:lnB>
                     <a:solidFill>
-                      <a:srgbClr val="267BC5"/>
+                      <a:srgbClr val="7BB6EA"/>
                     </a:solidFill>
                   </a:tcPr>
                 </a:tc>
@@ -3667,7 +3811,7 @@
                       <a:r>
                         <a:rPr sz="1600" b="1">
                           <a:solidFill>
-                            <a:srgbClr val="FFFFFF"/>
+                            <a:srgbClr val="26231F"/>
                           </a:solidFill>
                         </a:rPr>
                         <a:t>아내</a:t>
@@ -3677,30 +3821,30 @@
                   <a:tcPr anchor="ctr" marL="73152" marR="73152">
                     <a:lnL w="9525" cap="flat" cmpd="sng" algn="ctr">
                       <a:solidFill>
-                        <a:srgbClr val="267BC5"/>
+                        <a:srgbClr val="7BB6EA"/>
                       </a:solidFill>
                       <a:prstDash val="solid"/>
                     </a:lnL>
                     <a:lnR w="9525" cap="flat" cmpd="sng" algn="ctr">
                       <a:solidFill>
-                        <a:srgbClr val="267BC5"/>
+                        <a:srgbClr val="7BB6EA"/>
                       </a:solidFill>
                       <a:prstDash val="solid"/>
                     </a:lnR>
                     <a:lnT w="9525" cap="flat" cmpd="sng" algn="ctr">
                       <a:solidFill>
-                        <a:srgbClr val="267BC5"/>
+                        <a:srgbClr val="7BB6EA"/>
                       </a:solidFill>
                       <a:prstDash val="solid"/>
                     </a:lnT>
                     <a:lnB w="9525" cap="flat" cmpd="sng" algn="ctr">
                       <a:solidFill>
-                        <a:srgbClr val="267BC5"/>
+                        <a:srgbClr val="7BB6EA"/>
                       </a:solidFill>
                       <a:prstDash val="solid"/>
                     </a:lnB>
                     <a:solidFill>
-                      <a:srgbClr val="267BC5"/>
+                      <a:srgbClr val="7BB6EA"/>
                     </a:solidFill>
                   </a:tcPr>
                 </a:tc>
@@ -3715,7 +3859,7 @@
                       <a:r>
                         <a:rPr sz="1600" b="1">
                           <a:solidFill>
-                            <a:srgbClr val="113B5F"/>
+                            <a:srgbClr val="273949"/>
                           </a:solidFill>
                         </a:rPr>
                         <a:t>이름</a:t>
@@ -3761,7 +3905,7 @@
                       <a:r>
                         <a:rPr sz="1600" b="0">
                           <a:solidFill>
-                            <a:srgbClr val="2B2B2B"/>
+                            <a:srgbClr val="26231F"/>
                           </a:solidFill>
                         </a:rPr>
                         <a:t/>
@@ -3807,7 +3951,7 @@
                       <a:r>
                         <a:rPr sz="1600" b="0">
                           <a:solidFill>
-                            <a:srgbClr val="2B2B2B"/>
+                            <a:srgbClr val="26231F"/>
                           </a:solidFill>
                         </a:rPr>
                         <a:t/>
@@ -3855,7 +3999,7 @@
                       <a:r>
                         <a:rPr sz="1600" b="1">
                           <a:solidFill>
-                            <a:srgbClr val="113B5F"/>
+                            <a:srgbClr val="273949"/>
                           </a:solidFill>
                         </a:rPr>
                         <a:t>나이</a:t>
@@ -3901,7 +4045,7 @@
                       <a:r>
                         <a:rPr sz="1600" b="0">
                           <a:solidFill>
-                            <a:srgbClr val="2B2B2B"/>
+                            <a:srgbClr val="26231F"/>
                           </a:solidFill>
                         </a:rPr>
                         <a:t/>
@@ -3934,7 +4078,7 @@
                       <a:prstDash val="solid"/>
                     </a:lnB>
                     <a:solidFill>
-                      <a:srgbClr val="EEF5FC"/>
+                      <a:srgbClr val="EAF4FD"/>
                     </a:solidFill>
                   </a:tcPr>
                 </a:tc>
@@ -3947,7 +4091,7 @@
                       <a:r>
                         <a:rPr sz="1600" b="0">
                           <a:solidFill>
-                            <a:srgbClr val="2B2B2B"/>
+                            <a:srgbClr val="26231F"/>
                           </a:solidFill>
                         </a:rPr>
                         <a:t/>
@@ -3980,7 +4124,7 @@
                       <a:prstDash val="solid"/>
                     </a:lnB>
                     <a:solidFill>
-                      <a:srgbClr val="EEF5FC"/>
+                      <a:srgbClr val="EAF4FD"/>
                     </a:solidFill>
                   </a:tcPr>
                 </a:tc>
@@ -3995,7 +4139,7 @@
                       <a:r>
                         <a:rPr sz="1600" b="1">
                           <a:solidFill>
-                            <a:srgbClr val="113B5F"/>
+                            <a:srgbClr val="273949"/>
                           </a:solidFill>
                         </a:rPr>
                         <a:t>직업</a:t>
@@ -4041,7 +4185,7 @@
                       <a:r>
                         <a:rPr sz="1600" b="0">
                           <a:solidFill>
-                            <a:srgbClr val="2B2B2B"/>
+                            <a:srgbClr val="26231F"/>
                           </a:solidFill>
                         </a:rPr>
                         <a:t/>
@@ -4087,7 +4231,7 @@
                       <a:r>
                         <a:rPr sz="1600" b="0">
                           <a:solidFill>
-                            <a:srgbClr val="2B2B2B"/>
+                            <a:srgbClr val="26231F"/>
                           </a:solidFill>
                         </a:rPr>
                         <a:t/>
@@ -4135,7 +4279,7 @@
                       <a:r>
                         <a:rPr sz="1600" b="1">
                           <a:solidFill>
-                            <a:srgbClr val="113B5F"/>
+                            <a:srgbClr val="273949"/>
                           </a:solidFill>
                         </a:rPr>
                         <a:t>건강 상태 메모</a:t>
@@ -4181,7 +4325,7 @@
                       <a:r>
                         <a:rPr sz="1600" b="0">
                           <a:solidFill>
-                            <a:srgbClr val="2B2B2B"/>
+                            <a:srgbClr val="26231F"/>
                           </a:solidFill>
                         </a:rPr>
                         <a:t/>
@@ -4214,7 +4358,7 @@
                       <a:prstDash val="solid"/>
                     </a:lnB>
                     <a:solidFill>
-                      <a:srgbClr val="EEF5FC"/>
+                      <a:srgbClr val="EAF4FD"/>
                     </a:solidFill>
                   </a:tcPr>
                 </a:tc>
@@ -4227,7 +4371,7 @@
                       <a:r>
                         <a:rPr sz="1600" b="0">
                           <a:solidFill>
-                            <a:srgbClr val="2B2B2B"/>
+                            <a:srgbClr val="26231F"/>
                           </a:solidFill>
                         </a:rPr>
                         <a:t/>
@@ -4260,7 +4404,7 @@
                       <a:prstDash val="solid"/>
                     </a:lnB>
                     <a:solidFill>
-                      <a:srgbClr val="EEF5FC"/>
+                      <a:srgbClr val="EAF4FD"/>
                     </a:solidFill>
                   </a:tcPr>
                 </a:tc>
@@ -4283,7 +4427,7 @@
     <p:bg>
       <p:bgPr>
         <a:solidFill>
-          <a:srgbClr val="EEF5FC"/>
+          <a:srgbClr val="FFFFFF"/>
         </a:solidFill>
         <a:effectLst/>
       </p:bgPr>
@@ -4302,18 +4446,82 @@
           <p:nvPr/>
         </p:nvSpPr>
         <p:spPr>
-          <a:xfrm rot="10800000">
-            <a:off x="10637215" y="0"/>
-            <a:ext cx="914400" cy="1554480"/>
-          </a:xfrm>
-          <a:prstGeom prst="round2SameRect">
-            <a:avLst>
-              <a:gd name="adj1" fmla="val 50000"/>
-              <a:gd name="adj2" fmla="val 0"/>
-            </a:avLst>
+          <a:xfrm>
+            <a:off x="10180015" y="-1645920"/>
+            <a:ext cx="3474720" cy="3474720"/>
+          </a:xfrm>
+          <a:prstGeom prst="ellipse">
+            <a:avLst/>
           </a:prstGeom>
           <a:solidFill>
-            <a:srgbClr val="D1E7FA"/>
+            <a:srgbClr val="A5CFF3"/>
+          </a:solidFill>
+          <a:ln>
+            <a:noFill/>
+          </a:ln>
+        </p:spPr>
+        <p:txBody>
+          <a:bodyPr rtlCol="0" anchor="ctr"/>
+          <a:lstStyle/>
+          <a:p>
+            <a:pPr algn="ctr"/>
+          </a:p>
+        </p:txBody>
+      </p:sp>
+      <p:sp>
+        <p:nvSpPr>
+          <p:cNvPr id="4" name="상단 라벨"/>
+          <p:cNvSpPr txBox="1"/>
+          <p:nvPr/>
+        </p:nvSpPr>
+        <p:spPr>
+          <a:xfrm>
+            <a:off x="640080" y="274320"/>
+            <a:ext cx="5486400" cy="274320"/>
+          </a:xfrm>
+          <a:prstGeom prst="rect">
+            <a:avLst/>
+          </a:prstGeom>
+          <a:noFill/>
+        </p:spPr>
+        <p:txBody>
+          <a:bodyPr wrap="square" lIns="54864" rIns="54864" tIns="27432" bIns="27432" anchor="ctr">
+            <a:noAutofit/>
+          </a:bodyPr>
+          <a:lstStyle/>
+          <a:p>
+            <a:pPr algn="l">
+              <a:lnSpc>
+                <a:spcPct val="115000"/>
+              </a:lnSpc>
+            </a:pPr>
+            <a:r>
+              <a:rPr sz="900" b="1" i="0" spc="250">
+                <a:solidFill>
+                  <a:srgbClr val="26231F"/>
+                </a:solidFill>
+              </a:rPr>
+              <a:t>INSURANCE CHECK</a:t>
+            </a:r>
+          </a:p>
+        </p:txBody>
+      </p:sp>
+      <p:sp>
+        <p:nvSpPr>
+          <p:cNvPr id="5" name="포인트"/>
+          <p:cNvSpPr/>
+          <p:nvPr/>
+        </p:nvSpPr>
+        <p:spPr>
+          <a:xfrm>
+            <a:off x="11048695" y="502919"/>
+            <a:ext cx="274320" cy="274320"/>
+          </a:xfrm>
+          <a:prstGeom prst="mathPlus">
+            <a:avLst/>
+          </a:prstGeom>
+          <a:solidFill>
+            <a:srgbClr val="FFFFFF"/>
           </a:solidFill>
           <a:ln>
             <a:noFill/>
@@ -4339,8 +4547,8 @@
         </p:nvSpPr>
         <p:spPr>
           <a:xfrm>
-            <a:off x="640080" y="457200"/>
-            <a:ext cx="9722815" cy="868680"/>
+            <a:off x="640080" y="658368"/>
+            <a:ext cx="9082735" cy="868680"/>
           </a:xfrm>
         </p:spPr>
         <p:txBody>
@@ -4357,7 +4565,7 @@
             <a:r>
               <a:rPr sz="3000" b="1" i="0">
                 <a:solidFill>
-                  <a:srgbClr val="113B5F"/>
+                  <a:srgbClr val="26231F"/>
                 </a:solidFill>
               </a:rPr>
               <a:t>가입한 보험 목록</a:t>
@@ -4367,14 +4575,14 @@
       </p:sp>
       <p:graphicFrame>
         <p:nvGraphicFramePr>
-          <p:cNvPr id="4" name="표"/>
+          <p:cNvPr id="6" name="표"/>
           <p:cNvGraphicFramePr>
             <a:graphicFrameLocks noGrp="1"/>
           </p:cNvGraphicFramePr>
           <p:nvPr/>
         </p:nvGraphicFramePr>
         <p:xfrm>
-          <a:off x="640080" y="1600200"/>
+          <a:off x="640080" y="1783080"/>
           <a:ext cx="10911535" cy="4224528"/>
         </p:xfrm>
         <a:graphic>
@@ -4400,7 +4608,7 @@
                       <a:r>
                         <a:rPr sz="1400" b="1">
                           <a:solidFill>
-                            <a:srgbClr val="FFFFFF"/>
+                            <a:srgbClr val="26231F"/>
                           </a:solidFill>
                         </a:rPr>
                         <a:t>보험회사</a:t>
@@ -4410,30 +4618,30 @@
                   <a:tcPr anchor="ctr" marL="73152" marR="73152">
                     <a:lnL w="9525" cap="flat" cmpd="sng" algn="ctr">
                       <a:solidFill>
-                        <a:srgbClr val="267BC5"/>
+                        <a:srgbClr val="7BB6EA"/>
                       </a:solidFill>
                       <a:prstDash val="solid"/>
                     </a:lnL>
                     <a:lnR w="9525" cap="flat" cmpd="sng" algn="ctr">
                       <a:solidFill>
-                        <a:srgbClr val="267BC5"/>
+                        <a:srgbClr val="7BB6EA"/>
                       </a:solidFill>
                       <a:prstDash val="solid"/>
                     </a:lnR>
                     <a:lnT w="9525" cap="flat" cmpd="sng" algn="ctr">
                       <a:solidFill>
-                        <a:srgbClr val="267BC5"/>
+                        <a:srgbClr val="7BB6EA"/>
                       </a:solidFill>
                       <a:prstDash val="solid"/>
                     </a:lnT>
                     <a:lnB w="9525" cap="flat" cmpd="sng" algn="ctr">
                       <a:solidFill>
-                        <a:srgbClr val="267BC5"/>
+                        <a:srgbClr val="7BB6EA"/>
                       </a:solidFill>
                       <a:prstDash val="solid"/>
                     </a:lnB>
                     <a:solidFill>
-                      <a:srgbClr val="267BC5"/>
+                      <a:srgbClr val="7BB6EA"/>
                     </a:solidFill>
                   </a:tcPr>
                 </a:tc>
@@ -4446,7 +4654,7 @@
                       <a:r>
                         <a:rPr sz="1400" b="1">
                           <a:solidFill>
-                            <a:srgbClr val="FFFFFF"/>
+                            <a:srgbClr val="26231F"/>
                           </a:solidFill>
                         </a:rPr>
                         <a:t>상품명</a:t>
@@ -4456,30 +4664,30 @@
                   <a:tcPr anchor="ctr" marL="73152" marR="73152">
                     <a:lnL w="9525" cap="flat" cmpd="sng" algn="ctr">
                       <a:solidFill>
-                        <a:srgbClr val="267BC5"/>
+                        <a:srgbClr val="7BB6EA"/>
                       </a:solidFill>
                       <a:prstDash val="solid"/>
                     </a:lnL>
                     <a:lnR w="9525" cap="flat" cmpd="sng" algn="ctr">
                       <a:solidFill>
-                        <a:srgbClr val="267BC5"/>
+                        <a:srgbClr val="7BB6EA"/>
                       </a:solidFill>
                       <a:prstDash val="solid"/>
                     </a:lnR>
                     <a:lnT w="9525" cap="flat" cmpd="sng" algn="ctr">
                       <a:solidFill>
-                        <a:srgbClr val="267BC5"/>
+                        <a:srgbClr val="7BB6EA"/>
                       </a:solidFill>
                       <a:prstDash val="solid"/>
                     </a:lnT>
                     <a:lnB w="9525" cap="flat" cmpd="sng" algn="ctr">
                       <a:solidFill>
-                        <a:srgbClr val="267BC5"/>
+                        <a:srgbClr val="7BB6EA"/>
                       </a:solidFill>
                       <a:prstDash val="solid"/>
                     </a:lnB>
                     <a:solidFill>
-                      <a:srgbClr val="267BC5"/>
+                      <a:srgbClr val="7BB6EA"/>
                     </a:solidFill>
                   </a:tcPr>
                 </a:tc>
@@ -4492,7 +4700,7 @@
                       <a:r>
                         <a:rPr sz="1400" b="1">
                           <a:solidFill>
-                            <a:srgbClr val="FFFFFF"/>
+                            <a:srgbClr val="26231F"/>
                           </a:solidFill>
                         </a:rPr>
                         <a:t>종류</a:t>
@@ -4502,30 +4710,30 @@
                   <a:tcPr anchor="ctr" marL="73152" marR="73152">
                     <a:lnL w="9525" cap="flat" cmpd="sng" algn="ctr">
                       <a:solidFill>
-                        <a:srgbClr val="267BC5"/>
+                        <a:srgbClr val="7BB6EA"/>
                       </a:solidFill>
                       <a:prstDash val="solid"/>
                     </a:lnL>
                     <a:lnR w="9525" cap="flat" cmpd="sng" algn="ctr">
                       <a:solidFill>
-                        <a:srgbClr val="267BC5"/>
+                        <a:srgbClr val="7BB6EA"/>
                       </a:solidFill>
                       <a:prstDash val="solid"/>
                     </a:lnR>
                     <a:lnT w="9525" cap="flat" cmpd="sng" algn="ctr">
                       <a:solidFill>
-                        <a:srgbClr val="267BC5"/>
+                        <a:srgbClr val="7BB6EA"/>
                       </a:solidFill>
                       <a:prstDash val="solid"/>
                     </a:lnT>
                     <a:lnB w="9525" cap="flat" cmpd="sng" algn="ctr">
                       <a:solidFill>
-                        <a:srgbClr val="267BC5"/>
+                        <a:srgbClr val="7BB6EA"/>
                       </a:solidFill>
                       <a:prstDash val="solid"/>
                     </a:lnB>
                     <a:solidFill>
-                      <a:srgbClr val="267BC5"/>
+                      <a:srgbClr val="7BB6EA"/>
                     </a:solidFill>
                   </a:tcPr>
                 </a:tc>
@@ -4538,7 +4746,7 @@
                       <a:r>
                         <a:rPr sz="1400" b="1">
                           <a:solidFill>
-                            <a:srgbClr val="FFFFFF"/>
+                            <a:srgbClr val="26231F"/>
                           </a:solidFill>
                         </a:rPr>
                         <a:t>만기일</a:t>
@@ -4548,30 +4756,30 @@
                   <a:tcPr anchor="ctr" marL="73152" marR="73152">
                     <a:lnL w="9525" cap="flat" cmpd="sng" algn="ctr">
                       <a:solidFill>
-                        <a:srgbClr val="267BC5"/>
+                        <a:srgbClr val="7BB6EA"/>
                       </a:solidFill>
                       <a:prstDash val="solid"/>
                     </a:lnL>
                     <a:lnR w="9525" cap="flat" cmpd="sng" algn="ctr">
                       <a:solidFill>
-                        <a:srgbClr val="267BC5"/>
+                        <a:srgbClr val="7BB6EA"/>
                       </a:solidFill>
                       <a:prstDash val="solid"/>
                     </a:lnR>
                     <a:lnT w="9525" cap="flat" cmpd="sng" algn="ctr">
                       <a:solidFill>
-                        <a:srgbClr val="267BC5"/>
+                        <a:srgbClr val="7BB6EA"/>
                       </a:solidFill>
                       <a:prstDash val="solid"/>
                     </a:lnT>
                     <a:lnB w="9525" cap="flat" cmpd="sng" algn="ctr">
                       <a:solidFill>
-                        <a:srgbClr val="267BC5"/>
+                        <a:srgbClr val="7BB6EA"/>
                       </a:solidFill>
                       <a:prstDash val="solid"/>
                     </a:lnB>
                     <a:solidFill>
-                      <a:srgbClr val="267BC5"/>
+                      <a:srgbClr val="7BB6EA"/>
                     </a:solidFill>
                   </a:tcPr>
                 </a:tc>
@@ -4584,7 +4792,7 @@
                       <a:r>
                         <a:rPr sz="1400" b="1">
                           <a:solidFill>
-                            <a:srgbClr val="FFFFFF"/>
+                            <a:srgbClr val="26231F"/>
                           </a:solidFill>
                         </a:rPr>
                         <a:t>월 보험료</a:t>
@@ -4594,30 +4802,30 @@
                   <a:tcPr anchor="ctr" marL="73152" marR="73152">
                     <a:lnL w="9525" cap="flat" cmpd="sng" algn="ctr">
                       <a:solidFill>
-                        <a:srgbClr val="267BC5"/>
+                        <a:srgbClr val="7BB6EA"/>
                       </a:solidFill>
                       <a:prstDash val="solid"/>
                     </a:lnL>
                     <a:lnR w="9525" cap="flat" cmpd="sng" algn="ctr">
                       <a:solidFill>
-                        <a:srgbClr val="267BC5"/>
+                        <a:srgbClr val="7BB6EA"/>
                       </a:solidFill>
                       <a:prstDash val="solid"/>
                     </a:lnR>
                     <a:lnT w="9525" cap="flat" cmpd="sng" algn="ctr">
                       <a:solidFill>
-                        <a:srgbClr val="267BC5"/>
+                        <a:srgbClr val="7BB6EA"/>
                       </a:solidFill>
                       <a:prstDash val="solid"/>
                     </a:lnT>
                     <a:lnB w="9525" cap="flat" cmpd="sng" algn="ctr">
                       <a:solidFill>
-                        <a:srgbClr val="267BC5"/>
+                        <a:srgbClr val="7BB6EA"/>
                       </a:solidFill>
                       <a:prstDash val="solid"/>
                     </a:lnB>
                     <a:solidFill>
-                      <a:srgbClr val="267BC5"/>
+                      <a:srgbClr val="7BB6EA"/>
                     </a:solidFill>
                   </a:tcPr>
                 </a:tc>
@@ -4632,7 +4840,7 @@
                       <a:r>
                         <a:rPr sz="1400" b="0">
                           <a:solidFill>
-                            <a:srgbClr val="2B2B2B"/>
+                            <a:srgbClr val="26231F"/>
                           </a:solidFill>
                         </a:rPr>
                         <a:t/>
@@ -4678,7 +4886,7 @@
                       <a:r>
                         <a:rPr sz="1400" b="0">
                           <a:solidFill>
-                            <a:srgbClr val="2B2B2B"/>
+                            <a:srgbClr val="26231F"/>
                           </a:solidFill>
                         </a:rPr>
                         <a:t/>
@@ -4724,7 +4932,7 @@
                       <a:r>
                         <a:rPr sz="1400" b="0">
                           <a:solidFill>
-                            <a:srgbClr val="2B2B2B"/>
+                            <a:srgbClr val="26231F"/>
                           </a:solidFill>
                         </a:rPr>
                         <a:t/>
@@ -4770,7 +4978,7 @@
                       <a:r>
                         <a:rPr sz="1400" b="0">
                           <a:solidFill>
-                            <a:srgbClr val="2B2B2B"/>
+                            <a:srgbClr val="26231F"/>
                           </a:solidFill>
                         </a:rPr>
                         <a:t/>
@@ -4816,7 +5024,7 @@
                       <a:r>
                         <a:rPr sz="1400" b="0">
                           <a:solidFill>
-                            <a:srgbClr val="2B2B2B"/>
+                            <a:srgbClr val="26231F"/>
                           </a:solidFill>
                         </a:rPr>
                         <a:t/>
@@ -4864,7 +5072,7 @@
                       <a:r>
                         <a:rPr sz="1400" b="0">
                           <a:solidFill>
-                            <a:srgbClr val="2B2B2B"/>
+                            <a:srgbClr val="26231F"/>
                           </a:solidFill>
                         </a:rPr>
                         <a:t/>
@@ -4897,7 +5105,7 @@
                       <a:prstDash val="solid"/>
                     </a:lnB>
                     <a:solidFill>
-                      <a:srgbClr val="EEF5FC"/>
+                      <a:srgbClr val="EAF4FD"/>
                     </a:solidFill>
                   </a:tcPr>
                 </a:tc>
@@ -4910,7 +5118,7 @@
                       <a:r>
                         <a:rPr sz="1400" b="0">
                           <a:solidFill>
-                            <a:srgbClr val="2B2B2B"/>
+                            <a:srgbClr val="26231F"/>
                           </a:solidFill>
                         </a:rPr>
                         <a:t/>
@@ -4943,7 +5151,7 @@
                       <a:prstDash val="solid"/>
                     </a:lnB>
                     <a:solidFill>
-                      <a:srgbClr val="EEF5FC"/>
+                      <a:srgbClr val="EAF4FD"/>
                     </a:solidFill>
                   </a:tcPr>
                 </a:tc>
@@ -4956,7 +5164,7 @@
                       <a:r>
                         <a:rPr sz="1400" b="0">
                           <a:solidFill>
-                            <a:srgbClr val="2B2B2B"/>
+                            <a:srgbClr val="26231F"/>
                           </a:solidFill>
                         </a:rPr>
                         <a:t/>
@@ -4989,7 +5197,7 @@
                       <a:prstDash val="solid"/>
                     </a:lnB>
                     <a:solidFill>
-                      <a:srgbClr val="EEF5FC"/>
+                      <a:srgbClr val="EAF4FD"/>
                     </a:solidFill>
                   </a:tcPr>
                 </a:tc>
@@ -5002,7 +5210,7 @@
                       <a:r>
                         <a:rPr sz="1400" b="0">
                           <a:solidFill>
-                            <a:srgbClr val="2B2B2B"/>
+                            <a:srgbClr val="26231F"/>
                           </a:solidFill>
                         </a:rPr>
                         <a:t/>
@@ -5035,7 +5243,7 @@
                       <a:prstDash val="solid"/>
                     </a:lnB>
                     <a:solidFill>
-                      <a:srgbClr val="EEF5FC"/>
+                      <a:srgbClr val="EAF4FD"/>
                     </a:solidFill>
                   </a:tcPr>
                 </a:tc>
@@ -5048,7 +5256,7 @@
                       <a:r>
                         <a:rPr sz="1400" b="0">
                           <a:solidFill>
-                            <a:srgbClr val="2B2B2B"/>
+                            <a:srgbClr val="26231F"/>
                           </a:solidFill>
                         </a:rPr>
                         <a:t/>
@@ -5081,7 +5289,7 @@
                       <a:prstDash val="solid"/>
                     </a:lnB>
                     <a:solidFill>
-                      <a:srgbClr val="EEF5FC"/>
+                      <a:srgbClr val="EAF4FD"/>
                     </a:solidFill>
                   </a:tcPr>
                 </a:tc>
@@ -5096,7 +5304,7 @@
                       <a:r>
                         <a:rPr sz="1400" b="0">
                           <a:solidFill>
-                            <a:srgbClr val="2B2B2B"/>
+                            <a:srgbClr val="26231F"/>
                           </a:solidFill>
                         </a:rPr>
                         <a:t/>
@@ -5142,7 +5350,7 @@
                       <a:r>
                         <a:rPr sz="1400" b="0">
                           <a:solidFill>
-                            <a:srgbClr val="2B2B2B"/>
+                            <a:srgbClr val="26231F"/>
                           </a:solidFill>
                         </a:rPr>
                         <a:t/>
@@ -5188,7 +5396,7 @@
                       <a:r>
                         <a:rPr sz="1400" b="0">
                           <a:solidFill>
-                            <a:srgbClr val="2B2B2B"/>
+                            <a:srgbClr val="26231F"/>
                           </a:solidFill>
                         </a:rPr>
                         <a:t/>
@@ -5234,7 +5442,7 @@
                       <a:r>
                         <a:rPr sz="1400" b="0">
                           <a:solidFill>
-                            <a:srgbClr val="2B2B2B"/>
+                            <a:srgbClr val="26231F"/>
                           </a:solidFill>
                         </a:rPr>
                         <a:t/>
@@ -5280,7 +5488,7 @@
                       <a:r>
                         <a:rPr sz="1400" b="0">
                           <a:solidFill>
-                            <a:srgbClr val="2B2B2B"/>
+                            <a:srgbClr val="26231F"/>
                           </a:solidFill>
                         </a:rPr>
                         <a:t/>
@@ -5328,7 +5536,7 @@
                       <a:r>
                         <a:rPr sz="1400" b="0">
                           <a:solidFill>
-                            <a:srgbClr val="2B2B2B"/>
+                            <a:srgbClr val="26231F"/>
                           </a:solidFill>
                         </a:rPr>
                         <a:t/>
@@ -5361,7 +5569,7 @@
                       <a:prstDash val="solid"/>
                     </a:lnB>
                     <a:solidFill>
-                      <a:srgbClr val="EEF5FC"/>
+                      <a:srgbClr val="EAF4FD"/>
                     </a:solidFill>
                   </a:tcPr>
                 </a:tc>
@@ -5374,7 +5582,7 @@
                       <a:r>
                         <a:rPr sz="1400" b="0">
                           <a:solidFill>
-                            <a:srgbClr val="2B2B2B"/>
+                            <a:srgbClr val="26231F"/>
                           </a:solidFill>
                         </a:rPr>
                         <a:t/>
@@ -5407,7 +5615,7 @@
                       <a:prstDash val="solid"/>
                     </a:lnB>
                     <a:solidFill>
-                      <a:srgbClr val="EEF5FC"/>
+                      <a:srgbClr val="EAF4FD"/>
                     </a:solidFill>
                   </a:tcPr>
                 </a:tc>
@@ -5420,7 +5628,7 @@
                       <a:r>
                         <a:rPr sz="1400" b="0">
                           <a:solidFill>
-                            <a:srgbClr val="2B2B2B"/>
+                            <a:srgbClr val="26231F"/>
                           </a:solidFill>
                         </a:rPr>
                         <a:t/>
@@ -5453,7 +5661,7 @@
                       <a:prstDash val="solid"/>
                     </a:lnB>
                     <a:solidFill>
-                      <a:srgbClr val="EEF5FC"/>
+                      <a:srgbClr val="EAF4FD"/>
                     </a:solidFill>
                   </a:tcPr>
                 </a:tc>
@@ -5466,7 +5674,7 @@
                       <a:r>
                         <a:rPr sz="1400" b="0">
                           <a:solidFill>
-                            <a:srgbClr val="2B2B2B"/>
+                            <a:srgbClr val="26231F"/>
                           </a:solidFill>
                         </a:rPr>
                         <a:t/>
@@ -5499,7 +5707,7 @@
                       <a:prstDash val="solid"/>
                     </a:lnB>
                     <a:solidFill>
-                      <a:srgbClr val="EEF5FC"/>
+                      <a:srgbClr val="EAF4FD"/>
                     </a:solidFill>
                   </a:tcPr>
                 </a:tc>
@@ -5512,7 +5720,7 @@
                       <a:r>
                         <a:rPr sz="1400" b="0">
                           <a:solidFill>
-                            <a:srgbClr val="2B2B2B"/>
+                            <a:srgbClr val="26231F"/>
                           </a:solidFill>
                         </a:rPr>
                         <a:t/>
@@ -5545,7 +5753,7 @@
                       <a:prstDash val="solid"/>
                     </a:lnB>
                     <a:solidFill>
-                      <a:srgbClr val="EEF5FC"/>
+                      <a:srgbClr val="EAF4FD"/>
                     </a:solidFill>
                   </a:tcPr>
                 </a:tc>
@@ -5560,7 +5768,7 @@
                       <a:r>
                         <a:rPr sz="1400" b="0">
                           <a:solidFill>
-                            <a:srgbClr val="2B2B2B"/>
+                            <a:srgbClr val="26231F"/>
                           </a:solidFill>
                         </a:rPr>
                         <a:t/>
@@ -5606,7 +5814,7 @@
                       <a:r>
                         <a:rPr sz="1400" b="0">
                           <a:solidFill>
-                            <a:srgbClr val="2B2B2B"/>
+                            <a:srgbClr val="26231F"/>
                           </a:solidFill>
                         </a:rPr>
                         <a:t/>
@@ -5652,7 +5860,7 @@
                       <a:r>
                         <a:rPr sz="1400" b="0">
                           <a:solidFill>
-                            <a:srgbClr val="2B2B2B"/>
+                            <a:srgbClr val="26231F"/>
                           </a:solidFill>
                         </a:rPr>
                         <a:t/>
@@ -5698,7 +5906,7 @@
                       <a:r>
                         <a:rPr sz="1400" b="0">
                           <a:solidFill>
-                            <a:srgbClr val="2B2B2B"/>
+                            <a:srgbClr val="26231F"/>
                           </a:solidFill>
                         </a:rPr>
                         <a:t/>
@@ -5744,7 +5952,7 @@
                       <a:r>
                         <a:rPr sz="1400" b="0">
                           <a:solidFill>
-                            <a:srgbClr val="2B2B2B"/>
+                            <a:srgbClr val="26231F"/>
                           </a:solidFill>
                         </a:rPr>
                         <a:t/>
@@ -5792,7 +6000,7 @@
                       <a:r>
                         <a:rPr sz="1400" b="0">
                           <a:solidFill>
-                            <a:srgbClr val="2B2B2B"/>
+                            <a:srgbClr val="26231F"/>
                           </a:solidFill>
                         </a:rPr>
                         <a:t/>
@@ -5825,7 +6033,7 @@
                       <a:prstDash val="solid"/>
                     </a:lnB>
                     <a:solidFill>
-                      <a:srgbClr val="EEF5FC"/>
+                      <a:srgbClr val="EAF4FD"/>
                     </a:solidFill>
                   </a:tcPr>
                 </a:tc>
@@ -5838,7 +6046,7 @@
                       <a:r>
                         <a:rPr sz="1400" b="0">
                           <a:solidFill>
-                            <a:srgbClr val="2B2B2B"/>
+                            <a:srgbClr val="26231F"/>
                           </a:solidFill>
                         </a:rPr>
                         <a:t/>
@@ -5871,7 +6079,7 @@
                       <a:prstDash val="solid"/>
                     </a:lnB>
                     <a:solidFill>
-                      <a:srgbClr val="EEF5FC"/>
+                      <a:srgbClr val="EAF4FD"/>
                     </a:solidFill>
                   </a:tcPr>
                 </a:tc>
@@ -5884,7 +6092,7 @@
                       <a:r>
                         <a:rPr sz="1400" b="0">
                           <a:solidFill>
-                            <a:srgbClr val="2B2B2B"/>
+                            <a:srgbClr val="26231F"/>
                           </a:solidFill>
                         </a:rPr>
                         <a:t/>
@@ -5917,7 +6125,7 @@
                       <a:prstDash val="solid"/>
                     </a:lnB>
                     <a:solidFill>
-                      <a:srgbClr val="EEF5FC"/>
+                      <a:srgbClr val="EAF4FD"/>
                     </a:solidFill>
                   </a:tcPr>
                 </a:tc>
@@ -5930,7 +6138,7 @@
                       <a:r>
                         <a:rPr sz="1400" b="0">
                           <a:solidFill>
-                            <a:srgbClr val="2B2B2B"/>
+                            <a:srgbClr val="26231F"/>
                           </a:solidFill>
                         </a:rPr>
                         <a:t/>
@@ -5963,7 +6171,7 @@
                       <a:prstDash val="solid"/>
                     </a:lnB>
                     <a:solidFill>
-                      <a:srgbClr val="EEF5FC"/>
+                      <a:srgbClr val="EAF4FD"/>
                     </a:solidFill>
                   </a:tcPr>
                 </a:tc>
@@ -5976,7 +6184,7 @@
                       <a:r>
                         <a:rPr sz="1400" b="0">
                           <a:solidFill>
-                            <a:srgbClr val="2B2B2B"/>
+                            <a:srgbClr val="26231F"/>
                           </a:solidFill>
                         </a:rPr>
                         <a:t/>
@@ -6009,7 +6217,7 @@
                       <a:prstDash val="solid"/>
                     </a:lnB>
                     <a:solidFill>
-                      <a:srgbClr val="EEF5FC"/>
+                      <a:srgbClr val="EAF4FD"/>
                     </a:solidFill>
                   </a:tcPr>
                 </a:tc>
@@ -6032,7 +6240,7 @@
     <p:bg>
       <p:bgPr>
         <a:solidFill>
-          <a:srgbClr val="EEF5FC"/>
+          <a:srgbClr val="FFFFFF"/>
         </a:solidFill>
         <a:effectLst/>
       </p:bgPr>
@@ -6051,18 +6259,82 @@
           <p:nvPr/>
         </p:nvSpPr>
         <p:spPr>
-          <a:xfrm rot="10800000">
-            <a:off x="10637215" y="0"/>
-            <a:ext cx="914400" cy="1554480"/>
-          </a:xfrm>
-          <a:prstGeom prst="round2SameRect">
-            <a:avLst>
-              <a:gd name="adj1" fmla="val 50000"/>
-              <a:gd name="adj2" fmla="val 0"/>
-            </a:avLst>
+          <a:xfrm>
+            <a:off x="10180015" y="-1645920"/>
+            <a:ext cx="3474720" cy="3474720"/>
+          </a:xfrm>
+          <a:prstGeom prst="ellipse">
+            <a:avLst/>
           </a:prstGeom>
           <a:solidFill>
-            <a:srgbClr val="D1E7FA"/>
+            <a:srgbClr val="A5CFF3"/>
+          </a:solidFill>
+          <a:ln>
+            <a:noFill/>
+          </a:ln>
+        </p:spPr>
+        <p:txBody>
+          <a:bodyPr rtlCol="0" anchor="ctr"/>
+          <a:lstStyle/>
+          <a:p>
+            <a:pPr algn="ctr"/>
+          </a:p>
+        </p:txBody>
+      </p:sp>
+      <p:sp>
+        <p:nvSpPr>
+          <p:cNvPr id="4" name="상단 라벨"/>
+          <p:cNvSpPr txBox="1"/>
+          <p:nvPr/>
+        </p:nvSpPr>
+        <p:spPr>
+          <a:xfrm>
+            <a:off x="640080" y="274320"/>
+            <a:ext cx="5486400" cy="274320"/>
+          </a:xfrm>
+          <a:prstGeom prst="rect">
+            <a:avLst/>
+          </a:prstGeom>
+          <a:noFill/>
+        </p:spPr>
+        <p:txBody>
+          <a:bodyPr wrap="square" lIns="54864" rIns="54864" tIns="27432" bIns="27432" anchor="ctr">
+            <a:noAutofit/>
+          </a:bodyPr>
+          <a:lstStyle/>
+          <a:p>
+            <a:pPr algn="l">
+              <a:lnSpc>
+                <a:spcPct val="115000"/>
+              </a:lnSpc>
+            </a:pPr>
+            <a:r>
+              <a:rPr sz="900" b="1" i="0" spc="250">
+                <a:solidFill>
+                  <a:srgbClr val="26231F"/>
+                </a:solidFill>
+              </a:rPr>
+              <a:t>INSURANCE CHECK</a:t>
+            </a:r>
+          </a:p>
+        </p:txBody>
+      </p:sp>
+      <p:sp>
+        <p:nvSpPr>
+          <p:cNvPr id="5" name="포인트"/>
+          <p:cNvSpPr/>
+          <p:nvPr/>
+        </p:nvSpPr>
+        <p:spPr>
+          <a:xfrm>
+            <a:off x="11048695" y="502919"/>
+            <a:ext cx="274320" cy="274320"/>
+          </a:xfrm>
+          <a:prstGeom prst="mathPlus">
+            <a:avLst/>
+          </a:prstGeom>
+          <a:solidFill>
+            <a:srgbClr val="FFFFFF"/>
           </a:solidFill>
           <a:ln>
             <a:noFill/>
@@ -6088,8 +6360,8 @@
         </p:nvSpPr>
         <p:spPr>
           <a:xfrm>
-            <a:off x="640080" y="457200"/>
-            <a:ext cx="9722815" cy="868680"/>
+            <a:off x="640080" y="658368"/>
+            <a:ext cx="9082735" cy="868680"/>
           </a:xfrm>
         </p:spPr>
         <p:txBody>
@@ -6106,7 +6378,7 @@
             <a:r>
               <a:rPr sz="3000" b="1" i="0">
                 <a:solidFill>
-                  <a:srgbClr val="113B5F"/>
+                  <a:srgbClr val="26231F"/>
                 </a:solidFill>
               </a:rPr>
               <a:t>보장 항목 체크</a:t>
@@ -6116,14 +6388,14 @@
       </p:sp>
       <p:graphicFrame>
         <p:nvGraphicFramePr>
-          <p:cNvPr id="4" name="표"/>
+          <p:cNvPr id="6" name="표"/>
           <p:cNvGraphicFramePr>
             <a:graphicFrameLocks noGrp="1"/>
           </p:cNvGraphicFramePr>
           <p:nvPr/>
         </p:nvGraphicFramePr>
         <p:xfrm>
-          <a:off x="640080" y="1600200"/>
+          <a:off x="640080" y="1783080"/>
           <a:ext cx="10911534" cy="4773168"/>
         </p:xfrm>
         <a:graphic>
@@ -6148,7 +6420,7 @@
                       <a:r>
                         <a:rPr sz="1400" b="1">
                           <a:solidFill>
-                            <a:srgbClr val="FFFFFF"/>
+                            <a:srgbClr val="26231F"/>
                           </a:solidFill>
                         </a:rPr>
                         <a:t>보장 항목</a:t>
@@ -6158,30 +6430,30 @@
                   <a:tcPr anchor="ctr" marL="73152" marR="73152">
                     <a:lnL w="9525" cap="flat" cmpd="sng" algn="ctr">
                       <a:solidFill>
-                        <a:srgbClr val="267BC5"/>
+                        <a:srgbClr val="7BB6EA"/>
                       </a:solidFill>
                       <a:prstDash val="solid"/>
                     </a:lnL>
                     <a:lnR w="9525" cap="flat" cmpd="sng" algn="ctr">
                       <a:solidFill>
-                        <a:srgbClr val="267BC5"/>
+                        <a:srgbClr val="7BB6EA"/>
                       </a:solidFill>
                       <a:prstDash val="solid"/>
                     </a:lnR>
                     <a:lnT w="9525" cap="flat" cmpd="sng" algn="ctr">
                       <a:solidFill>
-                        <a:srgbClr val="267BC5"/>
+                        <a:srgbClr val="7BB6EA"/>
                       </a:solidFill>
                       <a:prstDash val="solid"/>
                     </a:lnT>
                     <a:lnB w="9525" cap="flat" cmpd="sng" algn="ctr">
                       <a:solidFill>
-                        <a:srgbClr val="267BC5"/>
+                        <a:srgbClr val="7BB6EA"/>
                       </a:solidFill>
                       <a:prstDash val="solid"/>
                     </a:lnB>
                     <a:solidFill>
-                      <a:srgbClr val="267BC5"/>
+                      <a:srgbClr val="7BB6EA"/>
                     </a:solidFill>
                   </a:tcPr>
                 </a:tc>
@@ -6194,7 +6466,7 @@
                       <a:r>
                         <a:rPr sz="1400" b="1">
                           <a:solidFill>
-                            <a:srgbClr val="FFFFFF"/>
+                            <a:srgbClr val="26231F"/>
                           </a:solidFill>
                         </a:rPr>
                         <a:t>가입 확인</a:t>
@@ -6204,30 +6476,30 @@
                   <a:tcPr anchor="ctr" marL="73152" marR="73152">
                     <a:lnL w="9525" cap="flat" cmpd="sng" algn="ctr">
                       <a:solidFill>
-                        <a:srgbClr val="267BC5"/>
+                        <a:srgbClr val="7BB6EA"/>
                       </a:solidFill>
                       <a:prstDash val="solid"/>
                     </a:lnL>
                     <a:lnR w="9525" cap="flat" cmpd="sng" algn="ctr">
                       <a:solidFill>
-                        <a:srgbClr val="267BC5"/>
+                        <a:srgbClr val="7BB6EA"/>
                       </a:solidFill>
                       <a:prstDash val="solid"/>
                     </a:lnR>
                     <a:lnT w="9525" cap="flat" cmpd="sng" algn="ctr">
                       <a:solidFill>
-                        <a:srgbClr val="267BC5"/>
+                        <a:srgbClr val="7BB6EA"/>
                       </a:solidFill>
                       <a:prstDash val="solid"/>
                     </a:lnT>
                     <a:lnB w="9525" cap="flat" cmpd="sng" algn="ctr">
                       <a:solidFill>
-                        <a:srgbClr val="267BC5"/>
+                        <a:srgbClr val="7BB6EA"/>
                       </a:solidFill>
                       <a:prstDash val="solid"/>
                     </a:lnB>
                     <a:solidFill>
-                      <a:srgbClr val="267BC5"/>
+                      <a:srgbClr val="7BB6EA"/>
                     </a:solidFill>
                   </a:tcPr>
                 </a:tc>
@@ -6240,7 +6512,7 @@
                       <a:r>
                         <a:rPr sz="1400" b="1">
                           <a:solidFill>
-                            <a:srgbClr val="FFFFFF"/>
+                            <a:srgbClr val="26231F"/>
                           </a:solidFill>
                         </a:rPr>
                         <a:t>확인 필요</a:t>
@@ -6250,30 +6522,30 @@
                   <a:tcPr anchor="ctr" marL="73152" marR="73152">
                     <a:lnL w="9525" cap="flat" cmpd="sng" algn="ctr">
                       <a:solidFill>
-                        <a:srgbClr val="267BC5"/>
+                        <a:srgbClr val="7BB6EA"/>
                       </a:solidFill>
                       <a:prstDash val="solid"/>
                     </a:lnL>
                     <a:lnR w="9525" cap="flat" cmpd="sng" algn="ctr">
                       <a:solidFill>
-                        <a:srgbClr val="267BC5"/>
+                        <a:srgbClr val="7BB6EA"/>
                       </a:solidFill>
                       <a:prstDash val="solid"/>
                     </a:lnR>
                     <a:lnT w="9525" cap="flat" cmpd="sng" algn="ctr">
                       <a:solidFill>
-                        <a:srgbClr val="267BC5"/>
+                        <a:srgbClr val="7BB6EA"/>
                       </a:solidFill>
                       <a:prstDash val="solid"/>
                     </a:lnT>
                     <a:lnB w="9525" cap="flat" cmpd="sng" algn="ctr">
                       <a:solidFill>
-                        <a:srgbClr val="267BC5"/>
+                        <a:srgbClr val="7BB6EA"/>
                       </a:solidFill>
                       <a:prstDash val="solid"/>
                     </a:lnB>
                     <a:solidFill>
-                      <a:srgbClr val="267BC5"/>
+                      <a:srgbClr val="7BB6EA"/>
                     </a:solidFill>
                   </a:tcPr>
                 </a:tc>
@@ -6286,7 +6558,7 @@
                       <a:r>
                         <a:rPr sz="1400" b="1">
                           <a:solidFill>
-                            <a:srgbClr val="FFFFFF"/>
+                            <a:srgbClr val="26231F"/>
                           </a:solidFill>
                         </a:rPr>
                         <a:t>해당 없음</a:t>
@@ -6296,30 +6568,30 @@
                   <a:tcPr anchor="ctr" marL="73152" marR="73152">
                     <a:lnL w="9525" cap="flat" cmpd="sng" algn="ctr">
                       <a:solidFill>
-                        <a:srgbClr val="267BC5"/>
+                        <a:srgbClr val="7BB6EA"/>
                       </a:solidFill>
                       <a:prstDash val="solid"/>
                     </a:lnL>
                     <a:lnR w="9525" cap="flat" cmpd="sng" algn="ctr">
                       <a:solidFill>
-                        <a:srgbClr val="267BC5"/>
+                        <a:srgbClr val="7BB6EA"/>
                       </a:solidFill>
                       <a:prstDash val="solid"/>
                     </a:lnR>
                     <a:lnT w="9525" cap="flat" cmpd="sng" algn="ctr">
                       <a:solidFill>
-                        <a:srgbClr val="267BC5"/>
+                        <a:srgbClr val="7BB6EA"/>
                       </a:solidFill>
                       <a:prstDash val="solid"/>
                     </a:lnT>
                     <a:lnB w="9525" cap="flat" cmpd="sng" algn="ctr">
                       <a:solidFill>
-                        <a:srgbClr val="267BC5"/>
+                        <a:srgbClr val="7BB6EA"/>
                       </a:solidFill>
                       <a:prstDash val="solid"/>
                     </a:lnB>
                     <a:solidFill>
-                      <a:srgbClr val="267BC5"/>
+                      <a:srgbClr val="7BB6EA"/>
                     </a:solidFill>
                   </a:tcPr>
                 </a:tc>
@@ -6334,7 +6606,7 @@
                       <a:r>
                         <a:rPr sz="1400" b="1">
                           <a:solidFill>
-                            <a:srgbClr val="113B5F"/>
+                            <a:srgbClr val="273949"/>
                           </a:solidFill>
                         </a:rPr>
                         <a:t>사망·재해</a:t>
@@ -6380,7 +6652,7 @@
                       <a:r>
                         <a:rPr sz="1400" b="0">
                           <a:solidFill>
-                            <a:srgbClr val="2B2B2B"/>
+                            <a:srgbClr val="26231F"/>
                           </a:solidFill>
                         </a:rPr>
                         <a:t>□</a:t>
@@ -6426,7 +6698,7 @@
                       <a:r>
                         <a:rPr sz="1400" b="0">
                           <a:solidFill>
-                            <a:srgbClr val="2B2B2B"/>
+                            <a:srgbClr val="26231F"/>
                           </a:solidFill>
                         </a:rPr>
                         <a:t>□</a:t>
@@ -6472,7 +6744,7 @@
                       <a:r>
                         <a:rPr sz="1400" b="0">
                           <a:solidFill>
-                            <a:srgbClr val="2B2B2B"/>
+                            <a:srgbClr val="26231F"/>
                           </a:solidFill>
                         </a:rPr>
                         <a:t>□</a:t>
@@ -6520,7 +6792,7 @@
                       <a:r>
                         <a:rPr sz="1400" b="1">
                           <a:solidFill>
-                            <a:srgbClr val="113B5F"/>
+                            <a:srgbClr val="273949"/>
                           </a:solidFill>
                         </a:rPr>
                         <a:t>질병 진단</a:t>
@@ -6566,7 +6838,7 @@
                       <a:r>
                         <a:rPr sz="1400" b="0">
                           <a:solidFill>
-                            <a:srgbClr val="2B2B2B"/>
+                            <a:srgbClr val="26231F"/>
                           </a:solidFill>
                         </a:rPr>
                         <a:t>□</a:t>
@@ -6599,7 +6871,7 @@
                       <a:prstDash val="solid"/>
                     </a:lnB>
                     <a:solidFill>
-                      <a:srgbClr val="EEF5FC"/>
+                      <a:srgbClr val="EAF4FD"/>
                     </a:solidFill>
                   </a:tcPr>
                 </a:tc>
@@ -6612,7 +6884,7 @@
                       <a:r>
                         <a:rPr sz="1400" b="0">
                           <a:solidFill>
-                            <a:srgbClr val="2B2B2B"/>
+                            <a:srgbClr val="26231F"/>
                           </a:solidFill>
                         </a:rPr>
                         <a:t>□</a:t>
@@ -6645,7 +6917,7 @@
                       <a:prstDash val="solid"/>
                     </a:lnB>
                     <a:solidFill>
-                      <a:srgbClr val="EEF5FC"/>
+                      <a:srgbClr val="EAF4FD"/>
                     </a:solidFill>
                   </a:tcPr>
                 </a:tc>
@@ -6658,7 +6930,7 @@
                       <a:r>
                         <a:rPr sz="1400" b="0">
                           <a:solidFill>
-                            <a:srgbClr val="2B2B2B"/>
+                            <a:srgbClr val="26231F"/>
                           </a:solidFill>
                         </a:rPr>
                         <a:t>□</a:t>
@@ -6691,7 +6963,7 @@
                       <a:prstDash val="solid"/>
                     </a:lnB>
                     <a:solidFill>
-                      <a:srgbClr val="EEF5FC"/>
+                      <a:srgbClr val="EAF4FD"/>
                     </a:solidFill>
                   </a:tcPr>
                 </a:tc>
@@ -6706,7 +6978,7 @@
                       <a:r>
                         <a:rPr sz="1400" b="1">
                           <a:solidFill>
-                            <a:srgbClr val="113B5F"/>
+                            <a:srgbClr val="273949"/>
                           </a:solidFill>
                         </a:rPr>
                         <a:t>암</a:t>
@@ -6752,7 +7024,7 @@
                       <a:r>
                         <a:rPr sz="1400" b="0">
                           <a:solidFill>
-                            <a:srgbClr val="2B2B2B"/>
+                            <a:srgbClr val="26231F"/>
                           </a:solidFill>
                         </a:rPr>
                         <a:t>□</a:t>
@@ -6798,7 +7070,7 @@
                       <a:r>
                         <a:rPr sz="1400" b="0">
                           <a:solidFill>
-                            <a:srgbClr val="2B2B2B"/>
+                            <a:srgbClr val="26231F"/>
                           </a:solidFill>
                         </a:rPr>
                         <a:t>□</a:t>
@@ -6844,7 +7116,7 @@
                       <a:r>
                         <a:rPr sz="1400" b="0">
                           <a:solidFill>
-                            <a:srgbClr val="2B2B2B"/>
+                            <a:srgbClr val="26231F"/>
                           </a:solidFill>
                         </a:rPr>
                         <a:t>□</a:t>
@@ -6892,7 +7164,7 @@
                       <a:r>
                         <a:rPr sz="1400" b="1">
                           <a:solidFill>
-                            <a:srgbClr val="113B5F"/>
+                            <a:srgbClr val="273949"/>
                           </a:solidFill>
                         </a:rPr>
                         <a:t>뇌·심장</a:t>
@@ -6938,7 +7210,7 @@
                       <a:r>
                         <a:rPr sz="1400" b="0">
                           <a:solidFill>
-                            <a:srgbClr val="2B2B2B"/>
+                            <a:srgbClr val="26231F"/>
                           </a:solidFill>
                         </a:rPr>
                         <a:t>□</a:t>
@@ -6971,7 +7243,7 @@
                       <a:prstDash val="solid"/>
                     </a:lnB>
                     <a:solidFill>
-                      <a:srgbClr val="EEF5FC"/>
+                      <a:srgbClr val="EAF4FD"/>
                     </a:solidFill>
                   </a:tcPr>
                 </a:tc>
@@ -6984,7 +7256,7 @@
                       <a:r>
                         <a:rPr sz="1400" b="0">
                           <a:solidFill>
-                            <a:srgbClr val="2B2B2B"/>
+                            <a:srgbClr val="26231F"/>
                           </a:solidFill>
                         </a:rPr>
                         <a:t>□</a:t>
@@ -7017,7 +7289,7 @@
                       <a:prstDash val="solid"/>
                     </a:lnB>
                     <a:solidFill>
-                      <a:srgbClr val="EEF5FC"/>
+                      <a:srgbClr val="EAF4FD"/>
                     </a:solidFill>
                   </a:tcPr>
                 </a:tc>
@@ -7030,7 +7302,7 @@
                       <a:r>
                         <a:rPr sz="1400" b="0">
                           <a:solidFill>
-                            <a:srgbClr val="2B2B2B"/>
+                            <a:srgbClr val="26231F"/>
                           </a:solidFill>
                         </a:rPr>
                         <a:t>□</a:t>
@@ -7063,7 +7335,7 @@
                       <a:prstDash val="solid"/>
                     </a:lnB>
                     <a:solidFill>
-                      <a:srgbClr val="EEF5FC"/>
+                      <a:srgbClr val="EAF4FD"/>
                     </a:solidFill>
                   </a:tcPr>
                 </a:tc>
@@ -7078,7 +7350,7 @@
                       <a:r>
                         <a:rPr sz="1400" b="1">
                           <a:solidFill>
-                            <a:srgbClr val="113B5F"/>
+                            <a:srgbClr val="273949"/>
                           </a:solidFill>
                         </a:rPr>
                         <a:t>입원·수술</a:t>
@@ -7124,7 +7396,7 @@
                       <a:r>
                         <a:rPr sz="1400" b="0">
                           <a:solidFill>
-                            <a:srgbClr val="2B2B2B"/>
+                            <a:srgbClr val="26231F"/>
                           </a:solidFill>
                         </a:rPr>
                         <a:t>□</a:t>
@@ -7170,7 +7442,7 @@
                       <a:r>
                         <a:rPr sz="1400" b="0">
                           <a:solidFill>
-                            <a:srgbClr val="2B2B2B"/>
+                            <a:srgbClr val="26231F"/>
                           </a:solidFill>
                         </a:rPr>
                         <a:t>□</a:t>
@@ -7216,7 +7488,7 @@
                       <a:r>
                         <a:rPr sz="1400" b="0">
                           <a:solidFill>
-                            <a:srgbClr val="2B2B2B"/>
+                            <a:srgbClr val="26231F"/>
                           </a:solidFill>
                         </a:rPr>
                         <a:t>□</a:t>
@@ -7264,7 +7536,7 @@
                       <a:r>
                         <a:rPr sz="1400" b="1">
                           <a:solidFill>
-                            <a:srgbClr val="113B5F"/>
+                            <a:srgbClr val="273949"/>
                           </a:solidFill>
                         </a:rPr>
                         <a:t>상해</a:t>
@@ -7310,7 +7582,7 @@
                       <a:r>
                         <a:rPr sz="1400" b="0">
                           <a:solidFill>
-                            <a:srgbClr val="2B2B2B"/>
+                            <a:srgbClr val="26231F"/>
                           </a:solidFill>
                         </a:rPr>
                         <a:t>□</a:t>
@@ -7343,7 +7615,7 @@
                       <a:prstDash val="solid"/>
                     </a:lnB>
                     <a:solidFill>
-                      <a:srgbClr val="EEF5FC"/>
+                      <a:srgbClr val="EAF4FD"/>
                     </a:solidFill>
                   </a:tcPr>
                 </a:tc>
@@ -7356,7 +7628,7 @@
                       <a:r>
                         <a:rPr sz="1400" b="0">
                           <a:solidFill>
-                            <a:srgbClr val="2B2B2B"/>
+                            <a:srgbClr val="26231F"/>
                           </a:solidFill>
                         </a:rPr>
                         <a:t>□</a:t>
@@ -7389,7 +7661,7 @@
                       <a:prstDash val="solid"/>
                     </a:lnB>
                     <a:solidFill>
-                      <a:srgbClr val="EEF5FC"/>
+                      <a:srgbClr val="EAF4FD"/>
                     </a:solidFill>
                   </a:tcPr>
                 </a:tc>
@@ -7402,7 +7674,7 @@
                       <a:r>
                         <a:rPr sz="1400" b="0">
                           <a:solidFill>
-                            <a:srgbClr val="2B2B2B"/>
+                            <a:srgbClr val="26231F"/>
                           </a:solidFill>
                         </a:rPr>
                         <a:t>□</a:t>
@@ -7435,7 +7707,7 @@
                       <a:prstDash val="solid"/>
                     </a:lnB>
                     <a:solidFill>
-                      <a:srgbClr val="EEF5FC"/>
+                      <a:srgbClr val="EAF4FD"/>
                     </a:solidFill>
                   </a:tcPr>
                 </a:tc>
@@ -7450,7 +7722,7 @@
                       <a:r>
                         <a:rPr sz="1400" b="1">
                           <a:solidFill>
-                            <a:srgbClr val="113B5F"/>
+                            <a:srgbClr val="273949"/>
                           </a:solidFill>
                         </a:rPr>
                         <a:t>실손의료</a:t>
@@ -7496,7 +7768,7 @@
                       <a:r>
                         <a:rPr sz="1400" b="0">
                           <a:solidFill>
-                            <a:srgbClr val="2B2B2B"/>
+                            <a:srgbClr val="26231F"/>
                           </a:solidFill>
                         </a:rPr>
                         <a:t>□</a:t>
@@ -7542,7 +7814,7 @@
                       <a:r>
                         <a:rPr sz="1400" b="0">
                           <a:solidFill>
-                            <a:srgbClr val="2B2B2B"/>
+                            <a:srgbClr val="26231F"/>
                           </a:solidFill>
                         </a:rPr>
                         <a:t>□</a:t>
@@ -7588,7 +7860,7 @@
                       <a:r>
                         <a:rPr sz="1400" b="0">
                           <a:solidFill>
-                            <a:srgbClr val="2B2B2B"/>
+                            <a:srgbClr val="26231F"/>
                           </a:solidFill>
                         </a:rPr>
                         <a:t>□</a:t>
@@ -7636,7 +7908,7 @@
                       <a:r>
                         <a:rPr sz="1400" b="1">
                           <a:solidFill>
-                            <a:srgbClr val="113B5F"/>
+                            <a:srgbClr val="273949"/>
                           </a:solidFill>
                         </a:rPr>
                         <a:t>연금·노후자금</a:t>
@@ -7682,7 +7954,7 @@
                       <a:r>
                         <a:rPr sz="1400" b="0">
                           <a:solidFill>
-                            <a:srgbClr val="2B2B2B"/>
+                            <a:srgbClr val="26231F"/>
                           </a:solidFill>
                         </a:rPr>
                         <a:t>□</a:t>
@@ -7715,7 +7987,7 @@
                       <a:prstDash val="solid"/>
                     </a:lnB>
                     <a:solidFill>
-                      <a:srgbClr val="EEF5FC"/>
+                      <a:srgbClr val="EAF4FD"/>
                     </a:solidFill>
                   </a:tcPr>
                 </a:tc>
@@ -7728,7 +8000,7 @@
                       <a:r>
                         <a:rPr sz="1400" b="0">
                           <a:solidFill>
-                            <a:srgbClr val="2B2B2B"/>
+                            <a:srgbClr val="26231F"/>
                           </a:solidFill>
                         </a:rPr>
                         <a:t>□</a:t>
@@ -7761,7 +8033,7 @@
                       <a:prstDash val="solid"/>
                     </a:lnB>
                     <a:solidFill>
-                      <a:srgbClr val="EEF5FC"/>
+                      <a:srgbClr val="EAF4FD"/>
                     </a:solidFill>
                   </a:tcPr>
                 </a:tc>
@@ -7774,7 +8046,7 @@
                       <a:r>
                         <a:rPr sz="1400" b="0">
                           <a:solidFill>
-                            <a:srgbClr val="2B2B2B"/>
+                            <a:srgbClr val="26231F"/>
                           </a:solidFill>
                         </a:rPr>
                         <a:t>□</a:t>
@@ -7807,7 +8079,7 @@
                       <a:prstDash val="solid"/>
                     </a:lnB>
                     <a:solidFill>
-                      <a:srgbClr val="EEF5FC"/>
+                      <a:srgbClr val="EAF4FD"/>
                     </a:solidFill>
                   </a:tcPr>
                 </a:tc>
@@ -7830,7 +8102,7 @@
     <p:bg>
       <p:bgPr>
         <a:solidFill>
-          <a:srgbClr val="EEF5FC"/>
+          <a:srgbClr val="FFFFFF"/>
         </a:solidFill>
         <a:effectLst/>
       </p:bgPr>
@@ -7849,18 +8121,82 @@
           <p:nvPr/>
         </p:nvSpPr>
         <p:spPr>
-          <a:xfrm rot="10800000">
-            <a:off x="10637215" y="0"/>
-            <a:ext cx="914400" cy="1554480"/>
-          </a:xfrm>
-          <a:prstGeom prst="round2SameRect">
-            <a:avLst>
-              <a:gd name="adj1" fmla="val 50000"/>
-              <a:gd name="adj2" fmla="val 0"/>
-            </a:avLst>
+          <a:xfrm>
+            <a:off x="10180015" y="-1645920"/>
+            <a:ext cx="3474720" cy="3474720"/>
+          </a:xfrm>
+          <a:prstGeom prst="ellipse">
+            <a:avLst/>
           </a:prstGeom>
           <a:solidFill>
-            <a:srgbClr val="D1E7FA"/>
+            <a:srgbClr val="A5CFF3"/>
+          </a:solidFill>
+          <a:ln>
+            <a:noFill/>
+          </a:ln>
+        </p:spPr>
+        <p:txBody>
+          <a:bodyPr rtlCol="0" anchor="ctr"/>
+          <a:lstStyle/>
+          <a:p>
+            <a:pPr algn="ctr"/>
+          </a:p>
+        </p:txBody>
+      </p:sp>
+      <p:sp>
+        <p:nvSpPr>
+          <p:cNvPr id="4" name="상단 라벨"/>
+          <p:cNvSpPr txBox="1"/>
+          <p:nvPr/>
+        </p:nvSpPr>
+        <p:spPr>
+          <a:xfrm>
+            <a:off x="640080" y="274320"/>
+            <a:ext cx="5486400" cy="274320"/>
+          </a:xfrm>
+          <a:prstGeom prst="rect">
+            <a:avLst/>
+          </a:prstGeom>
+          <a:noFill/>
+        </p:spPr>
+        <p:txBody>
+          <a:bodyPr wrap="square" lIns="54864" rIns="54864" tIns="27432" bIns="27432" anchor="ctr">
+            <a:noAutofit/>
+          </a:bodyPr>
+          <a:lstStyle/>
+          <a:p>
+            <a:pPr algn="l">
+              <a:lnSpc>
+                <a:spcPct val="115000"/>
+              </a:lnSpc>
+            </a:pPr>
+            <a:r>
+              <a:rPr sz="900" b="1" i="0" spc="250">
+                <a:solidFill>
+                  <a:srgbClr val="26231F"/>
+                </a:solidFill>
+              </a:rPr>
+              <a:t>INSURANCE CHECK</a:t>
+            </a:r>
+          </a:p>
+        </p:txBody>
+      </p:sp>
+      <p:sp>
+        <p:nvSpPr>
+          <p:cNvPr id="5" name="포인트"/>
+          <p:cNvSpPr/>
+          <p:nvPr/>
+        </p:nvSpPr>
+        <p:spPr>
+          <a:xfrm>
+            <a:off x="11048695" y="502919"/>
+            <a:ext cx="274320" cy="274320"/>
+          </a:xfrm>
+          <a:prstGeom prst="mathPlus">
+            <a:avLst/>
+          </a:prstGeom>
+          <a:solidFill>
+            <a:srgbClr val="FFFFFF"/>
           </a:solidFill>
           <a:ln>
             <a:noFill/>
@@ -7886,8 +8222,8 @@
         </p:nvSpPr>
         <p:spPr>
           <a:xfrm>
-            <a:off x="640080" y="457200"/>
-            <a:ext cx="9722815" cy="868680"/>
+            <a:off x="640080" y="658368"/>
+            <a:ext cx="9082735" cy="868680"/>
           </a:xfrm>
         </p:spPr>
         <p:txBody>
@@ -7904,7 +8240,7 @@
             <a:r>
               <a:rPr sz="3000" b="1" i="0">
                 <a:solidFill>
-                  <a:srgbClr val="113B5F"/>
+                  <a:srgbClr val="26231F"/>
                 </a:solidFill>
               </a:rPr>
               <a:t>월 보험료 한눈에</a:t>
@@ -7914,24 +8250,24 @@
       </p:sp>
       <p:sp>
         <p:nvSpPr>
-          <p:cNvPr id="4" name="카드 1"/>
+          <p:cNvPr id="6" name="카드 1"/>
           <p:cNvSpPr/>
           <p:nvPr/>
         </p:nvSpPr>
         <p:spPr>
           <a:xfrm>
-            <a:off x="640080" y="1600200"/>
+            <a:off x="640080" y="1783080"/>
             <a:ext cx="3484778" cy="2926080"/>
           </a:xfrm>
           <a:prstGeom prst="roundRect">
             <a:avLst>
-              <a:gd name="adj" fmla="val 8000"/>
+              <a:gd name="adj" fmla="val 3000"/>
             </a:avLst>
           </a:prstGeom>
           <a:solidFill>
-            <a:srgbClr val="EEF5FC"/>
+            <a:srgbClr val="FFFFFF"/>
           </a:solidFill>
-          <a:ln w="15875">
+          <a:ln w="9525">
             <a:solidFill>
               <a:srgbClr val="D1E7FA"/>
             </a:solidFill>
@@ -7947,20 +8283,49 @@
       </p:sp>
       <p:sp>
         <p:nvSpPr>
-          <p:cNvPr id="5" name="번호 1"/>
+          <p:cNvPr id="7" name="위쪽 띠"/>
           <p:cNvSpPr/>
           <p:nvPr/>
         </p:nvSpPr>
         <p:spPr>
           <a:xfrm>
-            <a:off x="822959" y="1783080"/>
+            <a:off x="649224" y="1792224"/>
+            <a:ext cx="3466490" cy="82296"/>
+          </a:xfrm>
+          <a:prstGeom prst="rect">
+            <a:avLst/>
+          </a:prstGeom>
+          <a:solidFill>
+            <a:srgbClr val="7BB6EA"/>
+          </a:solidFill>
+          <a:ln>
+            <a:noFill/>
+          </a:ln>
+        </p:spPr>
+        <p:txBody>
+          <a:bodyPr rtlCol="0" anchor="ctr"/>
+          <a:lstStyle/>
+          <a:p>
+            <a:pPr algn="ctr"/>
+          </a:p>
+        </p:txBody>
+      </p:sp>
+      <p:sp>
+        <p:nvSpPr>
+          <p:cNvPr id="8" name="번호 1"/>
+          <p:cNvSpPr/>
+          <p:nvPr/>
+        </p:nvSpPr>
+        <p:spPr>
+          <a:xfrm>
+            <a:off x="822959" y="1965960"/>
             <a:ext cx="457200" cy="457200"/>
           </a:xfrm>
           <a:prstGeom prst="ellipse">
             <a:avLst/>
           </a:prstGeom>
           <a:solidFill>
-            <a:srgbClr val="267BC5"/>
+            <a:srgbClr val="9FA4EF"/>
           </a:solidFill>
           <a:ln>
             <a:noFill/>
@@ -7980,7 +8345,7 @@
             <a:r>
               <a:rPr sz="1600" b="1" i="0">
                 <a:solidFill>
-                  <a:srgbClr val="FFFFFF"/>
+                  <a:srgbClr val="26231F"/>
                 </a:solidFill>
               </a:rPr>
               <a:t>1</a:t>
@@ -7990,13 +8355,13 @@
       </p:sp>
       <p:sp>
         <p:nvSpPr>
-          <p:cNvPr id="6" name="TextBox 5"/>
+          <p:cNvPr id="9" name="TextBox 8"/>
           <p:cNvSpPr txBox="1"/>
           <p:nvPr/>
         </p:nvSpPr>
         <p:spPr>
           <a:xfrm>
-            <a:off x="777240" y="2377440"/>
+            <a:off x="777240" y="2560320"/>
             <a:ext cx="3210458" cy="640080"/>
           </a:xfrm>
           <a:prstGeom prst="rect">
@@ -8018,7 +8383,7 @@
             <a:r>
               <a:rPr sz="1700" b="1" i="0">
                 <a:solidFill>
-                  <a:srgbClr val="113B5F"/>
+                  <a:srgbClr val="273949"/>
                 </a:solidFill>
               </a:rPr>
               <a:t>월 보험료 합계</a:t>
@@ -8028,13 +8393,13 @@
       </p:sp>
       <p:sp>
         <p:nvSpPr>
-          <p:cNvPr id="7" name="TextBox 6"/>
+          <p:cNvPr id="10" name="TextBox 9"/>
           <p:cNvSpPr txBox="1"/>
           <p:nvPr/>
         </p:nvSpPr>
         <p:spPr>
           <a:xfrm>
-            <a:off x="777240" y="3063240"/>
+            <a:off x="777240" y="3246120"/>
             <a:ext cx="3210458" cy="1325880"/>
           </a:xfrm>
           <a:prstGeom prst="rect">
@@ -8056,7 +8421,7 @@
             <a:r>
               <a:rPr sz="3000" b="0" i="0">
                 <a:solidFill>
-                  <a:srgbClr val="2B2B2B"/>
+                  <a:srgbClr val="26231F"/>
                 </a:solidFill>
               </a:rPr>
               <a:t>0원</a:t>
@@ -8066,24 +8431,24 @@
       </p:sp>
       <p:sp>
         <p:nvSpPr>
-          <p:cNvPr id="8" name="카드 2"/>
+          <p:cNvPr id="11" name="카드 2"/>
           <p:cNvSpPr/>
           <p:nvPr/>
         </p:nvSpPr>
         <p:spPr>
           <a:xfrm>
-            <a:off x="4353458" y="1600200"/>
+            <a:off x="4353458" y="1783080"/>
             <a:ext cx="3484778" cy="2926080"/>
           </a:xfrm>
           <a:prstGeom prst="roundRect">
             <a:avLst>
-              <a:gd name="adj" fmla="val 8000"/>
+              <a:gd name="adj" fmla="val 3000"/>
             </a:avLst>
           </a:prstGeom>
           <a:solidFill>
-            <a:srgbClr val="EEF5FC"/>
+            <a:srgbClr val="FFFFFF"/>
           </a:solidFill>
-          <a:ln w="15875">
+          <a:ln w="9525">
             <a:solidFill>
               <a:srgbClr val="D1E7FA"/>
             </a:solidFill>
@@ -8099,20 +8464,49 @@
       </p:sp>
       <p:sp>
         <p:nvSpPr>
-          <p:cNvPr id="9" name="번호 2"/>
+          <p:cNvPr id="12" name="위쪽 띠"/>
           <p:cNvSpPr/>
           <p:nvPr/>
         </p:nvSpPr>
         <p:spPr>
           <a:xfrm>
-            <a:off x="4536338" y="1783080"/>
+            <a:off x="4362602" y="1792224"/>
+            <a:ext cx="3466490" cy="82296"/>
+          </a:xfrm>
+          <a:prstGeom prst="rect">
+            <a:avLst/>
+          </a:prstGeom>
+          <a:solidFill>
+            <a:srgbClr val="7BB6EA"/>
+          </a:solidFill>
+          <a:ln>
+            <a:noFill/>
+          </a:ln>
+        </p:spPr>
+        <p:txBody>
+          <a:bodyPr rtlCol="0" anchor="ctr"/>
+          <a:lstStyle/>
+          <a:p>
+            <a:pPr algn="ctr"/>
+          </a:p>
+        </p:txBody>
+      </p:sp>
+      <p:sp>
+        <p:nvSpPr>
+          <p:cNvPr id="13" name="번호 2"/>
+          <p:cNvSpPr/>
+          <p:nvPr/>
+        </p:nvSpPr>
+        <p:spPr>
+          <a:xfrm>
+            <a:off x="4536338" y="1965960"/>
             <a:ext cx="457200" cy="457200"/>
           </a:xfrm>
           <a:prstGeom prst="ellipse">
             <a:avLst/>
           </a:prstGeom>
           <a:solidFill>
-            <a:srgbClr val="267BC5"/>
+            <a:srgbClr val="9FA4EF"/>
           </a:solidFill>
           <a:ln>
             <a:noFill/>
@@ -8132,7 +8526,7 @@
             <a:r>
               <a:rPr sz="1600" b="1" i="0">
                 <a:solidFill>
-                  <a:srgbClr val="FFFFFF"/>
+                  <a:srgbClr val="26231F"/>
                 </a:solidFill>
               </a:rPr>
               <a:t>2</a:t>
@@ -8142,13 +8536,13 @@
       </p:sp>
       <p:sp>
         <p:nvSpPr>
-          <p:cNvPr id="10" name="TextBox 9"/>
+          <p:cNvPr id="14" name="TextBox 13"/>
           <p:cNvSpPr txBox="1"/>
           <p:nvPr/>
         </p:nvSpPr>
         <p:spPr>
           <a:xfrm>
-            <a:off x="4490618" y="2377440"/>
+            <a:off x="4490618" y="2560320"/>
             <a:ext cx="3210458" cy="640080"/>
           </a:xfrm>
           <a:prstGeom prst="rect">
@@ -8170,7 +8564,7 @@
             <a:r>
               <a:rPr sz="1700" b="1" i="0">
                 <a:solidFill>
-                  <a:srgbClr val="113B5F"/>
+                  <a:srgbClr val="273949"/>
                 </a:solidFill>
               </a:rPr>
               <a:t>연 보험료 합계</a:t>
@@ -8180,13 +8574,13 @@
       </p:sp>
       <p:sp>
         <p:nvSpPr>
-          <p:cNvPr id="11" name="TextBox 10"/>
+          <p:cNvPr id="15" name="TextBox 14"/>
           <p:cNvSpPr txBox="1"/>
           <p:nvPr/>
         </p:nvSpPr>
         <p:spPr>
           <a:xfrm>
-            <a:off x="4490618" y="3063240"/>
+            <a:off x="4490618" y="3246120"/>
             <a:ext cx="3210458" cy="1325880"/>
           </a:xfrm>
           <a:prstGeom prst="rect">
@@ -8208,7 +8602,7 @@
             <a:r>
               <a:rPr sz="3000" b="0" i="0">
                 <a:solidFill>
-                  <a:srgbClr val="2B2B2B"/>
+                  <a:srgbClr val="26231F"/>
                 </a:solidFill>
               </a:rPr>
               <a:t>0원</a:t>
@@ -8218,24 +8612,24 @@
       </p:sp>
       <p:sp>
         <p:nvSpPr>
-          <p:cNvPr id="12" name="카드 3"/>
+          <p:cNvPr id="16" name="카드 3"/>
           <p:cNvSpPr/>
           <p:nvPr/>
         </p:nvSpPr>
         <p:spPr>
           <a:xfrm>
-            <a:off x="8066836" y="1600200"/>
+            <a:off x="8066836" y="1783080"/>
             <a:ext cx="3484778" cy="2926080"/>
           </a:xfrm>
           <a:prstGeom prst="roundRect">
             <a:avLst>
-              <a:gd name="adj" fmla="val 8000"/>
+              <a:gd name="adj" fmla="val 3000"/>
             </a:avLst>
           </a:prstGeom>
           <a:solidFill>
-            <a:srgbClr val="EEF5FC"/>
+            <a:srgbClr val="FFFFFF"/>
           </a:solidFill>
-          <a:ln w="15875">
+          <a:ln w="9525">
             <a:solidFill>
               <a:srgbClr val="D1E7FA"/>
             </a:solidFill>
@@ -8251,20 +8645,49 @@
       </p:sp>
       <p:sp>
         <p:nvSpPr>
-          <p:cNvPr id="13" name="번호 3"/>
+          <p:cNvPr id="17" name="위쪽 띠"/>
           <p:cNvSpPr/>
           <p:nvPr/>
         </p:nvSpPr>
         <p:spPr>
           <a:xfrm>
-            <a:off x="8249716" y="1783080"/>
+            <a:off x="8075980" y="1792224"/>
+            <a:ext cx="3466490" cy="82296"/>
+          </a:xfrm>
+          <a:prstGeom prst="rect">
+            <a:avLst/>
+          </a:prstGeom>
+          <a:solidFill>
+            <a:srgbClr val="7BB6EA"/>
+          </a:solidFill>
+          <a:ln>
+            <a:noFill/>
+          </a:ln>
+        </p:spPr>
+        <p:txBody>
+          <a:bodyPr rtlCol="0" anchor="ctr"/>
+          <a:lstStyle/>
+          <a:p>
+            <a:pPr algn="ctr"/>
+          </a:p>
+        </p:txBody>
+      </p:sp>
+      <p:sp>
+        <p:nvSpPr>
+          <p:cNvPr id="18" name="번호 3"/>
+          <p:cNvSpPr/>
+          <p:nvPr/>
+        </p:nvSpPr>
+        <p:spPr>
+          <a:xfrm>
+            <a:off x="8249716" y="1965960"/>
             <a:ext cx="457200" cy="457200"/>
           </a:xfrm>
           <a:prstGeom prst="ellipse">
             <a:avLst/>
           </a:prstGeom>
           <a:solidFill>
-            <a:srgbClr val="267BC5"/>
+            <a:srgbClr val="9FA4EF"/>
           </a:solidFill>
           <a:ln>
             <a:noFill/>
@@ -8284,7 +8707,7 @@
             <a:r>
               <a:rPr sz="1600" b="1" i="0">
                 <a:solidFill>
-                  <a:srgbClr val="FFFFFF"/>
+                  <a:srgbClr val="26231F"/>
                 </a:solidFill>
               </a:rPr>
               <a:t>3</a:t>
@@ -8294,13 +8717,13 @@
       </p:sp>
       <p:sp>
         <p:nvSpPr>
-          <p:cNvPr id="14" name="TextBox 13"/>
+          <p:cNvPr id="19" name="TextBox 18"/>
           <p:cNvSpPr txBox="1"/>
           <p:nvPr/>
         </p:nvSpPr>
         <p:spPr>
           <a:xfrm>
-            <a:off x="8203996" y="2377440"/>
+            <a:off x="8203996" y="2560320"/>
             <a:ext cx="3210458" cy="640080"/>
           </a:xfrm>
           <a:prstGeom prst="rect">
@@ -8322,7 +8745,7 @@
             <a:r>
               <a:rPr sz="1700" b="1" i="0">
                 <a:solidFill>
-                  <a:srgbClr val="113B5F"/>
+                  <a:srgbClr val="273949"/>
                 </a:solidFill>
               </a:rPr>
               <a:t>월 소득 대비</a:t>
@@ -8332,13 +8755,13 @@
       </p:sp>
       <p:sp>
         <p:nvSpPr>
-          <p:cNvPr id="15" name="TextBox 14"/>
+          <p:cNvPr id="20" name="TextBox 19"/>
           <p:cNvSpPr txBox="1"/>
           <p:nvPr/>
         </p:nvSpPr>
         <p:spPr>
           <a:xfrm>
-            <a:off x="8203996" y="3063240"/>
+            <a:off x="8203996" y="3246120"/>
             <a:ext cx="3210458" cy="1325880"/>
           </a:xfrm>
           <a:prstGeom prst="rect">
@@ -8360,7 +8783,7 @@
             <a:r>
               <a:rPr sz="3000" b="0" i="0">
                 <a:solidFill>
-                  <a:srgbClr val="2B2B2B"/>
+                  <a:srgbClr val="26231F"/>
                 </a:solidFill>
               </a:rPr>
               <a:t>0 %</a:t>
@@ -8370,13 +8793,13 @@
       </p:sp>
       <p:sp>
         <p:nvSpPr>
-          <p:cNvPr id="16" name="안내"/>
+          <p:cNvPr id="21" name="안내"/>
           <p:cNvSpPr txBox="1"/>
           <p:nvPr/>
         </p:nvSpPr>
         <p:spPr>
           <a:xfrm>
-            <a:off x="640080" y="4709160"/>
+            <a:off x="640080" y="4892040"/>
             <a:ext cx="10911535" cy="365760"/>
           </a:xfrm>
           <a:prstGeom prst="rect">
@@ -8420,7 +8843,7 @@
     <p:bg>
       <p:bgPr>
         <a:solidFill>
-          <a:srgbClr val="EEF5FC"/>
+          <a:srgbClr val="FFFFFF"/>
         </a:solidFill>
         <a:effectLst/>
       </p:bgPr>
@@ -8439,18 +8862,82 @@
           <p:nvPr/>
         </p:nvSpPr>
         <p:spPr>
-          <a:xfrm rot="10800000">
-            <a:off x="10637215" y="0"/>
-            <a:ext cx="914400" cy="1554480"/>
-          </a:xfrm>
-          <a:prstGeom prst="round2SameRect">
-            <a:avLst>
-              <a:gd name="adj1" fmla="val 50000"/>
-              <a:gd name="adj2" fmla="val 0"/>
-            </a:avLst>
+          <a:xfrm>
+            <a:off x="10180015" y="-1645920"/>
+            <a:ext cx="3474720" cy="3474720"/>
+          </a:xfrm>
+          <a:prstGeom prst="ellipse">
+            <a:avLst/>
           </a:prstGeom>
           <a:solidFill>
-            <a:srgbClr val="D1E7FA"/>
+            <a:srgbClr val="A5CFF3"/>
+          </a:solidFill>
+          <a:ln>
+            <a:noFill/>
+          </a:ln>
+        </p:spPr>
+        <p:txBody>
+          <a:bodyPr rtlCol="0" anchor="ctr"/>
+          <a:lstStyle/>
+          <a:p>
+            <a:pPr algn="ctr"/>
+          </a:p>
+        </p:txBody>
+      </p:sp>
+      <p:sp>
+        <p:nvSpPr>
+          <p:cNvPr id="4" name="상단 라벨"/>
+          <p:cNvSpPr txBox="1"/>
+          <p:nvPr/>
+        </p:nvSpPr>
+        <p:spPr>
+          <a:xfrm>
+            <a:off x="640080" y="274320"/>
+            <a:ext cx="5486400" cy="274320"/>
+          </a:xfrm>
+          <a:prstGeom prst="rect">
+            <a:avLst/>
+          </a:prstGeom>
+          <a:noFill/>
+        </p:spPr>
+        <p:txBody>
+          <a:bodyPr wrap="square" lIns="54864" rIns="54864" tIns="27432" bIns="27432" anchor="ctr">
+            <a:noAutofit/>
+          </a:bodyPr>
+          <a:lstStyle/>
+          <a:p>
+            <a:pPr algn="l">
+              <a:lnSpc>
+                <a:spcPct val="115000"/>
+              </a:lnSpc>
+            </a:pPr>
+            <a:r>
+              <a:rPr sz="900" b="1" i="0" spc="250">
+                <a:solidFill>
+                  <a:srgbClr val="26231F"/>
+                </a:solidFill>
+              </a:rPr>
+              <a:t>INSURANCE CHECK</a:t>
+            </a:r>
+          </a:p>
+        </p:txBody>
+      </p:sp>
+      <p:sp>
+        <p:nvSpPr>
+          <p:cNvPr id="5" name="포인트"/>
+          <p:cNvSpPr/>
+          <p:nvPr/>
+        </p:nvSpPr>
+        <p:spPr>
+          <a:xfrm>
+            <a:off x="11048695" y="502919"/>
+            <a:ext cx="274320" cy="274320"/>
+          </a:xfrm>
+          <a:prstGeom prst="mathPlus">
+            <a:avLst/>
+          </a:prstGeom>
+          <a:solidFill>
+            <a:srgbClr val="FFFFFF"/>
           </a:solidFill>
           <a:ln>
             <a:noFill/>
@@ -8476,8 +8963,8 @@
         </p:nvSpPr>
         <p:spPr>
           <a:xfrm>
-            <a:off x="640080" y="457200"/>
-            <a:ext cx="9722815" cy="868680"/>
+            <a:off x="640080" y="658368"/>
+            <a:ext cx="9082735" cy="868680"/>
           </a:xfrm>
         </p:spPr>
         <p:txBody>
@@ -8494,7 +8981,7 @@
             <a:r>
               <a:rPr sz="3000" b="1" i="0">
                 <a:solidFill>
-                  <a:srgbClr val="113B5F"/>
+                  <a:srgbClr val="26231F"/>
                 </a:solidFill>
               </a:rPr>
               <a:t>점검 메모와 다음 할 일</a:t>
@@ -8504,24 +8991,24 @@
       </p:sp>
       <p:sp>
         <p:nvSpPr>
-          <p:cNvPr id="4" name="카드 1"/>
+          <p:cNvPr id="6" name="카드 1"/>
           <p:cNvSpPr/>
           <p:nvPr/>
         </p:nvSpPr>
         <p:spPr>
           <a:xfrm>
-            <a:off x="640080" y="1600200"/>
-            <a:ext cx="3484778" cy="4160520"/>
+            <a:off x="640080" y="1783080"/>
+            <a:ext cx="3484778" cy="3931920"/>
           </a:xfrm>
           <a:prstGeom prst="roundRect">
             <a:avLst>
-              <a:gd name="adj" fmla="val 8000"/>
+              <a:gd name="adj" fmla="val 3000"/>
             </a:avLst>
           </a:prstGeom>
           <a:solidFill>
-            <a:srgbClr val="EEF5FC"/>
+            <a:srgbClr val="FFFFFF"/>
           </a:solidFill>
-          <a:ln w="15875">
+          <a:ln w="9525">
             <a:solidFill>
               <a:srgbClr val="D1E7FA"/>
             </a:solidFill>
@@ -8537,20 +9024,49 @@
       </p:sp>
       <p:sp>
         <p:nvSpPr>
-          <p:cNvPr id="5" name="번호 1"/>
+          <p:cNvPr id="7" name="위쪽 띠"/>
           <p:cNvSpPr/>
           <p:nvPr/>
         </p:nvSpPr>
         <p:spPr>
           <a:xfrm>
-            <a:off x="822959" y="1783080"/>
+            <a:off x="649224" y="1792224"/>
+            <a:ext cx="3466490" cy="82296"/>
+          </a:xfrm>
+          <a:prstGeom prst="rect">
+            <a:avLst/>
+          </a:prstGeom>
+          <a:solidFill>
+            <a:srgbClr val="7BB6EA"/>
+          </a:solidFill>
+          <a:ln>
+            <a:noFill/>
+          </a:ln>
+        </p:spPr>
+        <p:txBody>
+          <a:bodyPr rtlCol="0" anchor="ctr"/>
+          <a:lstStyle/>
+          <a:p>
+            <a:pPr algn="ctr"/>
+          </a:p>
+        </p:txBody>
+      </p:sp>
+      <p:sp>
+        <p:nvSpPr>
+          <p:cNvPr id="8" name="번호 1"/>
+          <p:cNvSpPr/>
+          <p:nvPr/>
+        </p:nvSpPr>
+        <p:spPr>
+          <a:xfrm>
+            <a:off x="822959" y="1965960"/>
             <a:ext cx="457200" cy="457200"/>
           </a:xfrm>
           <a:prstGeom prst="ellipse">
             <a:avLst/>
           </a:prstGeom>
           <a:solidFill>
-            <a:srgbClr val="267BC5"/>
+            <a:srgbClr val="9FA4EF"/>
           </a:solidFill>
           <a:ln>
             <a:noFill/>
@@ -8570,7 +9086,7 @@
             <a:r>
               <a:rPr sz="1600" b="1" i="0">
                 <a:solidFill>
-                  <a:srgbClr val="FFFFFF"/>
+                  <a:srgbClr val="26231F"/>
                 </a:solidFill>
               </a:rPr>
               <a:t>1</a:t>
@@ -8580,13 +9096,13 @@
       </p:sp>
       <p:sp>
         <p:nvSpPr>
-          <p:cNvPr id="6" name="TextBox 5"/>
+          <p:cNvPr id="9" name="TextBox 8"/>
           <p:cNvSpPr txBox="1"/>
           <p:nvPr/>
         </p:nvSpPr>
         <p:spPr>
           <a:xfrm>
-            <a:off x="777240" y="2377440"/>
+            <a:off x="777240" y="2560320"/>
             <a:ext cx="3210458" cy="640080"/>
           </a:xfrm>
           <a:prstGeom prst="rect">
@@ -8608,7 +9124,7 @@
             <a:r>
               <a:rPr sz="1800" b="1" i="0">
                 <a:solidFill>
-                  <a:srgbClr val="113B5F"/>
+                  <a:srgbClr val="273949"/>
                 </a:solidFill>
               </a:rPr>
               <a:t>확인할 것</a:t>
@@ -8618,14 +9134,14 @@
       </p:sp>
       <p:sp>
         <p:nvSpPr>
-          <p:cNvPr id="7" name="TextBox 6"/>
+          <p:cNvPr id="10" name="TextBox 9"/>
           <p:cNvSpPr txBox="1"/>
           <p:nvPr/>
         </p:nvSpPr>
         <p:spPr>
           <a:xfrm>
-            <a:off x="777240" y="3063240"/>
-            <a:ext cx="3210458" cy="2560320"/>
+            <a:off x="777240" y="3246120"/>
+            <a:ext cx="3210458" cy="2331720"/>
           </a:xfrm>
           <a:prstGeom prst="rect">
             <a:avLst/>
@@ -8646,7 +9162,7 @@
             <a:r>
               <a:rPr sz="1500" b="0" i="0">
                 <a:solidFill>
-                  <a:srgbClr val="2B2B2B"/>
+                  <a:srgbClr val="26231F"/>
                 </a:solidFill>
               </a:rPr>
               <a:t>내용을 입력하세요</a:t>
@@ -8656,24 +9172,24 @@
       </p:sp>
       <p:sp>
         <p:nvSpPr>
-          <p:cNvPr id="8" name="카드 2"/>
+          <p:cNvPr id="11" name="카드 2"/>
           <p:cNvSpPr/>
           <p:nvPr/>
         </p:nvSpPr>
         <p:spPr>
           <a:xfrm>
-            <a:off x="4353458" y="1600200"/>
-            <a:ext cx="3484778" cy="4160520"/>
+            <a:off x="4353458" y="1783080"/>
+            <a:ext cx="3484778" cy="3931920"/>
           </a:xfrm>
           <a:prstGeom prst="roundRect">
             <a:avLst>
-              <a:gd name="adj" fmla="val 8000"/>
+              <a:gd name="adj" fmla="val 3000"/>
             </a:avLst>
           </a:prstGeom>
           <a:solidFill>
-            <a:srgbClr val="EEF5FC"/>
+            <a:srgbClr val="FFFFFF"/>
           </a:solidFill>
-          <a:ln w="15875">
+          <a:ln w="9525">
             <a:solidFill>
               <a:srgbClr val="D1E7FA"/>
             </a:solidFill>
@@ -8689,20 +9205,49 @@
       </p:sp>
       <p:sp>
         <p:nvSpPr>
-          <p:cNvPr id="9" name="번호 2"/>
+          <p:cNvPr id="12" name="위쪽 띠"/>
           <p:cNvSpPr/>
           <p:nvPr/>
         </p:nvSpPr>
         <p:spPr>
           <a:xfrm>
-            <a:off x="4536338" y="1783080"/>
+            <a:off x="4362602" y="1792224"/>
+            <a:ext cx="3466490" cy="82296"/>
+          </a:xfrm>
+          <a:prstGeom prst="rect">
+            <a:avLst/>
+          </a:prstGeom>
+          <a:solidFill>
+            <a:srgbClr val="7BB6EA"/>
+          </a:solidFill>
+          <a:ln>
+            <a:noFill/>
+          </a:ln>
+        </p:spPr>
+        <p:txBody>
+          <a:bodyPr rtlCol="0" anchor="ctr"/>
+          <a:lstStyle/>
+          <a:p>
+            <a:pPr algn="ctr"/>
+          </a:p>
+        </p:txBody>
+      </p:sp>
+      <p:sp>
+        <p:nvSpPr>
+          <p:cNvPr id="13" name="번호 2"/>
+          <p:cNvSpPr/>
+          <p:nvPr/>
+        </p:nvSpPr>
+        <p:spPr>
+          <a:xfrm>
+            <a:off x="4536338" y="1965960"/>
             <a:ext cx="457200" cy="457200"/>
           </a:xfrm>
           <a:prstGeom prst="ellipse">
             <a:avLst/>
           </a:prstGeom>
           <a:solidFill>
-            <a:srgbClr val="267BC5"/>
+            <a:srgbClr val="9FA4EF"/>
           </a:solidFill>
           <a:ln>
             <a:noFill/>
@@ -8722,7 +9267,7 @@
             <a:r>
               <a:rPr sz="1600" b="1" i="0">
                 <a:solidFill>
-                  <a:srgbClr val="FFFFFF"/>
+                  <a:srgbClr val="26231F"/>
                 </a:solidFill>
               </a:rPr>
               <a:t>2</a:t>
@@ -8732,13 +9277,13 @@
       </p:sp>
       <p:sp>
         <p:nvSpPr>
-          <p:cNvPr id="10" name="TextBox 9"/>
+          <p:cNvPr id="14" name="TextBox 13"/>
           <p:cNvSpPr txBox="1"/>
           <p:nvPr/>
         </p:nvSpPr>
         <p:spPr>
           <a:xfrm>
-            <a:off x="4490618" y="2377440"/>
+            <a:off x="4490618" y="2560320"/>
             <a:ext cx="3210458" cy="640080"/>
           </a:xfrm>
           <a:prstGeom prst="rect">
@@ -8760,7 +9305,7 @@
             <a:r>
               <a:rPr sz="1800" b="1" i="0">
                 <a:solidFill>
-                  <a:srgbClr val="113B5F"/>
+                  <a:srgbClr val="273949"/>
                 </a:solidFill>
               </a:rPr>
               <a:t>문의할 것</a:t>
@@ -8770,14 +9315,14 @@
       </p:sp>
       <p:sp>
         <p:nvSpPr>
-          <p:cNvPr id="11" name="TextBox 10"/>
+          <p:cNvPr id="15" name="TextBox 14"/>
           <p:cNvSpPr txBox="1"/>
           <p:nvPr/>
         </p:nvSpPr>
         <p:spPr>
           <a:xfrm>
-            <a:off x="4490618" y="3063240"/>
-            <a:ext cx="3210458" cy="2560320"/>
+            <a:off x="4490618" y="3246120"/>
+            <a:ext cx="3210458" cy="2331720"/>
           </a:xfrm>
           <a:prstGeom prst="rect">
             <a:avLst/>
@@ -8798,7 +9343,7 @@
             <a:r>
               <a:rPr sz="1500" b="0" i="0">
                 <a:solidFill>
-                  <a:srgbClr val="2B2B2B"/>
+                  <a:srgbClr val="26231F"/>
                 </a:solidFill>
               </a:rPr>
               <a:t>내용을 입력하세요</a:t>
@@ -8808,24 +9353,24 @@
       </p:sp>
       <p:sp>
         <p:nvSpPr>
-          <p:cNvPr id="12" name="카드 3"/>
+          <p:cNvPr id="16" name="카드 3"/>
           <p:cNvSpPr/>
           <p:nvPr/>
         </p:nvSpPr>
         <p:spPr>
           <a:xfrm>
-            <a:off x="8066836" y="1600200"/>
-            <a:ext cx="3484778" cy="4160520"/>
+            <a:off x="8066836" y="1783080"/>
+            <a:ext cx="3484778" cy="3931920"/>
           </a:xfrm>
           <a:prstGeom prst="roundRect">
             <a:avLst>
-              <a:gd name="adj" fmla="val 8000"/>
+              <a:gd name="adj" fmla="val 3000"/>
             </a:avLst>
           </a:prstGeom>
           <a:solidFill>
-            <a:srgbClr val="EEF5FC"/>
+            <a:srgbClr val="FFFFFF"/>
           </a:solidFill>
-          <a:ln w="15875">
+          <a:ln w="9525">
             <a:solidFill>
               <a:srgbClr val="D1E7FA"/>
             </a:solidFill>
@@ -8841,20 +9386,49 @@
       </p:sp>
       <p:sp>
         <p:nvSpPr>
-          <p:cNvPr id="13" name="번호 3"/>
+          <p:cNvPr id="17" name="위쪽 띠"/>
           <p:cNvSpPr/>
           <p:nvPr/>
         </p:nvSpPr>
         <p:spPr>
           <a:xfrm>
-            <a:off x="8249716" y="1783080"/>
+            <a:off x="8075980" y="1792224"/>
+            <a:ext cx="3466490" cy="82296"/>
+          </a:xfrm>
+          <a:prstGeom prst="rect">
+            <a:avLst/>
+          </a:prstGeom>
+          <a:solidFill>
+            <a:srgbClr val="7BB6EA"/>
+          </a:solidFill>
+          <a:ln>
+            <a:noFill/>
+          </a:ln>
+        </p:spPr>
+        <p:txBody>
+          <a:bodyPr rtlCol="0" anchor="ctr"/>
+          <a:lstStyle/>
+          <a:p>
+            <a:pPr algn="ctr"/>
+          </a:p>
+        </p:txBody>
+      </p:sp>
+      <p:sp>
+        <p:nvSpPr>
+          <p:cNvPr id="18" name="번호 3"/>
+          <p:cNvSpPr/>
+          <p:nvPr/>
+        </p:nvSpPr>
+        <p:spPr>
+          <a:xfrm>
+            <a:off x="8249716" y="1965960"/>
             <a:ext cx="457200" cy="457200"/>
           </a:xfrm>
           <a:prstGeom prst="ellipse">
             <a:avLst/>
           </a:prstGeom>
           <a:solidFill>
-            <a:srgbClr val="267BC5"/>
+            <a:srgbClr val="9FA4EF"/>
           </a:solidFill>
           <a:ln>
             <a:noFill/>
@@ -8874,7 +9448,7 @@
             <a:r>
               <a:rPr sz="1600" b="1" i="0">
                 <a:solidFill>
-                  <a:srgbClr val="FFFFFF"/>
+                  <a:srgbClr val="26231F"/>
                 </a:solidFill>
               </a:rPr>
               <a:t>3</a:t>
@@ -8884,13 +9458,13 @@
       </p:sp>
       <p:sp>
         <p:nvSpPr>
-          <p:cNvPr id="14" name="TextBox 13"/>
+          <p:cNvPr id="19" name="TextBox 18"/>
           <p:cNvSpPr txBox="1"/>
           <p:nvPr/>
         </p:nvSpPr>
         <p:spPr>
           <a:xfrm>
-            <a:off x="8203996" y="2377440"/>
+            <a:off x="8203996" y="2560320"/>
             <a:ext cx="3210458" cy="640080"/>
           </a:xfrm>
           <a:prstGeom prst="rect">
@@ -8912,7 +9486,7 @@
             <a:r>
               <a:rPr sz="1800" b="1" i="0">
                 <a:solidFill>
-                  <a:srgbClr val="113B5F"/>
+                  <a:srgbClr val="273949"/>
                 </a:solidFill>
               </a:rPr>
               <a:t>정리할 날짜</a:t>
@@ -8922,14 +9496,14 @@
       </p:sp>
       <p:sp>
         <p:nvSpPr>
-          <p:cNvPr id="15" name="TextBox 14"/>
+          <p:cNvPr id="20" name="TextBox 19"/>
           <p:cNvSpPr txBox="1"/>
           <p:nvPr/>
         </p:nvSpPr>
         <p:spPr>
           <a:xfrm>
-            <a:off x="8203996" y="3063240"/>
-            <a:ext cx="3210458" cy="2560320"/>
+            <a:off x="8203996" y="3246120"/>
+            <a:ext cx="3210458" cy="2331720"/>
           </a:xfrm>
           <a:prstGeom prst="rect">
             <a:avLst/>
@@ -8950,7 +9524,7 @@
             <a:r>
               <a:rPr sz="1500" b="0" i="0">
                 <a:solidFill>
-                  <a:srgbClr val="2B2B2B"/>
+                  <a:srgbClr val="26231F"/>
                 </a:solidFill>
               </a:rPr>
               <a:t>내용을 입력하세요</a:t>
@@ -8960,13 +9534,13 @@
       </p:sp>
       <p:sp>
         <p:nvSpPr>
-          <p:cNvPr id="16" name="안내 문구"/>
+          <p:cNvPr id="21" name="안내 문구"/>
           <p:cNvSpPr txBox="1"/>
           <p:nvPr/>
         </p:nvSpPr>
         <p:spPr>
           <a:xfrm>
-            <a:off x="640080" y="5852160"/>
+            <a:off x="640080" y="5806440"/>
             <a:ext cx="10911535" cy="548640"/>
           </a:xfrm>
           <a:prstGeom prst="rect">
@@ -9015,34 +9589,34 @@
         <a:sysClr val="window" lastClr="FFFFFF"/>
       </a:lt1>
       <a:dk2>
-        <a:srgbClr val="113B5F"/>
+        <a:srgbClr val="273949"/>
       </a:dk2>
       <a:lt2>
-        <a:srgbClr val="EEF5FC"/>
+        <a:srgbClr val="EAF4FD"/>
       </a:lt2>
       <a:accent1>
-        <a:srgbClr val="267BC5"/>
+        <a:srgbClr val="7BB6EA"/>
       </a:accent1>
       <a:accent2>
-        <a:srgbClr val="209DB6"/>
+        <a:srgbClr val="9FA4EF"/>
       </a:accent2>
       <a:accent3>
-        <a:srgbClr val="113B5F"/>
+        <a:srgbClr val="273949"/>
       </a:accent3>
       <a:accent4>
         <a:srgbClr val="D1E7FA"/>
       </a:accent4>
       <a:accent5>
-        <a:srgbClr val="238CBE"/>
+        <a:srgbClr val="8DADEC"/>
       </a:accent5>
       <a:accent6>
-        <a:srgbClr val="70899F"/>
+        <a:srgbClr val="7D8892"/>
       </a:accent6>
       <a:hlink>
-        <a:srgbClr val="267BC5"/>
+        <a:srgbClr val="7BB6EA"/>
       </a:hlink>
       <a:folHlink>
-        <a:srgbClr val="113B5F"/>
+        <a:srgbClr val="273949"/>
       </a:folHlink>
     </a:clrScheme>
     <a:fontScheme name="Office">
